--- a/weekly_report_template/out/التقرير_الأسبوعي_مثال.pptx
+++ b/weekly_report_template/out/التقرير_الأسبوعي_مثال.pptx
@@ -577,71 +577,6 @@
       </p:grpSpPr>
       <p:sp>
         <p:nvSpPr>
-          <p:cNvPr id="2" name="Date Placeholder 1"/>
-          <p:cNvSpPr>
-            <a:spLocks noGrp="1"/>
-          </p:cNvSpPr>
-          <p:nvPr>
-            <p:ph type="dt" sz="half" idx="10"/>
-          </p:nvPr>
-        </p:nvSpPr>
-        <p:spPr/>
-        <p:txBody>
-          <a:bodyPr/>
-          <a:lstStyle/>
-          <a:p>
-            <a:fld id="{5BCAD085-E8A6-8845-BD4E-CB4CCA059FC4}" type="datetimeFigureOut">
-              <a:rPr lang="en-US" smtClean="0"/>
-              <a:t>1/27/13</a:t>
-            </a:fld>
-            <a:endParaRPr lang="en-US"/>
-          </a:p>
-        </p:txBody>
-      </p:sp>
-      <p:sp>
-        <p:nvSpPr>
-          <p:cNvPr id="3" name="Footer Placeholder 2"/>
-          <p:cNvSpPr>
-            <a:spLocks noGrp="1"/>
-          </p:cNvSpPr>
-          <p:nvPr>
-            <p:ph type="ftr" sz="quarter" idx="11"/>
-          </p:nvPr>
-        </p:nvSpPr>
-        <p:spPr/>
-        <p:txBody>
-          <a:bodyPr/>
-          <a:lstStyle/>
-          <a:p>
-            <a:endParaRPr lang="en-US"/>
-          </a:p>
-        </p:txBody>
-      </p:sp>
-      <p:sp>
-        <p:nvSpPr>
-          <p:cNvPr id="4" name="Slide Number Placeholder 3"/>
-          <p:cNvSpPr>
-            <a:spLocks noGrp="1"/>
-          </p:cNvSpPr>
-          <p:nvPr>
-            <p:ph type="sldNum" sz="quarter" idx="12"/>
-          </p:nvPr>
-        </p:nvSpPr>
-        <p:spPr/>
-        <p:txBody>
-          <a:bodyPr/>
-          <a:lstStyle/>
-          <a:p>
-            <a:fld id="{C1FF6DA9-008F-8B48-92A6-B652298478BF}" type="slidenum">
-              <a:rPr lang="en-US" smtClean="0"/>
-              <a:t>‹#›</a:t>
-            </a:fld>
-            <a:endParaRPr lang="en-US"/>
-          </a:p>
-        </p:txBody>
-      </p:sp>
-      <p:sp>
-        <p:nvSpPr>
           <p:cNvPr id="2" name="لوحة الترويسة"/>
           <p:cNvSpPr/>
           <p:nvPr/>
@@ -678,8 +613,8 @@
         </p:nvCxnSpPr>
         <p:spPr>
           <a:xfrm flipV="1">
-            <a:off x="1995314" y="286600"/>
-            <a:ext cx="298126" cy="52538"/>
+            <a:off x="1638000" y="396000"/>
+            <a:ext cx="198000" cy="234000"/>
           </a:xfrm>
           <a:prstGeom prst="line">
             <a:avLst/>
@@ -687,7 +622,7 @@
           <a:ln w="6350" cap="rnd">
             <a:solidFill>
               <a:srgbClr val="66CCFF">
-                <a:alpha val="38000"/>
+                <a:alpha val="30000"/>
               </a:srgbClr>
             </a:solidFill>
             <a:round/>
@@ -702,8 +637,8 @@
         </p:nvCxnSpPr>
         <p:spPr>
           <a:xfrm>
-            <a:off x="2293440" y="286600"/>
-            <a:ext cx="316038" cy="155922"/>
+            <a:off x="1836000" y="396000"/>
+            <a:ext cx="216000" cy="126000"/>
           </a:xfrm>
           <a:prstGeom prst="line">
             <a:avLst/>
@@ -711,7 +646,7 @@
           <a:ln w="6350" cap="rnd">
             <a:solidFill>
               <a:srgbClr val="66CCFF">
-                <a:alpha val="38000"/>
+                <a:alpha val="30000"/>
               </a:srgbClr>
             </a:solidFill>
             <a:round/>
@@ -726,8 +661,8 @@
         </p:nvCxnSpPr>
         <p:spPr>
           <a:xfrm flipV="1">
-            <a:off x="2609479" y="229691"/>
-            <a:ext cx="171474" cy="212831"/>
+            <a:off x="2052000" y="234000"/>
+            <a:ext cx="198000" cy="288000"/>
           </a:xfrm>
           <a:prstGeom prst="line">
             <a:avLst/>
@@ -735,7 +670,7 @@
           <a:ln w="6350" cap="rnd">
             <a:solidFill>
               <a:srgbClr val="66CCFF">
-                <a:alpha val="38000"/>
+                <a:alpha val="30000"/>
               </a:srgbClr>
             </a:solidFill>
             <a:round/>
@@ -750,8 +685,8 @@
         </p:nvCxnSpPr>
         <p:spPr>
           <a:xfrm>
-            <a:off x="1866684" y="491843"/>
-            <a:ext cx="30558" cy="53554"/>
+            <a:off x="2250000" y="234000"/>
+            <a:ext cx="216000" cy="126000"/>
           </a:xfrm>
           <a:prstGeom prst="line">
             <a:avLst/>
@@ -759,7 +694,7 @@
           <a:ln w="6350" cap="rnd">
             <a:solidFill>
               <a:srgbClr val="66CCFF">
-                <a:alpha val="38000"/>
+                <a:alpha val="30000"/>
               </a:srgbClr>
             </a:solidFill>
             <a:round/>
@@ -774,8 +709,8 @@
         </p:nvCxnSpPr>
         <p:spPr>
           <a:xfrm flipV="1">
-            <a:off x="1897242" y="339138"/>
-            <a:ext cx="98073" cy="206259"/>
+            <a:off x="2466000" y="90000"/>
+            <a:ext cx="198000" cy="270000"/>
           </a:xfrm>
           <a:prstGeom prst="line">
             <a:avLst/>
@@ -783,7 +718,7 @@
           <a:ln w="6350" cap="rnd">
             <a:solidFill>
               <a:srgbClr val="66CCFF">
-                <a:alpha val="38000"/>
+                <a:alpha val="30000"/>
               </a:srgbClr>
             </a:solidFill>
             <a:round/>
@@ -797,9 +732,9 @@
           <p:nvPr/>
         </p:nvCxnSpPr>
         <p:spPr>
-          <a:xfrm flipV="1">
-            <a:off x="1866684" y="339138"/>
-            <a:ext cx="128631" cy="152705"/>
+          <a:xfrm>
+            <a:off x="2664000" y="90000"/>
+            <a:ext cx="198000" cy="162000"/>
           </a:xfrm>
           <a:prstGeom prst="line">
             <a:avLst/>
@@ -807,7 +742,7 @@
           <a:ln w="6350" cap="rnd">
             <a:solidFill>
               <a:srgbClr val="66CCFF">
-                <a:alpha val="38000"/>
+                <a:alpha val="30000"/>
               </a:srgbClr>
             </a:solidFill>
             <a:round/>
@@ -821,9 +756,9 @@
           <p:nvPr/>
         </p:nvCxnSpPr>
         <p:spPr>
-          <a:xfrm>
-            <a:off x="1914913" y="242956"/>
-            <a:ext cx="80402" cy="96182"/>
+          <a:xfrm flipV="1">
+            <a:off x="2862000" y="28800"/>
+            <a:ext cx="180000" cy="223200"/>
           </a:xfrm>
           <a:prstGeom prst="line">
             <a:avLst/>
@@ -831,7 +766,7 @@
           <a:ln w="6350" cap="rnd">
             <a:solidFill>
               <a:srgbClr val="66CCFF">
-                <a:alpha val="38000"/>
+                <a:alpha val="30000"/>
               </a:srgbClr>
             </a:solidFill>
             <a:round/>
@@ -846,8 +781,8 @@
         </p:nvCxnSpPr>
         <p:spPr>
           <a:xfrm>
-            <a:off x="2443503" y="777216"/>
-            <a:ext cx="302423" cy="87713"/>
+            <a:off x="2052000" y="522000"/>
+            <a:ext cx="126000" cy="252000"/>
           </a:xfrm>
           <a:prstGeom prst="line">
             <a:avLst/>
@@ -855,30 +790,54 @@
           <a:ln w="6350" cap="rnd">
             <a:solidFill>
               <a:srgbClr val="66CCFF">
-                <a:alpha val="38000"/>
+                <a:alpha val="30000"/>
               </a:srgbClr>
             </a:solidFill>
             <a:round/>
           </a:ln>
         </p:spPr>
       </p:cxnSp>
-      <p:sp>
-        <p:nvSpPr>
-          <p:cNvPr id="11" name="عقدة زخرفية"/>
+      <p:cxnSp>
+        <p:nvCxnSpPr>
+          <p:cNvPr id="11" name="خط زخرفي"/>
+          <p:cNvCxnSpPr/>
+          <p:nvPr/>
+        </p:nvCxnSpPr>
+        <p:spPr>
+          <a:xfrm>
+            <a:off x="2466000" y="360000"/>
+            <a:ext cx="108000" cy="234000"/>
+          </a:xfrm>
+          <a:prstGeom prst="line">
+            <a:avLst/>
+          </a:prstGeom>
+          <a:ln w="6350" cap="rnd">
+            <a:solidFill>
+              <a:srgbClr val="66CCFF">
+                <a:alpha val="30000"/>
+              </a:srgbClr>
+            </a:solidFill>
+            <a:round/>
+          </a:ln>
+        </p:spPr>
+      </p:cxnSp>
+      <p:sp>
+        <p:nvSpPr>
+          <p:cNvPr id="12" name="عقدة زخرفية"/>
           <p:cNvSpPr/>
           <p:nvPr/>
         </p:nvSpPr>
         <p:spPr>
           <a:xfrm>
-            <a:off x="2239440" y="232600"/>
-            <a:ext cx="108000" cy="108000"/>
+            <a:off x="1580400" y="572400"/>
+            <a:ext cx="115200" cy="115200"/>
           </a:xfrm>
           <a:prstGeom prst="ellipse">
             <a:avLst/>
           </a:prstGeom>
           <a:solidFill>
             <a:srgbClr val="66CCFF">
-              <a:alpha val="65000"/>
+              <a:alpha val="55000"/>
             </a:srgbClr>
           </a:solidFill>
           <a:ln>
@@ -888,21 +847,21 @@
       </p:sp>
       <p:sp>
         <p:nvSpPr>
-          <p:cNvPr id="12" name="عقدة زخرفية"/>
+          <p:cNvPr id="13" name="عقدة زخرفية"/>
           <p:cNvSpPr/>
           <p:nvPr/>
         </p:nvSpPr>
         <p:spPr>
           <a:xfrm>
-            <a:off x="2748553" y="197291"/>
-            <a:ext cx="64800" cy="64800"/>
+            <a:off x="1800000" y="360000"/>
+            <a:ext cx="72000" cy="72000"/>
           </a:xfrm>
           <a:prstGeom prst="ellipse">
             <a:avLst/>
           </a:prstGeom>
           <a:solidFill>
             <a:srgbClr val="66CCFF">
-              <a:alpha val="65000"/>
+              <a:alpha val="55000"/>
             </a:srgbClr>
           </a:solidFill>
           <a:ln>
@@ -912,21 +871,21 @@
       </p:sp>
       <p:sp>
         <p:nvSpPr>
-          <p:cNvPr id="13" name="عقدة زخرفية"/>
+          <p:cNvPr id="14" name="عقدة زخرفية"/>
           <p:cNvSpPr/>
           <p:nvPr/>
         </p:nvSpPr>
         <p:spPr>
           <a:xfrm>
-            <a:off x="2577079" y="410122"/>
-            <a:ext cx="64800" cy="64800"/>
+            <a:off x="2016000" y="486000"/>
+            <a:ext cx="72000" cy="72000"/>
           </a:xfrm>
           <a:prstGeom prst="ellipse">
             <a:avLst/>
           </a:prstGeom>
           <a:solidFill>
             <a:srgbClr val="66CCFF">
-              <a:alpha val="65000"/>
+              <a:alpha val="55000"/>
             </a:srgbClr>
           </a:solidFill>
           <a:ln>
@@ -936,21 +895,21 @@
       </p:sp>
       <p:sp>
         <p:nvSpPr>
-          <p:cNvPr id="14" name="عقدة زخرفية"/>
+          <p:cNvPr id="15" name="عقدة زخرفية"/>
           <p:cNvSpPr/>
           <p:nvPr/>
         </p:nvSpPr>
         <p:spPr>
           <a:xfrm>
-            <a:off x="1843242" y="491397"/>
-            <a:ext cx="108000" cy="108000"/>
+            <a:off x="2192400" y="176400"/>
+            <a:ext cx="115200" cy="115200"/>
           </a:xfrm>
           <a:prstGeom prst="ellipse">
             <a:avLst/>
           </a:prstGeom>
           <a:solidFill>
-            <a:srgbClr val="66CCFF">
-              <a:alpha val="65000"/>
+            <a:srgbClr val="33CC99">
+              <a:alpha val="55000"/>
             </a:srgbClr>
           </a:solidFill>
           <a:ln>
@@ -960,21 +919,21 @@
       </p:sp>
       <p:sp>
         <p:nvSpPr>
-          <p:cNvPr id="15" name="عقدة زخرفية"/>
+          <p:cNvPr id="16" name="عقدة زخرفية"/>
           <p:cNvSpPr/>
           <p:nvPr/>
         </p:nvSpPr>
         <p:spPr>
           <a:xfrm>
-            <a:off x="1834284" y="459443"/>
-            <a:ext cx="64800" cy="64800"/>
+            <a:off x="2430000" y="324000"/>
+            <a:ext cx="72000" cy="72000"/>
           </a:xfrm>
           <a:prstGeom prst="ellipse">
             <a:avLst/>
           </a:prstGeom>
           <a:solidFill>
             <a:srgbClr val="66CCFF">
-              <a:alpha val="65000"/>
+              <a:alpha val="55000"/>
             </a:srgbClr>
           </a:solidFill>
           <a:ln>
@@ -984,21 +943,21 @@
       </p:sp>
       <p:sp>
         <p:nvSpPr>
-          <p:cNvPr id="16" name="عقدة زخرفية"/>
+          <p:cNvPr id="17" name="عقدة زخرفية"/>
           <p:cNvSpPr/>
           <p:nvPr/>
         </p:nvSpPr>
         <p:spPr>
           <a:xfrm>
-            <a:off x="1882513" y="210556"/>
-            <a:ext cx="64800" cy="64800"/>
+            <a:off x="2628000" y="54000"/>
+            <a:ext cx="72000" cy="72000"/>
           </a:xfrm>
           <a:prstGeom prst="ellipse">
             <a:avLst/>
           </a:prstGeom>
           <a:solidFill>
             <a:srgbClr val="66CCFF">
-              <a:alpha val="65000"/>
+              <a:alpha val="55000"/>
             </a:srgbClr>
           </a:solidFill>
           <a:ln>
@@ -1008,21 +967,21 @@
       </p:sp>
       <p:sp>
         <p:nvSpPr>
-          <p:cNvPr id="17" name="عقدة زخرفية"/>
+          <p:cNvPr id="18" name="عقدة زخرفية"/>
           <p:cNvSpPr/>
           <p:nvPr/>
         </p:nvSpPr>
         <p:spPr>
           <a:xfrm>
-            <a:off x="2389503" y="723216"/>
-            <a:ext cx="108000" cy="108000"/>
+            <a:off x="2804400" y="194400"/>
+            <a:ext cx="115200" cy="115200"/>
           </a:xfrm>
           <a:prstGeom prst="ellipse">
             <a:avLst/>
           </a:prstGeom>
           <a:solidFill>
-            <a:srgbClr val="66CCFF">
-              <a:alpha val="65000"/>
+            <a:srgbClr val="6459A7">
+              <a:alpha val="55000"/>
             </a:srgbClr>
           </a:solidFill>
           <a:ln>
@@ -1032,21 +991,21 @@
       </p:sp>
       <p:sp>
         <p:nvSpPr>
-          <p:cNvPr id="18" name="عقدة زخرفية"/>
+          <p:cNvPr id="19" name="عقدة زخرفية"/>
           <p:cNvSpPr/>
           <p:nvPr/>
         </p:nvSpPr>
         <p:spPr>
           <a:xfrm>
-            <a:off x="1962914" y="306738"/>
-            <a:ext cx="64800" cy="64800"/>
+            <a:off x="3006000" y="-7200"/>
+            <a:ext cx="72000" cy="72000"/>
           </a:xfrm>
           <a:prstGeom prst="ellipse">
             <a:avLst/>
           </a:prstGeom>
           <a:solidFill>
             <a:srgbClr val="66CCFF">
-              <a:alpha val="65000"/>
+              <a:alpha val="55000"/>
             </a:srgbClr>
           </a:solidFill>
           <a:ln>
@@ -1056,21 +1015,21 @@
       </p:sp>
       <p:sp>
         <p:nvSpPr>
-          <p:cNvPr id="19" name="عقدة زخرفية"/>
+          <p:cNvPr id="20" name="عقدة زخرفية"/>
           <p:cNvSpPr/>
           <p:nvPr/>
         </p:nvSpPr>
         <p:spPr>
           <a:xfrm>
-            <a:off x="2713526" y="832529"/>
-            <a:ext cx="64800" cy="64800"/>
+            <a:off x="2142000" y="738000"/>
+            <a:ext cx="72000" cy="72000"/>
           </a:xfrm>
           <a:prstGeom prst="ellipse">
             <a:avLst/>
           </a:prstGeom>
           <a:solidFill>
             <a:srgbClr val="66CCFF">
-              <a:alpha val="65000"/>
+              <a:alpha val="55000"/>
             </a:srgbClr>
           </a:solidFill>
           <a:ln>
@@ -1080,154 +1039,42 @@
       </p:sp>
       <p:sp>
         <p:nvSpPr>
-          <p:cNvPr id="20" name="الشعار"/>
-          <p:cNvSpPr>
-            <a:spLocks noGrp="1"/>
-          </p:cNvSpPr>
-          <p:nvPr>
-            <p:ph type="pic" sz="quarter" idx="40" hasCustomPrompt="1"/>
-          </p:nvPr>
-        </p:nvSpPr>
-        <p:spPr>
-          <a:xfrm>
-            <a:off x="6336000" y="288000"/>
-            <a:ext cx="792000" cy="792000"/>
-          </a:xfrm>
-          <a:prstGeom prst="rect">
-            <a:avLst/>
-          </a:prstGeom>
-          <a:noFill/>
-        </p:spPr>
-        <p:txBody>
-          <a:bodyPr anchor="ctr" lIns="0" tIns="0" rIns="0" bIns="0"/>
-          <a:lstStyle>
-            <a:lvl1pPr algn="ctr" rtl="1">
-              <a:buNone/>
-              <a:defRPr lang="ar-SA" sz="800" dirty="0">
-                <a:solidFill>
-                  <a:srgbClr val="FFFFFF">
-                    <a:alpha val="70000"/>
-                  </a:srgbClr>
-                </a:solidFill>
-                <a:latin typeface="IBM Plex Sans Arabic"/>
-                <a:cs typeface="IBM Plex Sans Arabic"/>
-              </a:defRPr>
-            </a:lvl1pPr>
-          </a:lstStyle>
-          <a:p>
-            <a:r>
-              <a:rPr lang="ar-SA" dirty="0"/>
-              <a:t>الشعار</a:t>
-            </a:r>
-          </a:p>
-        </p:txBody>
-      </p:sp>
-      <p:sp>
-        <p:nvSpPr>
-          <p:cNvPr id="21" name="اسم الجهة"/>
-          <p:cNvSpPr>
-            <a:spLocks noGrp="1"/>
-          </p:cNvSpPr>
-          <p:nvPr>
-            <p:ph type="body" sz="quarter" idx="11" hasCustomPrompt="1"/>
-          </p:nvPr>
-        </p:nvSpPr>
-        <p:spPr>
-          <a:xfrm>
-            <a:off x="3456000" y="306000"/>
-            <a:ext cx="2736000" cy="252000"/>
-          </a:xfrm>
-          <a:prstGeom prst="rect">
-            <a:avLst/>
-          </a:prstGeom>
-          <a:noFill/>
-        </p:spPr>
-        <p:txBody>
-          <a:bodyPr wrap="square" lIns="0" tIns="0" rIns="0" bIns="0" rtlCol="0" anchor="t">
-            <a:normAutofit/>
-          </a:bodyPr>
-          <a:lstStyle>
-            <a:lvl1pPr marL="0" indent="0" algn="r" rtl="1">
-              <a:lnSpc>
-                <a:spcPct val="110000"/>
-              </a:lnSpc>
-              <a:spcAft>
-                <a:spcPts val="0"/>
-              </a:spcAft>
-              <a:buNone/>
-              <a:defRPr lang="ar-SA" sz="950" dirty="0">
-                <a:solidFill>
-                  <a:srgbClr val="FFFFFF"/>
-                </a:solidFill>
-                <a:latin typeface="IBM Plex Sans Arabic"/>
-                <a:cs typeface="IBM Plex Sans Arabic"/>
-              </a:defRPr>
-            </a:lvl1pPr>
-          </a:lstStyle>
-          <a:p>
-            <a:r>
-              <a:rPr lang="ar-SA" dirty="0"/>
-              <a:t>اسم الجهة — الإدارة / القسم</a:t>
-            </a:r>
-          </a:p>
-        </p:txBody>
-      </p:sp>
-      <p:sp>
-        <p:nvSpPr>
-          <p:cNvPr id="22" name="عنوان التقرير"/>
-          <p:cNvSpPr txBox="1"/>
+          <p:cNvPr id="21" name="عقدة زخرفية"/>
+          <p:cNvSpPr/>
           <p:nvPr/>
         </p:nvSpPr>
         <p:spPr>
           <a:xfrm>
-            <a:off x="3456000" y="558000"/>
-            <a:ext cx="2736000" cy="396000"/>
-          </a:xfrm>
-          <a:prstGeom prst="rect">
-            <a:avLst/>
-          </a:prstGeom>
-          <a:noFill/>
+            <a:off x="2516400" y="536400"/>
+            <a:ext cx="115200" cy="115200"/>
+          </a:xfrm>
+          <a:prstGeom prst="ellipse">
+            <a:avLst/>
+          </a:prstGeom>
+          <a:solidFill>
+            <a:srgbClr val="66CCFF">
+              <a:alpha val="55000"/>
+            </a:srgbClr>
+          </a:solidFill>
           <a:ln>
             <a:noFill/>
           </a:ln>
         </p:spPr>
-        <p:txBody>
-          <a:bodyPr wrap="square" lIns="0" tIns="0" rIns="0" bIns="0" rtlCol="0" anchor="ctr"/>
-          <a:lstStyle/>
-          <a:p>
-            <a:pPr marL="0" indent="0" algn="r" rtl="1">
-              <a:lnSpc>
-                <a:spcPct val="100000"/>
-              </a:lnSpc>
-              <a:buNone/>
-            </a:pPr>
-            <a:r>
-              <a:rPr lang="ar-SA" sz="2000" b="1" dirty="0">
-                <a:solidFill>
-                  <a:srgbClr val="FFFFFF"/>
-                </a:solidFill>
-                <a:latin typeface="IBM Plex Sans Arabic"/>
-                <a:cs typeface="IBM Plex Sans Arabic"/>
-              </a:rPr>
-              <a:t>التقرير الأسبوعي للمهام</a:t>
-            </a:r>
-          </a:p>
-        </p:txBody>
-      </p:sp>
-      <p:sp>
-        <p:nvSpPr>
-          <p:cNvPr id="23" name="عداد التقرير"/>
+      </p:sp>
+      <p:sp>
+        <p:nvSpPr>
+          <p:cNvPr id="22" name="عداد التقرير"/>
           <p:cNvSpPr txBox="1"/>
           <p:nvPr/>
         </p:nvSpPr>
         <p:spPr>
           <a:xfrm>
-            <a:off x="432000" y="324000"/>
-            <a:ext cx="1224000" cy="540000"/>
+            <a:off x="432000" y="216000"/>
+            <a:ext cx="1080000" cy="504000"/>
           </a:xfrm>
           <a:prstGeom prst="roundRect">
             <a:avLst>
-              <a:gd name="adj" fmla="val 30000"/>
+              <a:gd name="adj" fmla="val 22000"/>
             </a:avLst>
           </a:prstGeom>
           <a:gradFill rotWithShape="1">
@@ -1246,24 +1093,47 @@
           </a:ln>
         </p:spPr>
         <p:txBody>
-          <a:bodyPr wrap="square" lIns="36000" tIns="0" rIns="36000" bIns="0" rtlCol="0" anchor="ctr"/>
+          <a:bodyPr wrap="square" lIns="36000" tIns="18000" rIns="36000" bIns="18000" rtlCol="0" anchor="ctr"/>
           <a:lstStyle/>
           <a:p>
             <a:pPr marL="0" indent="0" algn="ctr" rtl="1">
+              <a:lnSpc>
+                <a:spcPct val="100000"/>
+              </a:lnSpc>
+              <a:spcBef>
+                <a:spcPts val="0"/>
+              </a:spcBef>
+              <a:spcAft>
+                <a:spcPts val="0"/>
+              </a:spcAft>
               <a:buNone/>
             </a:pPr>
             <a:r>
-              <a:rPr lang="ar-SA" sz="950" b="1" dirty="0">
+              <a:rPr lang="ar-SA" sz="900" b="1" dirty="0">
                 <a:solidFill>
                   <a:srgbClr val="273470"/>
                 </a:solidFill>
                 <a:latin typeface="IBM Plex Sans Arabic"/>
                 <a:cs typeface="IBM Plex Sans Arabic"/>
               </a:rPr>
-              <a:t>تقرير رقم  </a:t>
-            </a:r>
+              <a:t>تقرير رقم</a:t>
+            </a:r>
+          </a:p>
+          <a:p>
+            <a:pPr marL="0" indent="0" algn="ctr" rtl="1">
+              <a:lnSpc>
+                <a:spcPct val="90000"/>
+              </a:lnSpc>
+              <a:spcBef>
+                <a:spcPts val="0"/>
+              </a:spcBef>
+              <a:spcAft>
+                <a:spcPts val="0"/>
+              </a:spcAft>
+              <a:buNone/>
+            </a:pPr>
             <a:fld id="{B6F15528-21DE-4FAA-801E-634DDDAF4B2B}" type="slidenum">
-              <a:rPr lang="en-US" sz="2200" b="1" dirty="0">
+              <a:rPr lang="en-US" sz="1800" b="1" dirty="0">
                 <a:solidFill>
                   <a:srgbClr val="273470"/>
                 </a:solidFill>
@@ -1277,14 +1147,187 @@
       </p:sp>
       <p:sp>
         <p:nvSpPr>
-          <p:cNvPr id="24" name="تسمية: الفترة"/>
+          <p:cNvPr id="23" name="الشعار"/>
+          <p:cNvSpPr>
+            <a:spLocks noGrp="1"/>
+          </p:cNvSpPr>
+          <p:nvPr>
+            <p:ph type="pic" sz="quarter" idx="120" hasCustomPrompt="1"/>
+          </p:nvPr>
+        </p:nvSpPr>
+        <p:spPr>
+          <a:xfrm>
+            <a:off x="6624000" y="180000"/>
+            <a:ext cx="504000" cy="504000"/>
+          </a:xfrm>
+          <a:prstGeom prst="rect">
+            <a:avLst/>
+          </a:prstGeom>
+          <a:noFill/>
+        </p:spPr>
+        <p:txBody>
+          <a:bodyPr anchor="ctr" lIns="0" tIns="0" rIns="0" bIns="0"/>
+          <a:lstStyle>
+            <a:lvl1pPr algn="ctr" rtl="1">
+              <a:buNone/>
+              <a:defRPr lang="ar-SA" sz="800" dirty="0">
+                <a:solidFill>
+                  <a:srgbClr val="FFFFFF">
+                    <a:alpha val="70000"/>
+                  </a:srgbClr>
+                </a:solidFill>
+                <a:latin typeface="IBM Plex Sans Arabic"/>
+                <a:cs typeface="IBM Plex Sans Arabic"/>
+              </a:defRPr>
+            </a:lvl1pPr>
+          </a:lstStyle>
+          <a:p>
+            <a:r>
+              <a:rPr lang="ar-SA" dirty="0"/>
+              <a:t>الشعار</a:t>
+            </a:r>
+          </a:p>
+        </p:txBody>
+      </p:sp>
+      <p:sp>
+        <p:nvSpPr>
+          <p:cNvPr id="24" name="اسم الجهة"/>
+          <p:cNvSpPr>
+            <a:spLocks noGrp="1"/>
+          </p:cNvSpPr>
+          <p:nvPr>
+            <p:ph type="body" sz="quarter" idx="101" hasCustomPrompt="1"/>
+          </p:nvPr>
+        </p:nvSpPr>
+        <p:spPr>
+          <a:xfrm>
+            <a:off x="2520000" y="252000"/>
+            <a:ext cx="3996000" cy="288000"/>
+          </a:xfrm>
+          <a:prstGeom prst="rect">
+            <a:avLst/>
+          </a:prstGeom>
+          <a:noFill/>
+        </p:spPr>
+        <p:txBody>
+          <a:bodyPr wrap="square" lIns="0" tIns="0" rIns="0" bIns="0" rtlCol="0" anchor="ctr">
+            <a:normAutofit/>
+          </a:bodyPr>
+          <a:lstStyle>
+            <a:lvl1pPr marL="0" indent="0" algn="r" rtl="1">
+              <a:lnSpc>
+                <a:spcPct val="100000"/>
+              </a:lnSpc>
+              <a:spcBef>
+                <a:spcPts val="0"/>
+              </a:spcBef>
+              <a:spcAft>
+                <a:spcPts val="0"/>
+              </a:spcAft>
+              <a:buNone/>
+              <a:defRPr lang="ar-SA" sz="1000" dirty="0">
+                <a:solidFill>
+                  <a:srgbClr val="FFFFFF"/>
+                </a:solidFill>
+                <a:latin typeface="IBM Plex Sans Arabic Medium"/>
+                <a:cs typeface="IBM Plex Sans Arabic Medium"/>
+              </a:defRPr>
+            </a:lvl1pPr>
+            <a:lvl2pPr marL="180000" indent="0" algn="r" rtl="1">
+              <a:lnSpc>
+                <a:spcPct val="100000"/>
+              </a:lnSpc>
+              <a:spcBef>
+                <a:spcPts val="0"/>
+              </a:spcBef>
+              <a:spcAft>
+                <a:spcPts val="0"/>
+              </a:spcAft>
+              <a:buNone/>
+              <a:defRPr lang="ar-SA" sz="900" dirty="0">
+                <a:solidFill>
+                  <a:srgbClr val="5F6B7A"/>
+                </a:solidFill>
+                <a:latin typeface="IBM Plex Sans Arabic Medium"/>
+                <a:cs typeface="IBM Plex Sans Arabic Medium"/>
+              </a:defRPr>
+            </a:lvl2pPr>
+            <a:lvl3pPr marL="360000" indent="0" algn="r" rtl="1">
+              <a:lnSpc>
+                <a:spcPct val="100000"/>
+              </a:lnSpc>
+              <a:spcBef>
+                <a:spcPts val="0"/>
+              </a:spcBef>
+              <a:spcAft>
+                <a:spcPts val="0"/>
+              </a:spcAft>
+              <a:buNone/>
+              <a:defRPr lang="ar-SA" sz="900" dirty="0">
+                <a:solidFill>
+                  <a:srgbClr val="5F6B7A"/>
+                </a:solidFill>
+                <a:latin typeface="IBM Plex Sans Arabic Medium"/>
+                <a:cs typeface="IBM Plex Sans Arabic Medium"/>
+              </a:defRPr>
+            </a:lvl3pPr>
+            <a:lvl4pPr marL="540000" indent="0" algn="r" rtl="1">
+              <a:lnSpc>
+                <a:spcPct val="100000"/>
+              </a:lnSpc>
+              <a:spcBef>
+                <a:spcPts val="0"/>
+              </a:spcBef>
+              <a:spcAft>
+                <a:spcPts val="0"/>
+              </a:spcAft>
+              <a:buNone/>
+              <a:defRPr lang="ar-SA" sz="900" dirty="0">
+                <a:solidFill>
+                  <a:srgbClr val="5F6B7A"/>
+                </a:solidFill>
+                <a:latin typeface="IBM Plex Sans Arabic Medium"/>
+                <a:cs typeface="IBM Plex Sans Arabic Medium"/>
+              </a:defRPr>
+            </a:lvl4pPr>
+            <a:lvl5pPr marL="720000" indent="0" algn="r" rtl="1">
+              <a:lnSpc>
+                <a:spcPct val="100000"/>
+              </a:lnSpc>
+              <a:spcBef>
+                <a:spcPts val="0"/>
+              </a:spcBef>
+              <a:spcAft>
+                <a:spcPts val="0"/>
+              </a:spcAft>
+              <a:buNone/>
+              <a:defRPr lang="ar-SA" sz="900" dirty="0">
+                <a:solidFill>
+                  <a:srgbClr val="5F6B7A"/>
+                </a:solidFill>
+                <a:latin typeface="IBM Plex Sans Arabic Medium"/>
+                <a:cs typeface="IBM Plex Sans Arabic Medium"/>
+              </a:defRPr>
+            </a:lvl5pPr>
+          </a:lstStyle>
+          <a:p>
+            <a:r>
+              <a:rPr lang="ar-SA" dirty="0"/>
+              <a:t>اسم الجهة — الإدارة / القسم</a:t>
+            </a:r>
+          </a:p>
+        </p:txBody>
+      </p:sp>
+      <p:sp>
+        <p:nvSpPr>
+          <p:cNvPr id="25" name="عنوان التقرير"/>
           <p:cNvSpPr txBox="1"/>
           <p:nvPr/>
         </p:nvSpPr>
         <p:spPr>
           <a:xfrm>
-            <a:off x="4992000" y="1080000"/>
-            <a:ext cx="2136000" cy="162000"/>
+            <a:off x="2880000" y="720000"/>
+            <a:ext cx="4248000" cy="414000"/>
           </a:xfrm>
           <a:prstGeom prst="rect">
             <a:avLst/>
@@ -1295,14 +1338,71 @@
           </a:ln>
         </p:spPr>
         <p:txBody>
+          <a:bodyPr wrap="square" lIns="0" tIns="0" rIns="0" bIns="0" rtlCol="0" anchor="ctr"/>
+          <a:lstStyle/>
+          <a:p>
+            <a:pPr marL="0" indent="0" algn="r" rtl="1">
+              <a:lnSpc>
+                <a:spcPct val="100000"/>
+              </a:lnSpc>
+              <a:spcBef>
+                <a:spcPts val="0"/>
+              </a:spcBef>
+              <a:spcAft>
+                <a:spcPts val="0"/>
+              </a:spcAft>
+              <a:buNone/>
+            </a:pPr>
+            <a:r>
+              <a:rPr lang="ar-SA" sz="2200" b="1" dirty="0">
+                <a:solidFill>
+                  <a:srgbClr val="FFFFFF"/>
+                </a:solidFill>
+                <a:latin typeface="IBM Plex Sans Arabic"/>
+                <a:cs typeface="IBM Plex Sans Arabic"/>
+              </a:rPr>
+              <a:t>التقرير الأسبوعي للمهام</a:t>
+            </a:r>
+          </a:p>
+        </p:txBody>
+      </p:sp>
+      <p:sp>
+        <p:nvSpPr>
+          <p:cNvPr id="26" name="تسمية: الفترة"/>
+          <p:cNvSpPr txBox="1"/>
+          <p:nvPr/>
+        </p:nvSpPr>
+        <p:spPr>
+          <a:xfrm>
+            <a:off x="4992000" y="1152000"/>
+            <a:ext cx="2136000" cy="162000"/>
+          </a:xfrm>
+          <a:prstGeom prst="rect">
+            <a:avLst/>
+          </a:prstGeom>
+          <a:noFill/>
+          <a:ln>
+            <a:noFill/>
+          </a:ln>
+        </p:spPr>
+        <p:txBody>
           <a:bodyPr wrap="square" lIns="0" tIns="0" rIns="0" bIns="0" rtlCol="0" anchor="b"/>
           <a:lstStyle/>
           <a:p>
             <a:pPr marL="0" indent="0" algn="r" rtl="1">
+              <a:lnSpc>
+                <a:spcPct val="100000"/>
+              </a:lnSpc>
+              <a:spcBef>
+                <a:spcPts val="0"/>
+              </a:spcBef>
+              <a:spcAft>
+                <a:spcPts val="0"/>
+              </a:spcAft>
               <a:buNone/>
             </a:pPr>
             <a:r>
-              <a:rPr lang="ar-SA" sz="850" b="1" dirty="0">
+              <a:rPr lang="ar-SA" sz="900" b="1" dirty="0">
                 <a:solidFill>
                   <a:srgbClr val="33CC99"/>
                 </a:solidFill>
@@ -1316,17 +1416,17 @@
       </p:sp>
       <p:sp>
         <p:nvSpPr>
-          <p:cNvPr id="25" name="الفترة"/>
+          <p:cNvPr id="27" name="الفترة"/>
           <p:cNvSpPr>
             <a:spLocks noGrp="1"/>
           </p:cNvSpPr>
           <p:nvPr>
-            <p:ph type="body" sz="quarter" idx="12" hasCustomPrompt="1"/>
+            <p:ph type="body" sz="quarter" idx="102" hasCustomPrompt="1"/>
           </p:nvPr>
         </p:nvSpPr>
         <p:spPr>
           <a:xfrm>
-            <a:off x="4992000" y="1260000"/>
+            <a:off x="4992000" y="1314000"/>
             <a:ext cx="2136000" cy="270000"/>
           </a:xfrm>
           <a:prstGeom prst="rect">
@@ -1341,20 +1441,99 @@
           <a:lstStyle>
             <a:lvl1pPr marL="0" indent="0" algn="r" rtl="1">
               <a:lnSpc>
-                <a:spcPct val="110000"/>
-              </a:lnSpc>
-              <a:spcAft>
-                <a:spcPts val="0"/>
-              </a:spcAft>
-              <a:buNone/>
-              <a:defRPr lang="ar-SA" sz="1000" dirty="0">
+                <a:spcPct val="100000"/>
+              </a:lnSpc>
+              <a:spcBef>
+                <a:spcPts val="0"/>
+              </a:spcBef>
+              <a:spcAft>
+                <a:spcPts val="0"/>
+              </a:spcAft>
+              <a:buNone/>
+              <a:defRPr lang="ar-SA" sz="1050" dirty="0">
                 <a:solidFill>
                   <a:srgbClr val="FFFFFF"/>
                 </a:solidFill>
-                <a:latin typeface="IBM Plex Sans Arabic"/>
-                <a:cs typeface="IBM Plex Sans Arabic"/>
+                <a:latin typeface="IBM Plex Sans Arabic Medium"/>
+                <a:cs typeface="IBM Plex Sans Arabic Medium"/>
               </a:defRPr>
             </a:lvl1pPr>
+            <a:lvl2pPr marL="180000" indent="0" algn="r" rtl="1">
+              <a:lnSpc>
+                <a:spcPct val="100000"/>
+              </a:lnSpc>
+              <a:spcBef>
+                <a:spcPts val="0"/>
+              </a:spcBef>
+              <a:spcAft>
+                <a:spcPts val="0"/>
+              </a:spcAft>
+              <a:buNone/>
+              <a:defRPr lang="ar-SA" sz="950" dirty="0">
+                <a:solidFill>
+                  <a:srgbClr val="5F6B7A"/>
+                </a:solidFill>
+                <a:latin typeface="IBM Plex Sans Arabic Medium"/>
+                <a:cs typeface="IBM Plex Sans Arabic Medium"/>
+              </a:defRPr>
+            </a:lvl2pPr>
+            <a:lvl3pPr marL="360000" indent="0" algn="r" rtl="1">
+              <a:lnSpc>
+                <a:spcPct val="100000"/>
+              </a:lnSpc>
+              <a:spcBef>
+                <a:spcPts val="0"/>
+              </a:spcBef>
+              <a:spcAft>
+                <a:spcPts val="0"/>
+              </a:spcAft>
+              <a:buNone/>
+              <a:defRPr lang="ar-SA" sz="950" dirty="0">
+                <a:solidFill>
+                  <a:srgbClr val="5F6B7A"/>
+                </a:solidFill>
+                <a:latin typeface="IBM Plex Sans Arabic Medium"/>
+                <a:cs typeface="IBM Plex Sans Arabic Medium"/>
+              </a:defRPr>
+            </a:lvl3pPr>
+            <a:lvl4pPr marL="540000" indent="0" algn="r" rtl="1">
+              <a:lnSpc>
+                <a:spcPct val="100000"/>
+              </a:lnSpc>
+              <a:spcBef>
+                <a:spcPts val="0"/>
+              </a:spcBef>
+              <a:spcAft>
+                <a:spcPts val="0"/>
+              </a:spcAft>
+              <a:buNone/>
+              <a:defRPr lang="ar-SA" sz="950" dirty="0">
+                <a:solidFill>
+                  <a:srgbClr val="5F6B7A"/>
+                </a:solidFill>
+                <a:latin typeface="IBM Plex Sans Arabic Medium"/>
+                <a:cs typeface="IBM Plex Sans Arabic Medium"/>
+              </a:defRPr>
+            </a:lvl4pPr>
+            <a:lvl5pPr marL="720000" indent="0" algn="r" rtl="1">
+              <a:lnSpc>
+                <a:spcPct val="100000"/>
+              </a:lnSpc>
+              <a:spcBef>
+                <a:spcPts val="0"/>
+              </a:spcBef>
+              <a:spcAft>
+                <a:spcPts val="0"/>
+              </a:spcAft>
+              <a:buNone/>
+              <a:defRPr lang="ar-SA" sz="950" dirty="0">
+                <a:solidFill>
+                  <a:srgbClr val="5F6B7A"/>
+                </a:solidFill>
+                <a:latin typeface="IBM Plex Sans Arabic Medium"/>
+                <a:cs typeface="IBM Plex Sans Arabic Medium"/>
+              </a:defRPr>
+            </a:lvl5pPr>
           </a:lstStyle>
           <a:p>
             <a:r>
@@ -1366,13 +1545,13 @@
       </p:sp>
       <p:sp>
         <p:nvSpPr>
-          <p:cNvPr id="26" name="تسمية: إعداد"/>
+          <p:cNvPr id="28" name="تسمية: إعداد"/>
           <p:cNvSpPr txBox="1"/>
           <p:nvPr/>
         </p:nvSpPr>
         <p:spPr>
           <a:xfrm>
-            <a:off x="2712000" y="1080000"/>
+            <a:off x="2712000" y="1152000"/>
             <a:ext cx="2136000" cy="162000"/>
           </a:xfrm>
           <a:prstGeom prst="rect">
@@ -1388,10 +1567,19 @@
           <a:lstStyle/>
           <a:p>
             <a:pPr marL="0" indent="0" algn="r" rtl="1">
+              <a:lnSpc>
+                <a:spcPct val="100000"/>
+              </a:lnSpc>
+              <a:spcBef>
+                <a:spcPts val="0"/>
+              </a:spcBef>
+              <a:spcAft>
+                <a:spcPts val="0"/>
+              </a:spcAft>
               <a:buNone/>
             </a:pPr>
             <a:r>
-              <a:rPr lang="ar-SA" sz="850" b="1" dirty="0">
+              <a:rPr lang="ar-SA" sz="900" b="1" dirty="0">
                 <a:solidFill>
                   <a:srgbClr val="33CC99"/>
                 </a:solidFill>
@@ -1405,17 +1593,17 @@
       </p:sp>
       <p:sp>
         <p:nvSpPr>
-          <p:cNvPr id="27" name="إعداد"/>
+          <p:cNvPr id="29" name="إعداد"/>
           <p:cNvSpPr>
             <a:spLocks noGrp="1"/>
           </p:cNvSpPr>
           <p:nvPr>
-            <p:ph type="body" sz="quarter" idx="13" hasCustomPrompt="1"/>
+            <p:ph type="body" sz="quarter" idx="103" hasCustomPrompt="1"/>
           </p:nvPr>
         </p:nvSpPr>
         <p:spPr>
           <a:xfrm>
-            <a:off x="2712000" y="1260000"/>
+            <a:off x="2712000" y="1314000"/>
             <a:ext cx="2136000" cy="270000"/>
           </a:xfrm>
           <a:prstGeom prst="rect">
@@ -1430,20 +1618,99 @@
           <a:lstStyle>
             <a:lvl1pPr marL="0" indent="0" algn="r" rtl="1">
               <a:lnSpc>
-                <a:spcPct val="110000"/>
-              </a:lnSpc>
-              <a:spcAft>
-                <a:spcPts val="0"/>
-              </a:spcAft>
-              <a:buNone/>
-              <a:defRPr lang="ar-SA" sz="1000" dirty="0">
+                <a:spcPct val="100000"/>
+              </a:lnSpc>
+              <a:spcBef>
+                <a:spcPts val="0"/>
+              </a:spcBef>
+              <a:spcAft>
+                <a:spcPts val="0"/>
+              </a:spcAft>
+              <a:buNone/>
+              <a:defRPr lang="ar-SA" sz="1050" dirty="0">
                 <a:solidFill>
                   <a:srgbClr val="FFFFFF"/>
                 </a:solidFill>
-                <a:latin typeface="IBM Plex Sans Arabic"/>
-                <a:cs typeface="IBM Plex Sans Arabic"/>
+                <a:latin typeface="IBM Plex Sans Arabic Medium"/>
+                <a:cs typeface="IBM Plex Sans Arabic Medium"/>
               </a:defRPr>
             </a:lvl1pPr>
+            <a:lvl2pPr marL="180000" indent="0" algn="r" rtl="1">
+              <a:lnSpc>
+                <a:spcPct val="100000"/>
+              </a:lnSpc>
+              <a:spcBef>
+                <a:spcPts val="0"/>
+              </a:spcBef>
+              <a:spcAft>
+                <a:spcPts val="0"/>
+              </a:spcAft>
+              <a:buNone/>
+              <a:defRPr lang="ar-SA" sz="950" dirty="0">
+                <a:solidFill>
+                  <a:srgbClr val="5F6B7A"/>
+                </a:solidFill>
+                <a:latin typeface="IBM Plex Sans Arabic Medium"/>
+                <a:cs typeface="IBM Plex Sans Arabic Medium"/>
+              </a:defRPr>
+            </a:lvl2pPr>
+            <a:lvl3pPr marL="360000" indent="0" algn="r" rtl="1">
+              <a:lnSpc>
+                <a:spcPct val="100000"/>
+              </a:lnSpc>
+              <a:spcBef>
+                <a:spcPts val="0"/>
+              </a:spcBef>
+              <a:spcAft>
+                <a:spcPts val="0"/>
+              </a:spcAft>
+              <a:buNone/>
+              <a:defRPr lang="ar-SA" sz="950" dirty="0">
+                <a:solidFill>
+                  <a:srgbClr val="5F6B7A"/>
+                </a:solidFill>
+                <a:latin typeface="IBM Plex Sans Arabic Medium"/>
+                <a:cs typeface="IBM Plex Sans Arabic Medium"/>
+              </a:defRPr>
+            </a:lvl3pPr>
+            <a:lvl4pPr marL="540000" indent="0" algn="r" rtl="1">
+              <a:lnSpc>
+                <a:spcPct val="100000"/>
+              </a:lnSpc>
+              <a:spcBef>
+                <a:spcPts val="0"/>
+              </a:spcBef>
+              <a:spcAft>
+                <a:spcPts val="0"/>
+              </a:spcAft>
+              <a:buNone/>
+              <a:defRPr lang="ar-SA" sz="950" dirty="0">
+                <a:solidFill>
+                  <a:srgbClr val="5F6B7A"/>
+                </a:solidFill>
+                <a:latin typeface="IBM Plex Sans Arabic Medium"/>
+                <a:cs typeface="IBM Plex Sans Arabic Medium"/>
+              </a:defRPr>
+            </a:lvl4pPr>
+            <a:lvl5pPr marL="720000" indent="0" algn="r" rtl="1">
+              <a:lnSpc>
+                <a:spcPct val="100000"/>
+              </a:lnSpc>
+              <a:spcBef>
+                <a:spcPts val="0"/>
+              </a:spcBef>
+              <a:spcAft>
+                <a:spcPts val="0"/>
+              </a:spcAft>
+              <a:buNone/>
+              <a:defRPr lang="ar-SA" sz="950" dirty="0">
+                <a:solidFill>
+                  <a:srgbClr val="5F6B7A"/>
+                </a:solidFill>
+                <a:latin typeface="IBM Plex Sans Arabic Medium"/>
+                <a:cs typeface="IBM Plex Sans Arabic Medium"/>
+              </a:defRPr>
+            </a:lvl5pPr>
           </a:lstStyle>
           <a:p>
             <a:r>
@@ -1455,13 +1722,13 @@
       </p:sp>
       <p:sp>
         <p:nvSpPr>
-          <p:cNvPr id="28" name="تسمية: مُقدَّم إلى"/>
+          <p:cNvPr id="30" name="تسمية: مقدَّم إلى"/>
           <p:cNvSpPr txBox="1"/>
           <p:nvPr/>
         </p:nvSpPr>
         <p:spPr>
           <a:xfrm>
-            <a:off x="432000" y="1080000"/>
+            <a:off x="432000" y="1152000"/>
             <a:ext cx="2136000" cy="162000"/>
           </a:xfrm>
           <a:prstGeom prst="rect">
@@ -1477,34 +1744,43 @@
           <a:lstStyle/>
           <a:p>
             <a:pPr marL="0" indent="0" algn="r" rtl="1">
+              <a:lnSpc>
+                <a:spcPct val="100000"/>
+              </a:lnSpc>
+              <a:spcBef>
+                <a:spcPts val="0"/>
+              </a:spcBef>
+              <a:spcAft>
+                <a:spcPts val="0"/>
+              </a:spcAft>
               <a:buNone/>
             </a:pPr>
             <a:r>
-              <a:rPr lang="ar-SA" sz="850" b="1" dirty="0">
+              <a:rPr lang="ar-SA" sz="900" b="1" dirty="0">
                 <a:solidFill>
                   <a:srgbClr val="33CC99"/>
                 </a:solidFill>
                 <a:latin typeface="IBM Plex Sans Arabic"/>
                 <a:cs typeface="IBM Plex Sans Arabic"/>
               </a:rPr>
-              <a:t>مُقدَّم إلى</a:t>
-            </a:r>
-          </a:p>
-        </p:txBody>
-      </p:sp>
-      <p:sp>
-        <p:nvSpPr>
-          <p:cNvPr id="29" name="مُقدَّم إلى"/>
+              <a:t>مقدَّم إلى</a:t>
+            </a:r>
+          </a:p>
+        </p:txBody>
+      </p:sp>
+      <p:sp>
+        <p:nvSpPr>
+          <p:cNvPr id="31" name="مقدَّم إلى"/>
           <p:cNvSpPr>
             <a:spLocks noGrp="1"/>
           </p:cNvSpPr>
           <p:nvPr>
-            <p:ph type="body" sz="quarter" idx="14" hasCustomPrompt="1"/>
+            <p:ph type="body" sz="quarter" idx="104" hasCustomPrompt="1"/>
           </p:nvPr>
         </p:nvSpPr>
         <p:spPr>
           <a:xfrm>
-            <a:off x="432000" y="1260000"/>
+            <a:off x="432000" y="1314000"/>
             <a:ext cx="2136000" cy="270000"/>
           </a:xfrm>
           <a:prstGeom prst="rect">
@@ -1519,39 +1795,118 @@
           <a:lstStyle>
             <a:lvl1pPr marL="0" indent="0" algn="r" rtl="1">
               <a:lnSpc>
-                <a:spcPct val="110000"/>
-              </a:lnSpc>
-              <a:spcAft>
-                <a:spcPts val="0"/>
-              </a:spcAft>
-              <a:buNone/>
-              <a:defRPr lang="ar-SA" sz="1000" dirty="0">
+                <a:spcPct val="100000"/>
+              </a:lnSpc>
+              <a:spcBef>
+                <a:spcPts val="0"/>
+              </a:spcBef>
+              <a:spcAft>
+                <a:spcPts val="0"/>
+              </a:spcAft>
+              <a:buNone/>
+              <a:defRPr lang="ar-SA" sz="1050" dirty="0">
                 <a:solidFill>
                   <a:srgbClr val="FFFFFF"/>
                 </a:solidFill>
-                <a:latin typeface="IBM Plex Sans Arabic"/>
-                <a:cs typeface="IBM Plex Sans Arabic"/>
+                <a:latin typeface="IBM Plex Sans Arabic Medium"/>
+                <a:cs typeface="IBM Plex Sans Arabic Medium"/>
               </a:defRPr>
             </a:lvl1pPr>
+            <a:lvl2pPr marL="180000" indent="0" algn="r" rtl="1">
+              <a:lnSpc>
+                <a:spcPct val="100000"/>
+              </a:lnSpc>
+              <a:spcBef>
+                <a:spcPts val="0"/>
+              </a:spcBef>
+              <a:spcAft>
+                <a:spcPts val="0"/>
+              </a:spcAft>
+              <a:buNone/>
+              <a:defRPr lang="ar-SA" sz="950" dirty="0">
+                <a:solidFill>
+                  <a:srgbClr val="5F6B7A"/>
+                </a:solidFill>
+                <a:latin typeface="IBM Plex Sans Arabic Medium"/>
+                <a:cs typeface="IBM Plex Sans Arabic Medium"/>
+              </a:defRPr>
+            </a:lvl2pPr>
+            <a:lvl3pPr marL="360000" indent="0" algn="r" rtl="1">
+              <a:lnSpc>
+                <a:spcPct val="100000"/>
+              </a:lnSpc>
+              <a:spcBef>
+                <a:spcPts val="0"/>
+              </a:spcBef>
+              <a:spcAft>
+                <a:spcPts val="0"/>
+              </a:spcAft>
+              <a:buNone/>
+              <a:defRPr lang="ar-SA" sz="950" dirty="0">
+                <a:solidFill>
+                  <a:srgbClr val="5F6B7A"/>
+                </a:solidFill>
+                <a:latin typeface="IBM Plex Sans Arabic Medium"/>
+                <a:cs typeface="IBM Plex Sans Arabic Medium"/>
+              </a:defRPr>
+            </a:lvl3pPr>
+            <a:lvl4pPr marL="540000" indent="0" algn="r" rtl="1">
+              <a:lnSpc>
+                <a:spcPct val="100000"/>
+              </a:lnSpc>
+              <a:spcBef>
+                <a:spcPts val="0"/>
+              </a:spcBef>
+              <a:spcAft>
+                <a:spcPts val="0"/>
+              </a:spcAft>
+              <a:buNone/>
+              <a:defRPr lang="ar-SA" sz="950" dirty="0">
+                <a:solidFill>
+                  <a:srgbClr val="5F6B7A"/>
+                </a:solidFill>
+                <a:latin typeface="IBM Plex Sans Arabic Medium"/>
+                <a:cs typeface="IBM Plex Sans Arabic Medium"/>
+              </a:defRPr>
+            </a:lvl4pPr>
+            <a:lvl5pPr marL="720000" indent="0" algn="r" rtl="1">
+              <a:lnSpc>
+                <a:spcPct val="100000"/>
+              </a:lnSpc>
+              <a:spcBef>
+                <a:spcPts val="0"/>
+              </a:spcBef>
+              <a:spcAft>
+                <a:spcPts val="0"/>
+              </a:spcAft>
+              <a:buNone/>
+              <a:defRPr lang="ar-SA" sz="950" dirty="0">
+                <a:solidFill>
+                  <a:srgbClr val="5F6B7A"/>
+                </a:solidFill>
+                <a:latin typeface="IBM Plex Sans Arabic Medium"/>
+                <a:cs typeface="IBM Plex Sans Arabic Medium"/>
+              </a:defRPr>
+            </a:lvl5pPr>
           </a:lstStyle>
           <a:p>
             <a:r>
               <a:rPr lang="ar-SA" dirty="0"/>
-              <a:t>اسم المدير — المسمى</a:t>
-            </a:r>
-          </a:p>
-        </p:txBody>
-      </p:sp>
-      <p:sp>
-        <p:nvSpPr>
-          <p:cNvPr id="30" name="تسمية الخلاصة"/>
+              <a:t>اسم المدير — المسمى الوظيفي</a:t>
+            </a:r>
+          </a:p>
+        </p:txBody>
+      </p:sp>
+      <p:sp>
+        <p:nvSpPr>
+          <p:cNvPr id="32" name="تسمية الخلاصة"/>
           <p:cNvSpPr txBox="1"/>
           <p:nvPr/>
         </p:nvSpPr>
         <p:spPr>
           <a:xfrm>
-            <a:off x="2880000" y="1908000"/>
-            <a:ext cx="4248000" cy="180000"/>
+            <a:off x="2988000" y="1872000"/>
+            <a:ext cx="4140000" cy="180000"/>
           </a:xfrm>
           <a:prstGeom prst="rect">
             <a:avLst/>
@@ -1566,12 +1921,21 @@
           <a:lstStyle/>
           <a:p>
             <a:pPr marL="0" indent="0" algn="r" rtl="1">
+              <a:lnSpc>
+                <a:spcPct val="100000"/>
+              </a:lnSpc>
+              <a:spcBef>
+                <a:spcPts val="0"/>
+              </a:spcBef>
+              <a:spcAft>
+                <a:spcPts val="0"/>
+              </a:spcAft>
               <a:buNone/>
             </a:pPr>
             <a:r>
-              <a:rPr lang="ar-SA" sz="900" b="1" dirty="0">
-                <a:solidFill>
-                  <a:srgbClr val="0E8A8A"/>
+              <a:rPr lang="ar-SA" sz="950" b="1" dirty="0">
+                <a:solidFill>
+                  <a:srgbClr val="0C7373"/>
                 </a:solidFill>
                 <a:latin typeface="IBM Plex Sans Arabic"/>
                 <a:cs typeface="IBM Plex Sans Arabic"/>
@@ -1583,18 +1947,18 @@
       </p:sp>
       <p:sp>
         <p:nvSpPr>
-          <p:cNvPr id="31" name="خلاصة الأسبوع"/>
+          <p:cNvPr id="33" name="خلاصة الأسبوع"/>
           <p:cNvSpPr>
             <a:spLocks noGrp="1"/>
           </p:cNvSpPr>
           <p:nvPr>
-            <p:ph type="body" sz="quarter" idx="20" hasCustomPrompt="1"/>
+            <p:ph type="body" sz="quarter" idx="105" hasCustomPrompt="1"/>
           </p:nvPr>
         </p:nvSpPr>
         <p:spPr>
           <a:xfrm>
-            <a:off x="2880000" y="2124000"/>
-            <a:ext cx="4248000" cy="864000"/>
+            <a:off x="2988000" y="2070000"/>
+            <a:ext cx="4140000" cy="954000"/>
           </a:xfrm>
           <a:prstGeom prst="rect">
             <a:avLst/>
@@ -1608,47 +1972,733 @@
           <a:lstStyle>
             <a:lvl1pPr marL="0" indent="0" algn="r" rtl="1">
               <a:lnSpc>
-                <a:spcPct val="132000"/>
-              </a:lnSpc>
-              <a:spcAft>
-                <a:spcPts val="0"/>
-              </a:spcAft>
-              <a:buNone/>
-              <a:defRPr lang="ar-SA" sz="1250" dirty="0">
+                <a:spcPct val="100000"/>
+              </a:lnSpc>
+              <a:spcBef>
+                <a:spcPts val="0"/>
+              </a:spcBef>
+              <a:spcAft>
+                <a:spcPts val="0"/>
+              </a:spcAft>
+              <a:buNone/>
+              <a:defRPr lang="ar-SA" sz="1200" dirty="0">
                 <a:solidFill>
                   <a:srgbClr val="1F2A37"/>
+                </a:solidFill>
+                <a:latin typeface="IBM Plex Sans Arabic Medium"/>
+                <a:cs typeface="IBM Plex Sans Arabic Medium"/>
+              </a:defRPr>
+            </a:lvl1pPr>
+            <a:lvl2pPr marL="180000" indent="0" algn="r" rtl="1">
+              <a:lnSpc>
+                <a:spcPct val="100000"/>
+              </a:lnSpc>
+              <a:spcBef>
+                <a:spcPts val="0"/>
+              </a:spcBef>
+              <a:spcAft>
+                <a:spcPts val="0"/>
+              </a:spcAft>
+              <a:buNone/>
+              <a:defRPr lang="ar-SA" sz="1100" dirty="0">
+                <a:solidFill>
+                  <a:srgbClr val="5F6B7A"/>
+                </a:solidFill>
+                <a:latin typeface="IBM Plex Sans Arabic Medium"/>
+                <a:cs typeface="IBM Plex Sans Arabic Medium"/>
+              </a:defRPr>
+            </a:lvl2pPr>
+            <a:lvl3pPr marL="360000" indent="0" algn="r" rtl="1">
+              <a:lnSpc>
+                <a:spcPct val="100000"/>
+              </a:lnSpc>
+              <a:spcBef>
+                <a:spcPts val="0"/>
+              </a:spcBef>
+              <a:spcAft>
+                <a:spcPts val="0"/>
+              </a:spcAft>
+              <a:buNone/>
+              <a:defRPr lang="ar-SA" sz="1100" dirty="0">
+                <a:solidFill>
+                  <a:srgbClr val="5F6B7A"/>
+                </a:solidFill>
+                <a:latin typeface="IBM Plex Sans Arabic Medium"/>
+                <a:cs typeface="IBM Plex Sans Arabic Medium"/>
+              </a:defRPr>
+            </a:lvl3pPr>
+            <a:lvl4pPr marL="540000" indent="0" algn="r" rtl="1">
+              <a:lnSpc>
+                <a:spcPct val="100000"/>
+              </a:lnSpc>
+              <a:spcBef>
+                <a:spcPts val="0"/>
+              </a:spcBef>
+              <a:spcAft>
+                <a:spcPts val="0"/>
+              </a:spcAft>
+              <a:buNone/>
+              <a:defRPr lang="ar-SA" sz="1100" dirty="0">
+                <a:solidFill>
+                  <a:srgbClr val="5F6B7A"/>
+                </a:solidFill>
+                <a:latin typeface="IBM Plex Sans Arabic Medium"/>
+                <a:cs typeface="IBM Plex Sans Arabic Medium"/>
+              </a:defRPr>
+            </a:lvl4pPr>
+            <a:lvl5pPr marL="720000" indent="0" algn="r" rtl="1">
+              <a:lnSpc>
+                <a:spcPct val="100000"/>
+              </a:lnSpc>
+              <a:spcBef>
+                <a:spcPts val="0"/>
+              </a:spcBef>
+              <a:spcAft>
+                <a:spcPts val="0"/>
+              </a:spcAft>
+              <a:buNone/>
+              <a:defRPr lang="ar-SA" sz="1100" dirty="0">
+                <a:solidFill>
+                  <a:srgbClr val="5F6B7A"/>
+                </a:solidFill>
+                <a:latin typeface="IBM Plex Sans Arabic Medium"/>
+                <a:cs typeface="IBM Plex Sans Arabic Medium"/>
+              </a:defRPr>
+            </a:lvl5pPr>
+          </a:lstStyle>
+          <a:p>
+            <a:r>
+              <a:rPr lang="ar-SA" dirty="0"/>
+              <a:t>ثلاثة أسطر: أبرز ما أُنجز، وما يجري العمل عليه، وما يحتاج تدخّلًا. الأعداد هنا تطابق البطاقات.</a:t>
+            </a:r>
+          </a:p>
+        </p:txBody>
+      </p:sp>
+      <p:sp>
+        <p:nvSpPr>
+          <p:cNvPr id="34" name="بطاقة مهام منجزة"/>
+          <p:cNvSpPr/>
+          <p:nvPr/>
+        </p:nvSpPr>
+        <p:spPr>
+          <a:xfrm>
+            <a:off x="2088000" y="1872000"/>
+            <a:ext cx="684000" cy="1152000"/>
+          </a:xfrm>
+          <a:prstGeom prst="roundRect">
+            <a:avLst>
+              <a:gd name="adj" fmla="val 8000"/>
+            </a:avLst>
+          </a:prstGeom>
+          <a:solidFill>
+            <a:srgbClr val="EEF0F8"/>
+          </a:solidFill>
+          <a:ln w="6350">
+            <a:solidFill>
+              <a:srgbClr val="C9CFD9"/>
+            </a:solidFill>
+          </a:ln>
+        </p:spPr>
+      </p:sp>
+      <p:sp>
+        <p:nvSpPr>
+          <p:cNvPr id="35" name="عدد مهام منجزة"/>
+          <p:cNvSpPr>
+            <a:spLocks noGrp="1"/>
+          </p:cNvSpPr>
+          <p:nvPr>
+            <p:ph type="body" sz="quarter" idx="106" hasCustomPrompt="1"/>
+          </p:nvPr>
+        </p:nvSpPr>
+        <p:spPr>
+          <a:xfrm>
+            <a:off x="2088000" y="1944000"/>
+            <a:ext cx="684000" cy="684000"/>
+          </a:xfrm>
+          <a:prstGeom prst="rect">
+            <a:avLst/>
+          </a:prstGeom>
+          <a:noFill/>
+        </p:spPr>
+        <p:txBody>
+          <a:bodyPr wrap="square" lIns="0" tIns="0" rIns="0" bIns="0" rtlCol="0" anchor="ctr">
+            <a:normAutofit/>
+          </a:bodyPr>
+          <a:lstStyle>
+            <a:lvl1pPr marL="0" indent="0" algn="ctr" rtl="1">
+              <a:lnSpc>
+                <a:spcPct val="100000"/>
+              </a:lnSpc>
+              <a:spcBef>
+                <a:spcPts val="0"/>
+              </a:spcBef>
+              <a:spcAft>
+                <a:spcPts val="0"/>
+              </a:spcAft>
+              <a:buNone/>
+              <a:defRPr lang="ar-SA" sz="2400" b="1" dirty="0">
+                <a:solidFill>
+                  <a:srgbClr val="127A5B"/>
                 </a:solidFill>
                 <a:latin typeface="IBM Plex Sans Arabic"/>
                 <a:cs typeface="IBM Plex Sans Arabic"/>
               </a:defRPr>
             </a:lvl1pPr>
+            <a:lvl2pPr marL="180000" indent="0" algn="ctr" rtl="1">
+              <a:lnSpc>
+                <a:spcPct val="100000"/>
+              </a:lnSpc>
+              <a:spcBef>
+                <a:spcPts val="0"/>
+              </a:spcBef>
+              <a:spcAft>
+                <a:spcPts val="0"/>
+              </a:spcAft>
+              <a:buNone/>
+              <a:defRPr lang="ar-SA" sz="2300" dirty="0">
+                <a:solidFill>
+                  <a:srgbClr val="5F6B7A"/>
+                </a:solidFill>
+                <a:latin typeface="IBM Plex Sans Arabic"/>
+                <a:cs typeface="IBM Plex Sans Arabic"/>
+              </a:defRPr>
+            </a:lvl2pPr>
+            <a:lvl3pPr marL="360000" indent="0" algn="ctr" rtl="1">
+              <a:lnSpc>
+                <a:spcPct val="100000"/>
+              </a:lnSpc>
+              <a:spcBef>
+                <a:spcPts val="0"/>
+              </a:spcBef>
+              <a:spcAft>
+                <a:spcPts val="0"/>
+              </a:spcAft>
+              <a:buNone/>
+              <a:defRPr lang="ar-SA" sz="2300" dirty="0">
+                <a:solidFill>
+                  <a:srgbClr val="5F6B7A"/>
+                </a:solidFill>
+                <a:latin typeface="IBM Plex Sans Arabic"/>
+                <a:cs typeface="IBM Plex Sans Arabic"/>
+              </a:defRPr>
+            </a:lvl3pPr>
+            <a:lvl4pPr marL="540000" indent="0" algn="ctr" rtl="1">
+              <a:lnSpc>
+                <a:spcPct val="100000"/>
+              </a:lnSpc>
+              <a:spcBef>
+                <a:spcPts val="0"/>
+              </a:spcBef>
+              <a:spcAft>
+                <a:spcPts val="0"/>
+              </a:spcAft>
+              <a:buNone/>
+              <a:defRPr lang="ar-SA" sz="2300" dirty="0">
+                <a:solidFill>
+                  <a:srgbClr val="5F6B7A"/>
+                </a:solidFill>
+                <a:latin typeface="IBM Plex Sans Arabic"/>
+                <a:cs typeface="IBM Plex Sans Arabic"/>
+              </a:defRPr>
+            </a:lvl4pPr>
+            <a:lvl5pPr marL="720000" indent="0" algn="ctr" rtl="1">
+              <a:lnSpc>
+                <a:spcPct val="100000"/>
+              </a:lnSpc>
+              <a:spcBef>
+                <a:spcPts val="0"/>
+              </a:spcBef>
+              <a:spcAft>
+                <a:spcPts val="0"/>
+              </a:spcAft>
+              <a:buNone/>
+              <a:defRPr lang="ar-SA" sz="2300" dirty="0">
+                <a:solidFill>
+                  <a:srgbClr val="5F6B7A"/>
+                </a:solidFill>
+                <a:latin typeface="IBM Plex Sans Arabic"/>
+                <a:cs typeface="IBM Plex Sans Arabic"/>
+              </a:defRPr>
+            </a:lvl5pPr>
           </a:lstStyle>
           <a:p>
             <a:r>
               <a:rPr lang="ar-SA" dirty="0"/>
-              <a:t>لخّص الأسبوع في ثلاثة أسطر: أبرز ما أُنجز، وما يسير، وما يحتاج تدخّلًا.</a:t>
-            </a:r>
-          </a:p>
-        </p:txBody>
-      </p:sp>
-      <p:sp>
-        <p:nvSpPr>
-          <p:cNvPr id="32" name="بطاقة مهام منجزة"/>
+              <a:t>العدد</a:t>
+            </a:r>
+          </a:p>
+        </p:txBody>
+      </p:sp>
+      <p:sp>
+        <p:nvSpPr>
+          <p:cNvPr id="36" name="تسمية مهام منجزة"/>
+          <p:cNvSpPr txBox="1"/>
+          <p:nvPr/>
+        </p:nvSpPr>
+        <p:spPr>
+          <a:xfrm>
+            <a:off x="2052000" y="2646000"/>
+            <a:ext cx="756000" cy="324000"/>
+          </a:xfrm>
+          <a:prstGeom prst="rect">
+            <a:avLst/>
+          </a:prstGeom>
+          <a:noFill/>
+          <a:ln>
+            <a:noFill/>
+          </a:ln>
+        </p:spPr>
+        <p:txBody>
+          <a:bodyPr wrap="square" lIns="0" tIns="0" rIns="0" bIns="0" rtlCol="0" anchor="t"/>
+          <a:lstStyle/>
+          <a:p>
+            <a:pPr marL="0" indent="0" algn="ctr" rtl="1">
+              <a:lnSpc>
+                <a:spcPct val="100000"/>
+              </a:lnSpc>
+              <a:spcBef>
+                <a:spcPts val="0"/>
+              </a:spcBef>
+              <a:spcAft>
+                <a:spcPts val="0"/>
+              </a:spcAft>
+              <a:buNone/>
+            </a:pPr>
+            <a:r>
+              <a:rPr lang="ar-SA" sz="1000" dirty="0">
+                <a:solidFill>
+                  <a:srgbClr val="273470"/>
+                </a:solidFill>
+                <a:latin typeface="IBM Plex Sans Arabic"/>
+                <a:cs typeface="IBM Plex Sans Arabic"/>
+              </a:rPr>
+              <a:t>مهام منجزة</a:t>
+            </a:r>
+          </a:p>
+        </p:txBody>
+      </p:sp>
+      <p:sp>
+        <p:nvSpPr>
+          <p:cNvPr id="37" name="بطاقة مهام جارية"/>
           <p:cNvSpPr/>
           <p:nvPr/>
         </p:nvSpPr>
         <p:spPr>
           <a:xfrm>
-            <a:off x="1944000" y="2016000"/>
-            <a:ext cx="720000" cy="972000"/>
+            <a:off x="1260000" y="1872000"/>
+            <a:ext cx="684000" cy="1152000"/>
           </a:xfrm>
           <a:prstGeom prst="roundRect">
             <a:avLst>
-              <a:gd name="adj" fmla="val 9000"/>
+              <a:gd name="adj" fmla="val 8000"/>
             </a:avLst>
           </a:prstGeom>
           <a:solidFill>
             <a:srgbClr val="EEF0F8"/>
+          </a:solidFill>
+          <a:ln w="6350">
+            <a:solidFill>
+              <a:srgbClr val="C9CFD9"/>
+            </a:solidFill>
+          </a:ln>
+        </p:spPr>
+      </p:sp>
+      <p:sp>
+        <p:nvSpPr>
+          <p:cNvPr id="38" name="عدد مهام جارية"/>
+          <p:cNvSpPr>
+            <a:spLocks noGrp="1"/>
+          </p:cNvSpPr>
+          <p:nvPr>
+            <p:ph type="body" sz="quarter" idx="107" hasCustomPrompt="1"/>
+          </p:nvPr>
+        </p:nvSpPr>
+        <p:spPr>
+          <a:xfrm>
+            <a:off x="1260000" y="1944000"/>
+            <a:ext cx="684000" cy="684000"/>
+          </a:xfrm>
+          <a:prstGeom prst="rect">
+            <a:avLst/>
+          </a:prstGeom>
+          <a:noFill/>
+        </p:spPr>
+        <p:txBody>
+          <a:bodyPr wrap="square" lIns="0" tIns="0" rIns="0" bIns="0" rtlCol="0" anchor="ctr">
+            <a:normAutofit/>
+          </a:bodyPr>
+          <a:lstStyle>
+            <a:lvl1pPr marL="0" indent="0" algn="ctr" rtl="1">
+              <a:lnSpc>
+                <a:spcPct val="100000"/>
+              </a:lnSpc>
+              <a:spcBef>
+                <a:spcPts val="0"/>
+              </a:spcBef>
+              <a:spcAft>
+                <a:spcPts val="0"/>
+              </a:spcAft>
+              <a:buNone/>
+              <a:defRPr lang="ar-SA" sz="2400" b="1" dirty="0">
+                <a:solidFill>
+                  <a:srgbClr val="0C7373"/>
+                </a:solidFill>
+                <a:latin typeface="IBM Plex Sans Arabic"/>
+                <a:cs typeface="IBM Plex Sans Arabic"/>
+              </a:defRPr>
+            </a:lvl1pPr>
+            <a:lvl2pPr marL="180000" indent="0" algn="ctr" rtl="1">
+              <a:lnSpc>
+                <a:spcPct val="100000"/>
+              </a:lnSpc>
+              <a:spcBef>
+                <a:spcPts val="0"/>
+              </a:spcBef>
+              <a:spcAft>
+                <a:spcPts val="0"/>
+              </a:spcAft>
+              <a:buNone/>
+              <a:defRPr lang="ar-SA" sz="2300" dirty="0">
+                <a:solidFill>
+                  <a:srgbClr val="5F6B7A"/>
+                </a:solidFill>
+                <a:latin typeface="IBM Plex Sans Arabic"/>
+                <a:cs typeface="IBM Plex Sans Arabic"/>
+              </a:defRPr>
+            </a:lvl2pPr>
+            <a:lvl3pPr marL="360000" indent="0" algn="ctr" rtl="1">
+              <a:lnSpc>
+                <a:spcPct val="100000"/>
+              </a:lnSpc>
+              <a:spcBef>
+                <a:spcPts val="0"/>
+              </a:spcBef>
+              <a:spcAft>
+                <a:spcPts val="0"/>
+              </a:spcAft>
+              <a:buNone/>
+              <a:defRPr lang="ar-SA" sz="2300" dirty="0">
+                <a:solidFill>
+                  <a:srgbClr val="5F6B7A"/>
+                </a:solidFill>
+                <a:latin typeface="IBM Plex Sans Arabic"/>
+                <a:cs typeface="IBM Plex Sans Arabic"/>
+              </a:defRPr>
+            </a:lvl3pPr>
+            <a:lvl4pPr marL="540000" indent="0" algn="ctr" rtl="1">
+              <a:lnSpc>
+                <a:spcPct val="100000"/>
+              </a:lnSpc>
+              <a:spcBef>
+                <a:spcPts val="0"/>
+              </a:spcBef>
+              <a:spcAft>
+                <a:spcPts val="0"/>
+              </a:spcAft>
+              <a:buNone/>
+              <a:defRPr lang="ar-SA" sz="2300" dirty="0">
+                <a:solidFill>
+                  <a:srgbClr val="5F6B7A"/>
+                </a:solidFill>
+                <a:latin typeface="IBM Plex Sans Arabic"/>
+                <a:cs typeface="IBM Plex Sans Arabic"/>
+              </a:defRPr>
+            </a:lvl4pPr>
+            <a:lvl5pPr marL="720000" indent="0" algn="ctr" rtl="1">
+              <a:lnSpc>
+                <a:spcPct val="100000"/>
+              </a:lnSpc>
+              <a:spcBef>
+                <a:spcPts val="0"/>
+              </a:spcBef>
+              <a:spcAft>
+                <a:spcPts val="0"/>
+              </a:spcAft>
+              <a:buNone/>
+              <a:defRPr lang="ar-SA" sz="2300" dirty="0">
+                <a:solidFill>
+                  <a:srgbClr val="5F6B7A"/>
+                </a:solidFill>
+                <a:latin typeface="IBM Plex Sans Arabic"/>
+                <a:cs typeface="IBM Plex Sans Arabic"/>
+              </a:defRPr>
+            </a:lvl5pPr>
+          </a:lstStyle>
+          <a:p>
+            <a:r>
+              <a:rPr lang="ar-SA" dirty="0"/>
+              <a:t>العدد</a:t>
+            </a:r>
+          </a:p>
+        </p:txBody>
+      </p:sp>
+      <p:sp>
+        <p:nvSpPr>
+          <p:cNvPr id="39" name="تسمية مهام جارية"/>
+          <p:cNvSpPr txBox="1"/>
+          <p:nvPr/>
+        </p:nvSpPr>
+        <p:spPr>
+          <a:xfrm>
+            <a:off x="1224000" y="2646000"/>
+            <a:ext cx="756000" cy="324000"/>
+          </a:xfrm>
+          <a:prstGeom prst="rect">
+            <a:avLst/>
+          </a:prstGeom>
+          <a:noFill/>
+          <a:ln>
+            <a:noFill/>
+          </a:ln>
+        </p:spPr>
+        <p:txBody>
+          <a:bodyPr wrap="square" lIns="0" tIns="0" rIns="0" bIns="0" rtlCol="0" anchor="t"/>
+          <a:lstStyle/>
+          <a:p>
+            <a:pPr marL="0" indent="0" algn="ctr" rtl="1">
+              <a:lnSpc>
+                <a:spcPct val="100000"/>
+              </a:lnSpc>
+              <a:spcBef>
+                <a:spcPts val="0"/>
+              </a:spcBef>
+              <a:spcAft>
+                <a:spcPts val="0"/>
+              </a:spcAft>
+              <a:buNone/>
+            </a:pPr>
+            <a:r>
+              <a:rPr lang="ar-SA" sz="1000" dirty="0">
+                <a:solidFill>
+                  <a:srgbClr val="273470"/>
+                </a:solidFill>
+                <a:latin typeface="IBM Plex Sans Arabic"/>
+                <a:cs typeface="IBM Plex Sans Arabic"/>
+              </a:rPr>
+              <a:t>مهام جارية</a:t>
+            </a:r>
+          </a:p>
+        </p:txBody>
+      </p:sp>
+      <p:sp>
+        <p:nvSpPr>
+          <p:cNvPr id="40" name="بطاقة مهام مقبلة"/>
+          <p:cNvSpPr/>
+          <p:nvPr/>
+        </p:nvSpPr>
+        <p:spPr>
+          <a:xfrm>
+            <a:off x="432000" y="1872000"/>
+            <a:ext cx="684000" cy="1152000"/>
+          </a:xfrm>
+          <a:prstGeom prst="roundRect">
+            <a:avLst>
+              <a:gd name="adj" fmla="val 8000"/>
+            </a:avLst>
+          </a:prstGeom>
+          <a:solidFill>
+            <a:srgbClr val="EEF0F8"/>
+          </a:solidFill>
+          <a:ln w="6350">
+            <a:solidFill>
+              <a:srgbClr val="C9CFD9"/>
+            </a:solidFill>
+          </a:ln>
+        </p:spPr>
+      </p:sp>
+      <p:sp>
+        <p:nvSpPr>
+          <p:cNvPr id="41" name="عدد مهام مقبلة"/>
+          <p:cNvSpPr>
+            <a:spLocks noGrp="1"/>
+          </p:cNvSpPr>
+          <p:nvPr>
+            <p:ph type="body" sz="quarter" idx="108" hasCustomPrompt="1"/>
+          </p:nvPr>
+        </p:nvSpPr>
+        <p:spPr>
+          <a:xfrm>
+            <a:off x="432000" y="1944000"/>
+            <a:ext cx="684000" cy="684000"/>
+          </a:xfrm>
+          <a:prstGeom prst="rect">
+            <a:avLst/>
+          </a:prstGeom>
+          <a:noFill/>
+        </p:spPr>
+        <p:txBody>
+          <a:bodyPr wrap="square" lIns="0" tIns="0" rIns="0" bIns="0" rtlCol="0" anchor="ctr">
+            <a:normAutofit/>
+          </a:bodyPr>
+          <a:lstStyle>
+            <a:lvl1pPr marL="0" indent="0" algn="ctr" rtl="1">
+              <a:lnSpc>
+                <a:spcPct val="100000"/>
+              </a:lnSpc>
+              <a:spcBef>
+                <a:spcPts val="0"/>
+              </a:spcBef>
+              <a:spcAft>
+                <a:spcPts val="0"/>
+              </a:spcAft>
+              <a:buNone/>
+              <a:defRPr lang="ar-SA" sz="2400" b="1" dirty="0">
+                <a:solidFill>
+                  <a:srgbClr val="6459A7"/>
+                </a:solidFill>
+                <a:latin typeface="IBM Plex Sans Arabic"/>
+                <a:cs typeface="IBM Plex Sans Arabic"/>
+              </a:defRPr>
+            </a:lvl1pPr>
+            <a:lvl2pPr marL="180000" indent="0" algn="ctr" rtl="1">
+              <a:lnSpc>
+                <a:spcPct val="100000"/>
+              </a:lnSpc>
+              <a:spcBef>
+                <a:spcPts val="0"/>
+              </a:spcBef>
+              <a:spcAft>
+                <a:spcPts val="0"/>
+              </a:spcAft>
+              <a:buNone/>
+              <a:defRPr lang="ar-SA" sz="2300" dirty="0">
+                <a:solidFill>
+                  <a:srgbClr val="5F6B7A"/>
+                </a:solidFill>
+                <a:latin typeface="IBM Plex Sans Arabic"/>
+                <a:cs typeface="IBM Plex Sans Arabic"/>
+              </a:defRPr>
+            </a:lvl2pPr>
+            <a:lvl3pPr marL="360000" indent="0" algn="ctr" rtl="1">
+              <a:lnSpc>
+                <a:spcPct val="100000"/>
+              </a:lnSpc>
+              <a:spcBef>
+                <a:spcPts val="0"/>
+              </a:spcBef>
+              <a:spcAft>
+                <a:spcPts val="0"/>
+              </a:spcAft>
+              <a:buNone/>
+              <a:defRPr lang="ar-SA" sz="2300" dirty="0">
+                <a:solidFill>
+                  <a:srgbClr val="5F6B7A"/>
+                </a:solidFill>
+                <a:latin typeface="IBM Plex Sans Arabic"/>
+                <a:cs typeface="IBM Plex Sans Arabic"/>
+              </a:defRPr>
+            </a:lvl3pPr>
+            <a:lvl4pPr marL="540000" indent="0" algn="ctr" rtl="1">
+              <a:lnSpc>
+                <a:spcPct val="100000"/>
+              </a:lnSpc>
+              <a:spcBef>
+                <a:spcPts val="0"/>
+              </a:spcBef>
+              <a:spcAft>
+                <a:spcPts val="0"/>
+              </a:spcAft>
+              <a:buNone/>
+              <a:defRPr lang="ar-SA" sz="2300" dirty="0">
+                <a:solidFill>
+                  <a:srgbClr val="5F6B7A"/>
+                </a:solidFill>
+                <a:latin typeface="IBM Plex Sans Arabic"/>
+                <a:cs typeface="IBM Plex Sans Arabic"/>
+              </a:defRPr>
+            </a:lvl4pPr>
+            <a:lvl5pPr marL="720000" indent="0" algn="ctr" rtl="1">
+              <a:lnSpc>
+                <a:spcPct val="100000"/>
+              </a:lnSpc>
+              <a:spcBef>
+                <a:spcPts val="0"/>
+              </a:spcBef>
+              <a:spcAft>
+                <a:spcPts val="0"/>
+              </a:spcAft>
+              <a:buNone/>
+              <a:defRPr lang="ar-SA" sz="2300" dirty="0">
+                <a:solidFill>
+                  <a:srgbClr val="5F6B7A"/>
+                </a:solidFill>
+                <a:latin typeface="IBM Plex Sans Arabic"/>
+                <a:cs typeface="IBM Plex Sans Arabic"/>
+              </a:defRPr>
+            </a:lvl5pPr>
+          </a:lstStyle>
+          <a:p>
+            <a:r>
+              <a:rPr lang="ar-SA" dirty="0"/>
+              <a:t>العدد</a:t>
+            </a:r>
+          </a:p>
+        </p:txBody>
+      </p:sp>
+      <p:sp>
+        <p:nvSpPr>
+          <p:cNvPr id="42" name="تسمية مهام مقبلة"/>
+          <p:cNvSpPr txBox="1"/>
+          <p:nvPr/>
+        </p:nvSpPr>
+        <p:spPr>
+          <a:xfrm>
+            <a:off x="396000" y="2646000"/>
+            <a:ext cx="756000" cy="324000"/>
+          </a:xfrm>
+          <a:prstGeom prst="rect">
+            <a:avLst/>
+          </a:prstGeom>
+          <a:noFill/>
+          <a:ln>
+            <a:noFill/>
+          </a:ln>
+        </p:spPr>
+        <p:txBody>
+          <a:bodyPr wrap="square" lIns="0" tIns="0" rIns="0" bIns="0" rtlCol="0" anchor="t"/>
+          <a:lstStyle/>
+          <a:p>
+            <a:pPr marL="0" indent="0" algn="ctr" rtl="1">
+              <a:lnSpc>
+                <a:spcPct val="100000"/>
+              </a:lnSpc>
+              <a:spcBef>
+                <a:spcPts val="0"/>
+              </a:spcBef>
+              <a:spcAft>
+                <a:spcPts val="0"/>
+              </a:spcAft>
+              <a:buNone/>
+            </a:pPr>
+            <a:r>
+              <a:rPr lang="ar-SA" sz="1000" dirty="0">
+                <a:solidFill>
+                  <a:srgbClr val="273470"/>
+                </a:solidFill>
+                <a:latin typeface="IBM Plex Sans Arabic"/>
+                <a:cs typeface="IBM Plex Sans Arabic"/>
+              </a:rPr>
+              <a:t>مهام مقبلة</a:t>
+            </a:r>
+          </a:p>
+        </p:txBody>
+      </p:sp>
+      <p:sp>
+        <p:nvSpPr>
+          <p:cNvPr id="43" name="أيقونة قسم"/>
+          <p:cNvSpPr/>
+          <p:nvPr/>
+        </p:nvSpPr>
+        <p:spPr>
+          <a:xfrm>
+            <a:off x="6984000" y="3297600"/>
+            <a:ext cx="144000" cy="144000"/>
+          </a:xfrm>
+          <a:prstGeom prst="ellipse">
+            <a:avLst/>
+          </a:prstGeom>
+          <a:solidFill>
+            <a:srgbClr val="127A5B"/>
           </a:solidFill>
           <a:ln>
             <a:noFill/>
@@ -1657,354 +2707,14 @@
       </p:sp>
       <p:sp>
         <p:nvSpPr>
-          <p:cNvPr id="33" name="عدد مهام منجزة"/>
-          <p:cNvSpPr>
-            <a:spLocks noGrp="1"/>
-          </p:cNvSpPr>
-          <p:nvPr>
-            <p:ph type="body" sz="quarter" idx="21" hasCustomPrompt="1"/>
-          </p:nvPr>
-        </p:nvSpPr>
-        <p:spPr>
-          <a:xfrm>
-            <a:off x="1944000" y="2070000"/>
-            <a:ext cx="720000" cy="504000"/>
-          </a:xfrm>
-          <a:prstGeom prst="rect">
-            <a:avLst/>
-          </a:prstGeom>
-          <a:noFill/>
-        </p:spPr>
-        <p:txBody>
-          <a:bodyPr wrap="square" lIns="0" tIns="0" rIns="0" bIns="0" rtlCol="0" anchor="ctr"/>
-          <a:lstStyle>
-            <a:lvl1pPr marL="0" indent="0" algn="ctr" rtl="1">
-              <a:lnSpc>
-                <a:spcPct val="100000"/>
-              </a:lnSpc>
-              <a:spcAft>
-                <a:spcPts val="0"/>
-              </a:spcAft>
-              <a:buNone/>
-              <a:defRPr lang="ar-SA" sz="2200" b="1" dirty="0">
-                <a:solidFill>
-                  <a:srgbClr val="178F6B"/>
-                </a:solidFill>
-                <a:latin typeface="IBM Plex Sans Arabic"/>
-                <a:cs typeface="IBM Plex Sans Arabic"/>
-              </a:defRPr>
-            </a:lvl1pPr>
-          </a:lstStyle>
-          <a:p>
-            <a:r>
-              <a:rPr lang="ar-SA" dirty="0"/>
-              <a:t>0</a:t>
-            </a:r>
-          </a:p>
-        </p:txBody>
-      </p:sp>
-      <p:sp>
-        <p:nvSpPr>
-          <p:cNvPr id="34" name="تسمية مهام منجزة"/>
-          <p:cNvSpPr txBox="1"/>
-          <p:nvPr/>
-        </p:nvSpPr>
-        <p:spPr>
-          <a:xfrm>
-            <a:off x="1944000" y="2610000"/>
-            <a:ext cx="720000" cy="288000"/>
-          </a:xfrm>
-          <a:prstGeom prst="rect">
-            <a:avLst/>
-          </a:prstGeom>
-          <a:noFill/>
-          <a:ln>
-            <a:noFill/>
-          </a:ln>
-        </p:spPr>
-        <p:txBody>
-          <a:bodyPr wrap="square" lIns="0" tIns="0" rIns="0" bIns="0" rtlCol="0" anchor="t"/>
-          <a:lstStyle/>
-          <a:p>
-            <a:pPr marL="0" indent="0" algn="ctr" rtl="1">
-              <a:lnSpc>
-                <a:spcPct val="100000"/>
-              </a:lnSpc>
-              <a:buNone/>
-            </a:pPr>
-            <a:r>
-              <a:rPr lang="ar-SA" sz="850" dirty="0">
-                <a:solidFill>
-                  <a:srgbClr val="5F6B7A"/>
-                </a:solidFill>
-                <a:latin typeface="IBM Plex Sans Arabic"/>
-                <a:cs typeface="IBM Plex Sans Arabic"/>
-              </a:rPr>
-              <a:t>مهام منجزة</a:t>
-            </a:r>
-          </a:p>
-        </p:txBody>
-      </p:sp>
-      <p:sp>
-        <p:nvSpPr>
-          <p:cNvPr id="35" name="بطاقة مهام جارية"/>
+          <p:cNvPr id="44" name="أيقونة قسم داخلية"/>
           <p:cNvSpPr/>
           <p:nvPr/>
         </p:nvSpPr>
         <p:spPr>
           <a:xfrm>
-            <a:off x="1134000" y="2016000"/>
-            <a:ext cx="720000" cy="972000"/>
-          </a:xfrm>
-          <a:prstGeom prst="roundRect">
-            <a:avLst>
-              <a:gd name="adj" fmla="val 9000"/>
-            </a:avLst>
-          </a:prstGeom>
-          <a:solidFill>
-            <a:srgbClr val="EEF0F8"/>
-          </a:solidFill>
-          <a:ln>
-            <a:noFill/>
-          </a:ln>
-        </p:spPr>
-      </p:sp>
-      <p:sp>
-        <p:nvSpPr>
-          <p:cNvPr id="36" name="عدد مهام جارية"/>
-          <p:cNvSpPr>
-            <a:spLocks noGrp="1"/>
-          </p:cNvSpPr>
-          <p:nvPr>
-            <p:ph type="body" sz="quarter" idx="22" hasCustomPrompt="1"/>
-          </p:nvPr>
-        </p:nvSpPr>
-        <p:spPr>
-          <a:xfrm>
-            <a:off x="1134000" y="2070000"/>
-            <a:ext cx="720000" cy="504000"/>
-          </a:xfrm>
-          <a:prstGeom prst="rect">
-            <a:avLst/>
-          </a:prstGeom>
-          <a:noFill/>
-        </p:spPr>
-        <p:txBody>
-          <a:bodyPr wrap="square" lIns="0" tIns="0" rIns="0" bIns="0" rtlCol="0" anchor="ctr"/>
-          <a:lstStyle>
-            <a:lvl1pPr marL="0" indent="0" algn="ctr" rtl="1">
-              <a:lnSpc>
-                <a:spcPct val="100000"/>
-              </a:lnSpc>
-              <a:spcAft>
-                <a:spcPts val="0"/>
-              </a:spcAft>
-              <a:buNone/>
-              <a:defRPr lang="ar-SA" sz="2200" b="1" dirty="0">
-                <a:solidFill>
-                  <a:srgbClr val="0E8A8A"/>
-                </a:solidFill>
-                <a:latin typeface="IBM Plex Sans Arabic"/>
-                <a:cs typeface="IBM Plex Sans Arabic"/>
-              </a:defRPr>
-            </a:lvl1pPr>
-          </a:lstStyle>
-          <a:p>
-            <a:r>
-              <a:rPr lang="ar-SA" dirty="0"/>
-              <a:t>0</a:t>
-            </a:r>
-          </a:p>
-        </p:txBody>
-      </p:sp>
-      <p:sp>
-        <p:nvSpPr>
-          <p:cNvPr id="37" name="تسمية مهام جارية"/>
-          <p:cNvSpPr txBox="1"/>
-          <p:nvPr/>
-        </p:nvSpPr>
-        <p:spPr>
-          <a:xfrm>
-            <a:off x="1134000" y="2610000"/>
-            <a:ext cx="720000" cy="288000"/>
-          </a:xfrm>
-          <a:prstGeom prst="rect">
-            <a:avLst/>
-          </a:prstGeom>
-          <a:noFill/>
-          <a:ln>
-            <a:noFill/>
-          </a:ln>
-        </p:spPr>
-        <p:txBody>
-          <a:bodyPr wrap="square" lIns="0" tIns="0" rIns="0" bIns="0" rtlCol="0" anchor="t"/>
-          <a:lstStyle/>
-          <a:p>
-            <a:pPr marL="0" indent="0" algn="ctr" rtl="1">
-              <a:lnSpc>
-                <a:spcPct val="100000"/>
-              </a:lnSpc>
-              <a:buNone/>
-            </a:pPr>
-            <a:r>
-              <a:rPr lang="ar-SA" sz="850" dirty="0">
-                <a:solidFill>
-                  <a:srgbClr val="5F6B7A"/>
-                </a:solidFill>
-                <a:latin typeface="IBM Plex Sans Arabic"/>
-                <a:cs typeface="IBM Plex Sans Arabic"/>
-              </a:rPr>
-              <a:t>مهام جارية</a:t>
-            </a:r>
-          </a:p>
-        </p:txBody>
-      </p:sp>
-      <p:sp>
-        <p:nvSpPr>
-          <p:cNvPr id="38" name="بطاقة مهام قادمة"/>
-          <p:cNvSpPr/>
-          <p:nvPr/>
-        </p:nvSpPr>
-        <p:spPr>
-          <a:xfrm>
-            <a:off x="324000" y="2016000"/>
-            <a:ext cx="720000" cy="972000"/>
-          </a:xfrm>
-          <a:prstGeom prst="roundRect">
-            <a:avLst>
-              <a:gd name="adj" fmla="val 9000"/>
-            </a:avLst>
-          </a:prstGeom>
-          <a:solidFill>
-            <a:srgbClr val="EEF0F8"/>
-          </a:solidFill>
-          <a:ln>
-            <a:noFill/>
-          </a:ln>
-        </p:spPr>
-      </p:sp>
-      <p:sp>
-        <p:nvSpPr>
-          <p:cNvPr id="39" name="عدد مهام قادمة"/>
-          <p:cNvSpPr>
-            <a:spLocks noGrp="1"/>
-          </p:cNvSpPr>
-          <p:nvPr>
-            <p:ph type="body" sz="quarter" idx="23" hasCustomPrompt="1"/>
-          </p:nvPr>
-        </p:nvSpPr>
-        <p:spPr>
-          <a:xfrm>
-            <a:off x="324000" y="2070000"/>
-            <a:ext cx="720000" cy="504000"/>
-          </a:xfrm>
-          <a:prstGeom prst="rect">
-            <a:avLst/>
-          </a:prstGeom>
-          <a:noFill/>
-        </p:spPr>
-        <p:txBody>
-          <a:bodyPr wrap="square" lIns="0" tIns="0" rIns="0" bIns="0" rtlCol="0" anchor="ctr"/>
-          <a:lstStyle>
-            <a:lvl1pPr marL="0" indent="0" algn="ctr" rtl="1">
-              <a:lnSpc>
-                <a:spcPct val="100000"/>
-              </a:lnSpc>
-              <a:spcAft>
-                <a:spcPts val="0"/>
-              </a:spcAft>
-              <a:buNone/>
-              <a:defRPr lang="ar-SA" sz="2200" b="1" dirty="0">
-                <a:solidFill>
-                  <a:srgbClr val="6459A7"/>
-                </a:solidFill>
-                <a:latin typeface="IBM Plex Sans Arabic"/>
-                <a:cs typeface="IBM Plex Sans Arabic"/>
-              </a:defRPr>
-            </a:lvl1pPr>
-          </a:lstStyle>
-          <a:p>
-            <a:r>
-              <a:rPr lang="ar-SA" dirty="0"/>
-              <a:t>0</a:t>
-            </a:r>
-          </a:p>
-        </p:txBody>
-      </p:sp>
-      <p:sp>
-        <p:nvSpPr>
-          <p:cNvPr id="40" name="تسمية مهام قادمة"/>
-          <p:cNvSpPr txBox="1"/>
-          <p:nvPr/>
-        </p:nvSpPr>
-        <p:spPr>
-          <a:xfrm>
-            <a:off x="324000" y="2610000"/>
-            <a:ext cx="720000" cy="288000"/>
-          </a:xfrm>
-          <a:prstGeom prst="rect">
-            <a:avLst/>
-          </a:prstGeom>
-          <a:noFill/>
-          <a:ln>
-            <a:noFill/>
-          </a:ln>
-        </p:spPr>
-        <p:txBody>
-          <a:bodyPr wrap="square" lIns="0" tIns="0" rIns="0" bIns="0" rtlCol="0" anchor="t"/>
-          <a:lstStyle/>
-          <a:p>
-            <a:pPr marL="0" indent="0" algn="ctr" rtl="1">
-              <a:lnSpc>
-                <a:spcPct val="100000"/>
-              </a:lnSpc>
-              <a:buNone/>
-            </a:pPr>
-            <a:r>
-              <a:rPr lang="ar-SA" sz="850" dirty="0">
-                <a:solidFill>
-                  <a:srgbClr val="5F6B7A"/>
-                </a:solidFill>
-                <a:latin typeface="IBM Plex Sans Arabic"/>
-                <a:cs typeface="IBM Plex Sans Arabic"/>
-              </a:rPr>
-              <a:t>مهام قادمة</a:t>
-            </a:r>
-          </a:p>
-        </p:txBody>
-      </p:sp>
-      <p:sp>
-        <p:nvSpPr>
-          <p:cNvPr id="41" name="أيقونة قسم"/>
-          <p:cNvSpPr/>
-          <p:nvPr/>
-        </p:nvSpPr>
-        <p:spPr>
-          <a:xfrm>
-            <a:off x="6998400" y="3322800"/>
-            <a:ext cx="129600" cy="129600"/>
-          </a:xfrm>
-          <a:prstGeom prst="ellipse">
-            <a:avLst/>
-          </a:prstGeom>
-          <a:solidFill>
-            <a:srgbClr val="33CC99"/>
-          </a:solidFill>
-          <a:ln>
-            <a:noFill/>
-          </a:ln>
-        </p:spPr>
-      </p:sp>
-      <p:sp>
-        <p:nvSpPr>
-          <p:cNvPr id="42" name="أيقونة قسم داخلية"/>
-          <p:cNvSpPr/>
-          <p:nvPr/>
-        </p:nvSpPr>
-        <p:spPr>
-          <a:xfrm>
-            <a:off x="7038000" y="3362400"/>
-            <a:ext cx="50400" cy="50400"/>
+            <a:off x="7029000" y="3342600"/>
+            <a:ext cx="54000" cy="54000"/>
           </a:xfrm>
           <a:prstGeom prst="ellipse">
             <a:avLst/>
@@ -2019,14 +2729,14 @@
       </p:sp>
       <p:sp>
         <p:nvSpPr>
-          <p:cNvPr id="43" name="عنوان قسم: المهام المنجزة هذا الأسبوع"/>
+          <p:cNvPr id="45" name="عنوان قسم: المهام المنجزة هذا الأسبوع"/>
           <p:cNvSpPr txBox="1"/>
           <p:nvPr/>
         </p:nvSpPr>
         <p:spPr>
           <a:xfrm>
-            <a:off x="2606400" y="3268800"/>
-            <a:ext cx="4320000" cy="230400"/>
+            <a:off x="2214000" y="3225600"/>
+            <a:ext cx="4680000" cy="288000"/>
           </a:xfrm>
           <a:prstGeom prst="rect">
             <a:avLst/>
@@ -2041,10 +2751,19 @@
           <a:lstStyle/>
           <a:p>
             <a:pPr marL="0" indent="0" algn="r" rtl="1">
+              <a:lnSpc>
+                <a:spcPct val="100000"/>
+              </a:lnSpc>
+              <a:spcBef>
+                <a:spcPts val="0"/>
+              </a:spcBef>
+              <a:spcAft>
+                <a:spcPts val="0"/>
+              </a:spcAft>
               <a:buNone/>
             </a:pPr>
             <a:r>
-              <a:rPr lang="ar-SA" sz="1250" b="1" dirty="0">
+              <a:rPr lang="ar-SA" sz="1400" b="1" dirty="0">
                 <a:solidFill>
                   <a:srgbClr val="273470"/>
                 </a:solidFill>
@@ -2058,18 +2777,18 @@
       </p:sp>
       <p:sp>
         <p:nvSpPr>
-          <p:cNvPr id="44" name="المهام المنجزة"/>
+          <p:cNvPr id="46" name="المهام المنجزة"/>
           <p:cNvSpPr>
             <a:spLocks noGrp="1"/>
           </p:cNvSpPr>
           <p:nvPr>
-            <p:ph type="body" sz="quarter" idx="24" hasCustomPrompt="1"/>
+            <p:ph type="body" sz="quarter" idx="109" hasCustomPrompt="1"/>
           </p:nvPr>
         </p:nvSpPr>
         <p:spPr>
           <a:xfrm>
-            <a:off x="432000" y="3564000"/>
-            <a:ext cx="6696000" cy="1440000"/>
+            <a:off x="432000" y="3510000"/>
+            <a:ext cx="6696000" cy="1368000"/>
           </a:xfrm>
           <a:prstGeom prst="rect">
             <a:avLst/>
@@ -2083,18 +2802,21 @@
           <a:lstStyle>
             <a:lvl1pPr marL="162000" indent="-162000" algn="r" rtl="1">
               <a:lnSpc>
-                <a:spcPct val="128000"/>
-              </a:lnSpc>
-              <a:spcAft>
-                <a:spcPts val="250"/>
+                <a:spcPct val="100000"/>
+              </a:lnSpc>
+              <a:spcBef>
+                <a:spcPts val="0"/>
+              </a:spcBef>
+              <a:spcAft>
+                <a:spcPts val="200"/>
               </a:spcAft>
               <a:buClr>
-                <a:srgbClr val="33CC99"/>
+                <a:srgbClr val="127A5B"/>
               </a:buClr>
               <a:buSzPct val="110000"/>
               <a:buFont typeface="Arial" pitchFamily="34" charset="0"/>
               <a:buChar char="•"/>
-              <a:defRPr lang="ar-SA" sz="1200" dirty="0">
+              <a:defRPr lang="ar-SA" sz="1100" dirty="0">
                 <a:solidFill>
                   <a:srgbClr val="1F2A37"/>
                 </a:solidFill>
@@ -2104,10 +2826,13 @@
             </a:lvl1pPr>
             <a:lvl2pPr marL="342000" indent="-162000" algn="r" rtl="1">
               <a:lnSpc>
-                <a:spcPct val="128000"/>
-              </a:lnSpc>
-              <a:spcAft>
-                <a:spcPts val="250"/>
+                <a:spcPct val="100000"/>
+              </a:lnSpc>
+              <a:spcBef>
+                <a:spcPts val="0"/>
+              </a:spcBef>
+              <a:spcAft>
+                <a:spcPts val="200"/>
               </a:spcAft>
               <a:buClr>
                 <a:srgbClr val="5F6B7A"/>
@@ -2115,7 +2840,7 @@
               <a:buSzPct val="110000"/>
               <a:buFont typeface="Arial" pitchFamily="34" charset="0"/>
               <a:buChar char="–"/>
-              <a:defRPr lang="ar-SA" sz="1100" dirty="0">
+              <a:defRPr lang="ar-SA" sz="1000" dirty="0">
                 <a:solidFill>
                   <a:srgbClr val="5F6B7A"/>
                 </a:solidFill>
@@ -2123,31 +2848,103 @@
                 <a:cs typeface="IBM Plex Sans Arabic Medium"/>
               </a:defRPr>
             </a:lvl2pPr>
+            <a:lvl3pPr marL="522000" indent="-162000" algn="r" rtl="1">
+              <a:lnSpc>
+                <a:spcPct val="100000"/>
+              </a:lnSpc>
+              <a:spcBef>
+                <a:spcPts val="0"/>
+              </a:spcBef>
+              <a:spcAft>
+                <a:spcPts val="200"/>
+              </a:spcAft>
+              <a:buClr>
+                <a:srgbClr val="5F6B7A"/>
+              </a:buClr>
+              <a:buSzPct val="110000"/>
+              <a:buFont typeface="Arial" pitchFamily="34" charset="0"/>
+              <a:buChar char="–"/>
+              <a:defRPr lang="ar-SA" sz="1000" dirty="0">
+                <a:solidFill>
+                  <a:srgbClr val="5F6B7A"/>
+                </a:solidFill>
+                <a:latin typeface="IBM Plex Sans Arabic Medium"/>
+                <a:cs typeface="IBM Plex Sans Arabic Medium"/>
+              </a:defRPr>
+            </a:lvl3pPr>
+            <a:lvl4pPr marL="702000" indent="-162000" algn="r" rtl="1">
+              <a:lnSpc>
+                <a:spcPct val="100000"/>
+              </a:lnSpc>
+              <a:spcBef>
+                <a:spcPts val="0"/>
+              </a:spcBef>
+              <a:spcAft>
+                <a:spcPts val="200"/>
+              </a:spcAft>
+              <a:buClr>
+                <a:srgbClr val="5F6B7A"/>
+              </a:buClr>
+              <a:buSzPct val="110000"/>
+              <a:buFont typeface="Arial" pitchFamily="34" charset="0"/>
+              <a:buChar char="–"/>
+              <a:defRPr lang="ar-SA" sz="1000" dirty="0">
+                <a:solidFill>
+                  <a:srgbClr val="5F6B7A"/>
+                </a:solidFill>
+                <a:latin typeface="IBM Plex Sans Arabic Medium"/>
+                <a:cs typeface="IBM Plex Sans Arabic Medium"/>
+              </a:defRPr>
+            </a:lvl4pPr>
+            <a:lvl5pPr marL="882000" indent="-162000" algn="r" rtl="1">
+              <a:lnSpc>
+                <a:spcPct val="100000"/>
+              </a:lnSpc>
+              <a:spcBef>
+                <a:spcPts val="0"/>
+              </a:spcBef>
+              <a:spcAft>
+                <a:spcPts val="200"/>
+              </a:spcAft>
+              <a:buClr>
+                <a:srgbClr val="5F6B7A"/>
+              </a:buClr>
+              <a:buSzPct val="110000"/>
+              <a:buFont typeface="Arial" pitchFamily="34" charset="0"/>
+              <a:buChar char="–"/>
+              <a:defRPr lang="ar-SA" sz="1000" dirty="0">
+                <a:solidFill>
+                  <a:srgbClr val="5F6B7A"/>
+                </a:solidFill>
+                <a:latin typeface="IBM Plex Sans Arabic Medium"/>
+                <a:cs typeface="IBM Plex Sans Arabic Medium"/>
+              </a:defRPr>
+            </a:lvl5pPr>
           </a:lstStyle>
           <a:p>
             <a:r>
               <a:rPr lang="ar-SA" dirty="0"/>
-              <a:t>اكتب كل مهمة منجزة في سطر: اسم المهمة — النتيجة أو الأثر (مع رقم إن أمكن).</a:t>
-            </a:r>
-          </a:p>
-        </p:txBody>
-      </p:sp>
-      <p:sp>
-        <p:nvSpPr>
-          <p:cNvPr id="45" name="أيقونة قسم"/>
+              <a:t>مهمة في كل سطر: اسم المهمة — النتيجة أو الأثر (برقم إن أمكن). خمسة بنود كحد أقصى.</a:t>
+            </a:r>
+          </a:p>
+        </p:txBody>
+      </p:sp>
+      <p:sp>
+        <p:nvSpPr>
+          <p:cNvPr id="47" name="أيقونة قسم"/>
           <p:cNvSpPr/>
           <p:nvPr/>
         </p:nvSpPr>
         <p:spPr>
           <a:xfrm>
-            <a:off x="6998400" y="5266800"/>
-            <a:ext cx="129600" cy="129600"/>
+            <a:off x="6984000" y="5133600"/>
+            <a:ext cx="144000" cy="144000"/>
           </a:xfrm>
           <a:prstGeom prst="ellipse">
             <a:avLst/>
           </a:prstGeom>
           <a:solidFill>
-            <a:srgbClr val="0E8A8A"/>
+            <a:srgbClr val="0C7373"/>
           </a:solidFill>
           <a:ln>
             <a:noFill/>
@@ -2156,14 +2953,14 @@
       </p:sp>
       <p:sp>
         <p:nvSpPr>
-          <p:cNvPr id="46" name="أيقونة قسم داخلية"/>
+          <p:cNvPr id="48" name="أيقونة قسم داخلية"/>
           <p:cNvSpPr/>
           <p:nvPr/>
         </p:nvSpPr>
         <p:spPr>
           <a:xfrm>
-            <a:off x="7038000" y="5306400"/>
-            <a:ext cx="50400" cy="50400"/>
+            <a:off x="7029000" y="5178600"/>
+            <a:ext cx="54000" cy="54000"/>
           </a:xfrm>
           <a:prstGeom prst="ellipse">
             <a:avLst/>
@@ -2178,14 +2975,14 @@
       </p:sp>
       <p:sp>
         <p:nvSpPr>
-          <p:cNvPr id="47" name="عنوان قسم: المهام الجارية"/>
+          <p:cNvPr id="49" name="عنوان قسم: المهام الجارية"/>
           <p:cNvSpPr txBox="1"/>
           <p:nvPr/>
         </p:nvSpPr>
         <p:spPr>
           <a:xfrm>
-            <a:off x="2606400" y="5212800"/>
-            <a:ext cx="4320000" cy="230400"/>
+            <a:off x="2214000" y="5061600"/>
+            <a:ext cx="4680000" cy="288000"/>
           </a:xfrm>
           <a:prstGeom prst="rect">
             <a:avLst/>
@@ -2200,10 +2997,19 @@
           <a:lstStyle/>
           <a:p>
             <a:pPr marL="0" indent="0" algn="r" rtl="1">
+              <a:lnSpc>
+                <a:spcPct val="100000"/>
+              </a:lnSpc>
+              <a:spcBef>
+                <a:spcPts val="0"/>
+              </a:spcBef>
+              <a:spcAft>
+                <a:spcPts val="0"/>
+              </a:spcAft>
               <a:buNone/>
             </a:pPr>
             <a:r>
-              <a:rPr lang="ar-SA" sz="1250" b="1" dirty="0">
+              <a:rPr lang="ar-SA" sz="1400" b="1" dirty="0">
                 <a:solidFill>
                   <a:srgbClr val="273470"/>
                 </a:solidFill>
@@ -2217,14 +3023,14 @@
       </p:sp>
       <p:sp>
         <p:nvSpPr>
-          <p:cNvPr id="48" name="أيقونة قسم"/>
+          <p:cNvPr id="50" name="أيقونة قسم"/>
           <p:cNvSpPr/>
           <p:nvPr/>
         </p:nvSpPr>
         <p:spPr>
           <a:xfrm>
-            <a:off x="6998400" y="7246800"/>
-            <a:ext cx="129600" cy="129600"/>
+            <a:off x="6984000" y="7185600"/>
+            <a:ext cx="144000" cy="144000"/>
           </a:xfrm>
           <a:prstGeom prst="ellipse">
             <a:avLst/>
@@ -2239,14 +3045,14 @@
       </p:sp>
       <p:sp>
         <p:nvSpPr>
-          <p:cNvPr id="49" name="أيقونة قسم داخلية"/>
+          <p:cNvPr id="51" name="أيقونة قسم داخلية"/>
           <p:cNvSpPr/>
           <p:nvPr/>
         </p:nvSpPr>
         <p:spPr>
           <a:xfrm>
-            <a:off x="7038000" y="7286400"/>
-            <a:ext cx="50400" cy="50400"/>
+            <a:off x="7029000" y="7230600"/>
+            <a:ext cx="54000" cy="54000"/>
           </a:xfrm>
           <a:prstGeom prst="ellipse">
             <a:avLst/>
@@ -2261,14 +3067,14 @@
       </p:sp>
       <p:sp>
         <p:nvSpPr>
-          <p:cNvPr id="50" name="عنوان قسم: خطة الأسبوع القادم"/>
+          <p:cNvPr id="52" name="عنوان قسم: خطة الأسبوع المقبل"/>
           <p:cNvSpPr txBox="1"/>
           <p:nvPr/>
         </p:nvSpPr>
         <p:spPr>
           <a:xfrm>
-            <a:off x="2606400" y="7192800"/>
-            <a:ext cx="4320000" cy="230400"/>
+            <a:off x="2214000" y="7113600"/>
+            <a:ext cx="4680000" cy="288000"/>
           </a:xfrm>
           <a:prstGeom prst="rect">
             <a:avLst/>
@@ -2283,35 +3089,44 @@
           <a:lstStyle/>
           <a:p>
             <a:pPr marL="0" indent="0" algn="r" rtl="1">
+              <a:lnSpc>
+                <a:spcPct val="100000"/>
+              </a:lnSpc>
+              <a:spcBef>
+                <a:spcPts val="0"/>
+              </a:spcBef>
+              <a:spcAft>
+                <a:spcPts val="0"/>
+              </a:spcAft>
               <a:buNone/>
             </a:pPr>
             <a:r>
-              <a:rPr lang="ar-SA" sz="1250" b="1" dirty="0">
+              <a:rPr lang="ar-SA" sz="1400" b="1" dirty="0">
                 <a:solidFill>
                   <a:srgbClr val="273470"/>
                 </a:solidFill>
                 <a:latin typeface="IBM Plex Sans Arabic"/>
                 <a:cs typeface="IBM Plex Sans Arabic"/>
               </a:rPr>
-              <a:t>خطة الأسبوع القادم</a:t>
-            </a:r>
-          </a:p>
-        </p:txBody>
-      </p:sp>
-      <p:sp>
-        <p:nvSpPr>
-          <p:cNvPr id="51" name="خطة الأسبوع القادم"/>
+              <a:t>خطة الأسبوع المقبل</a:t>
+            </a:r>
+          </a:p>
+        </p:txBody>
+      </p:sp>
+      <p:sp>
+        <p:nvSpPr>
+          <p:cNvPr id="53" name="خطة الأسبوع المقبل"/>
           <p:cNvSpPr>
             <a:spLocks noGrp="1"/>
           </p:cNvSpPr>
           <p:nvPr>
-            <p:ph type="body" sz="quarter" idx="25" hasCustomPrompt="1"/>
+            <p:ph type="body" sz="quarter" idx="110" hasCustomPrompt="1"/>
           </p:nvPr>
         </p:nvSpPr>
         <p:spPr>
           <a:xfrm>
-            <a:off x="432000" y="7470000"/>
-            <a:ext cx="6696000" cy="1170000"/>
+            <a:off x="432000" y="7398000"/>
+            <a:ext cx="6696000" cy="1368000"/>
           </a:xfrm>
           <a:prstGeom prst="rect">
             <a:avLst/>
@@ -2325,10 +3140,13 @@
           <a:lstStyle>
             <a:lvl1pPr marL="162000" indent="-162000" algn="r" rtl="1">
               <a:lnSpc>
-                <a:spcPct val="128000"/>
-              </a:lnSpc>
-              <a:spcAft>
-                <a:spcPts val="250"/>
+                <a:spcPct val="100000"/>
+              </a:lnSpc>
+              <a:spcBef>
+                <a:spcPts val="0"/>
+              </a:spcBef>
+              <a:spcAft>
+                <a:spcPts val="200"/>
               </a:spcAft>
               <a:buClr>
                 <a:srgbClr val="6459A7"/>
@@ -2336,7 +3154,7 @@
               <a:buSzPct val="110000"/>
               <a:buFont typeface="Arial" pitchFamily="34" charset="0"/>
               <a:buChar char="•"/>
-              <a:defRPr lang="ar-SA" sz="1200" dirty="0">
+              <a:defRPr lang="ar-SA" sz="1100" dirty="0">
                 <a:solidFill>
                   <a:srgbClr val="1F2A37"/>
                 </a:solidFill>
@@ -2346,10 +3164,13 @@
             </a:lvl1pPr>
             <a:lvl2pPr marL="342000" indent="-162000" algn="r" rtl="1">
               <a:lnSpc>
-                <a:spcPct val="128000"/>
-              </a:lnSpc>
-              <a:spcAft>
-                <a:spcPts val="250"/>
+                <a:spcPct val="100000"/>
+              </a:lnSpc>
+              <a:spcBef>
+                <a:spcPts val="0"/>
+              </a:spcBef>
+              <a:spcAft>
+                <a:spcPts val="200"/>
               </a:spcAft>
               <a:buClr>
                 <a:srgbClr val="5F6B7A"/>
@@ -2357,7 +3178,7 @@
               <a:buSzPct val="110000"/>
               <a:buFont typeface="Arial" pitchFamily="34" charset="0"/>
               <a:buChar char="–"/>
-              <a:defRPr lang="ar-SA" sz="1100" dirty="0">
+              <a:defRPr lang="ar-SA" sz="1000" dirty="0">
                 <a:solidFill>
                   <a:srgbClr val="5F6B7A"/>
                 </a:solidFill>
@@ -2365,49 +3186,123 @@
                 <a:cs typeface="IBM Plex Sans Arabic Medium"/>
               </a:defRPr>
             </a:lvl2pPr>
+            <a:lvl3pPr marL="522000" indent="-162000" algn="r" rtl="1">
+              <a:lnSpc>
+                <a:spcPct val="100000"/>
+              </a:lnSpc>
+              <a:spcBef>
+                <a:spcPts val="0"/>
+              </a:spcBef>
+              <a:spcAft>
+                <a:spcPts val="200"/>
+              </a:spcAft>
+              <a:buClr>
+                <a:srgbClr val="5F6B7A"/>
+              </a:buClr>
+              <a:buSzPct val="110000"/>
+              <a:buFont typeface="Arial" pitchFamily="34" charset="0"/>
+              <a:buChar char="–"/>
+              <a:defRPr lang="ar-SA" sz="1000" dirty="0">
+                <a:solidFill>
+                  <a:srgbClr val="5F6B7A"/>
+                </a:solidFill>
+                <a:latin typeface="IBM Plex Sans Arabic Medium"/>
+                <a:cs typeface="IBM Plex Sans Arabic Medium"/>
+              </a:defRPr>
+            </a:lvl3pPr>
+            <a:lvl4pPr marL="702000" indent="-162000" algn="r" rtl="1">
+              <a:lnSpc>
+                <a:spcPct val="100000"/>
+              </a:lnSpc>
+              <a:spcBef>
+                <a:spcPts val="0"/>
+              </a:spcBef>
+              <a:spcAft>
+                <a:spcPts val="200"/>
+              </a:spcAft>
+              <a:buClr>
+                <a:srgbClr val="5F6B7A"/>
+              </a:buClr>
+              <a:buSzPct val="110000"/>
+              <a:buFont typeface="Arial" pitchFamily="34" charset="0"/>
+              <a:buChar char="–"/>
+              <a:defRPr lang="ar-SA" sz="1000" dirty="0">
+                <a:solidFill>
+                  <a:srgbClr val="5F6B7A"/>
+                </a:solidFill>
+                <a:latin typeface="IBM Plex Sans Arabic Medium"/>
+                <a:cs typeface="IBM Plex Sans Arabic Medium"/>
+              </a:defRPr>
+            </a:lvl4pPr>
+            <a:lvl5pPr marL="882000" indent="-162000" algn="r" rtl="1">
+              <a:lnSpc>
+                <a:spcPct val="100000"/>
+              </a:lnSpc>
+              <a:spcBef>
+                <a:spcPts val="0"/>
+              </a:spcBef>
+              <a:spcAft>
+                <a:spcPts val="200"/>
+              </a:spcAft>
+              <a:buClr>
+                <a:srgbClr val="5F6B7A"/>
+              </a:buClr>
+              <a:buSzPct val="110000"/>
+              <a:buFont typeface="Arial" pitchFamily="34" charset="0"/>
+              <a:buChar char="–"/>
+              <a:defRPr lang="ar-SA" sz="1000" dirty="0">
+                <a:solidFill>
+                  <a:srgbClr val="5F6B7A"/>
+                </a:solidFill>
+                <a:latin typeface="IBM Plex Sans Arabic Medium"/>
+                <a:cs typeface="IBM Plex Sans Arabic Medium"/>
+              </a:defRPr>
+            </a:lvl5pPr>
           </a:lstStyle>
           <a:p>
             <a:r>
               <a:rPr lang="ar-SA" dirty="0"/>
-              <a:t>اكتب المهام المخطط لها الأسبوع القادم، مهمة في كل سطر، مع الموعد إن وُجد.</a:t>
-            </a:r>
-          </a:p>
-        </p:txBody>
-      </p:sp>
-      <p:sp>
-        <p:nvSpPr>
-          <p:cNvPr id="52" name="صندوق القرار"/>
+              <a:t>مهام الأسبوع المقبل، مهمة في كل سطر: النتيجة المتوقعة + اليوم. خمسة بنود كحد أقصى.</a:t>
+            </a:r>
+          </a:p>
+        </p:txBody>
+      </p:sp>
+      <p:sp>
+        <p:nvSpPr>
+          <p:cNvPr id="54" name="صندوق القرار"/>
           <p:cNvSpPr/>
           <p:nvPr/>
         </p:nvSpPr>
         <p:spPr>
           <a:xfrm>
-            <a:off x="3672000" y="8820000"/>
-            <a:ext cx="3456000" cy="1044000"/>
+            <a:off x="3708000" y="8892000"/>
+            <a:ext cx="3420000" cy="1080000"/>
           </a:xfrm>
           <a:prstGeom prst="roundRect">
             <a:avLst>
-              <a:gd name="adj" fmla="val 6000"/>
+              <a:gd name="adj" fmla="val 5000"/>
             </a:avLst>
           </a:prstGeom>
           <a:solidFill>
             <a:srgbClr val="E8F7F1"/>
           </a:solidFill>
-          <a:ln>
-            <a:noFill/>
+          <a:ln w="9525">
+            <a:solidFill>
+              <a:srgbClr val="0C7373"/>
+            </a:solidFill>
           </a:ln>
         </p:spPr>
       </p:sp>
       <p:sp>
         <p:nvSpPr>
-          <p:cNvPr id="53" name="تسمية القرار"/>
+          <p:cNvPr id="55" name="تسمية القرار"/>
           <p:cNvSpPr txBox="1"/>
           <p:nvPr/>
         </p:nvSpPr>
         <p:spPr>
           <a:xfrm>
-            <a:off x="3816000" y="8910000"/>
-            <a:ext cx="3168000" cy="198000"/>
+            <a:off x="3852000" y="8964000"/>
+            <a:ext cx="3132000" cy="234000"/>
           </a:xfrm>
           <a:prstGeom prst="rect">
             <a:avLst/>
@@ -2422,12 +3317,21 @@
           <a:lstStyle/>
           <a:p>
             <a:pPr marL="0" indent="0" algn="r" rtl="1">
+              <a:lnSpc>
+                <a:spcPct val="100000"/>
+              </a:lnSpc>
+              <a:spcBef>
+                <a:spcPts val="0"/>
+              </a:spcBef>
+              <a:spcAft>
+                <a:spcPts val="0"/>
+              </a:spcAft>
               <a:buNone/>
             </a:pPr>
             <a:r>
-              <a:rPr lang="ar-SA" sz="1050" b="1" dirty="0">
-                <a:solidFill>
-                  <a:srgbClr val="0E8A8A"/>
+              <a:rPr lang="ar-SA" sz="1200" b="1" dirty="0">
+                <a:solidFill>
+                  <a:srgbClr val="0C7373"/>
                 </a:solidFill>
                 <a:latin typeface="IBM Plex Sans Arabic"/>
                 <a:cs typeface="IBM Plex Sans Arabic"/>
@@ -2439,18 +3343,18 @@
       </p:sp>
       <p:sp>
         <p:nvSpPr>
-          <p:cNvPr id="54" name="القرار المطلوب"/>
+          <p:cNvPr id="56" name="القرار المطلوب"/>
           <p:cNvSpPr>
             <a:spLocks noGrp="1"/>
           </p:cNvSpPr>
           <p:nvPr>
-            <p:ph type="body" sz="quarter" idx="26" hasCustomPrompt="1"/>
+            <p:ph type="body" sz="quarter" idx="111" hasCustomPrompt="1"/>
           </p:nvPr>
         </p:nvSpPr>
         <p:spPr>
           <a:xfrm>
-            <a:off x="3816000" y="9144000"/>
-            <a:ext cx="3168000" cy="648000"/>
+            <a:off x="3852000" y="9234000"/>
+            <a:ext cx="3132000" cy="666000"/>
           </a:xfrm>
           <a:prstGeom prst="rect">
             <a:avLst/>
@@ -2464,13 +3368,16 @@
           <a:lstStyle>
             <a:lvl1pPr marL="0" indent="0" algn="r" rtl="1">
               <a:lnSpc>
-                <a:spcPct val="125000"/>
-              </a:lnSpc>
-              <a:spcAft>
-                <a:spcPts val="0"/>
-              </a:spcAft>
-              <a:buNone/>
-              <a:defRPr lang="ar-SA" sz="1100" dirty="0">
+                <a:spcPct val="100000"/>
+              </a:lnSpc>
+              <a:spcBef>
+                <a:spcPts val="0"/>
+              </a:spcBef>
+              <a:spcAft>
+                <a:spcPts val="0"/>
+              </a:spcAft>
+              <a:buNone/>
+              <a:defRPr lang="ar-SA" sz="1150" dirty="0">
                 <a:solidFill>
                   <a:srgbClr val="1F2A37"/>
                 </a:solidFill>
@@ -2478,49 +3385,127 @@
                 <a:cs typeface="IBM Plex Sans Arabic Medium"/>
               </a:defRPr>
             </a:lvl1pPr>
+            <a:lvl2pPr marL="180000" indent="0" algn="r" rtl="1">
+              <a:lnSpc>
+                <a:spcPct val="100000"/>
+              </a:lnSpc>
+              <a:spcBef>
+                <a:spcPts val="0"/>
+              </a:spcBef>
+              <a:spcAft>
+                <a:spcPts val="0"/>
+              </a:spcAft>
+              <a:buNone/>
+              <a:defRPr lang="ar-SA" sz="1050" dirty="0">
+                <a:solidFill>
+                  <a:srgbClr val="5F6B7A"/>
+                </a:solidFill>
+                <a:latin typeface="IBM Plex Sans Arabic Medium"/>
+                <a:cs typeface="IBM Plex Sans Arabic Medium"/>
+              </a:defRPr>
+            </a:lvl2pPr>
+            <a:lvl3pPr marL="360000" indent="0" algn="r" rtl="1">
+              <a:lnSpc>
+                <a:spcPct val="100000"/>
+              </a:lnSpc>
+              <a:spcBef>
+                <a:spcPts val="0"/>
+              </a:spcBef>
+              <a:spcAft>
+                <a:spcPts val="0"/>
+              </a:spcAft>
+              <a:buNone/>
+              <a:defRPr lang="ar-SA" sz="1050" dirty="0">
+                <a:solidFill>
+                  <a:srgbClr val="5F6B7A"/>
+                </a:solidFill>
+                <a:latin typeface="IBM Plex Sans Arabic Medium"/>
+                <a:cs typeface="IBM Plex Sans Arabic Medium"/>
+              </a:defRPr>
+            </a:lvl3pPr>
+            <a:lvl4pPr marL="540000" indent="0" algn="r" rtl="1">
+              <a:lnSpc>
+                <a:spcPct val="100000"/>
+              </a:lnSpc>
+              <a:spcBef>
+                <a:spcPts val="0"/>
+              </a:spcBef>
+              <a:spcAft>
+                <a:spcPts val="0"/>
+              </a:spcAft>
+              <a:buNone/>
+              <a:defRPr lang="ar-SA" sz="1050" dirty="0">
+                <a:solidFill>
+                  <a:srgbClr val="5F6B7A"/>
+                </a:solidFill>
+                <a:latin typeface="IBM Plex Sans Arabic Medium"/>
+                <a:cs typeface="IBM Plex Sans Arabic Medium"/>
+              </a:defRPr>
+            </a:lvl4pPr>
+            <a:lvl5pPr marL="720000" indent="0" algn="r" rtl="1">
+              <a:lnSpc>
+                <a:spcPct val="100000"/>
+              </a:lnSpc>
+              <a:spcBef>
+                <a:spcPts val="0"/>
+              </a:spcBef>
+              <a:spcAft>
+                <a:spcPts val="0"/>
+              </a:spcAft>
+              <a:buNone/>
+              <a:defRPr lang="ar-SA" sz="1050" dirty="0">
+                <a:solidFill>
+                  <a:srgbClr val="5F6B7A"/>
+                </a:solidFill>
+                <a:latin typeface="IBM Plex Sans Arabic Medium"/>
+                <a:cs typeface="IBM Plex Sans Arabic Medium"/>
+              </a:defRPr>
+            </a:lvl5pPr>
           </a:lstStyle>
           <a:p>
             <a:r>
               <a:rPr lang="ar-SA" dirty="0"/>
-              <a:t>اكتب طلبًا واضحًا واحدًا: ماذا تحتاج، ولماذا، وقبل أي تاريخ. (اتركه فارغًا إن لم يوجد)</a:t>
-            </a:r>
-          </a:p>
-        </p:txBody>
-      </p:sp>
-      <p:sp>
-        <p:nvSpPr>
-          <p:cNvPr id="55" name="صندوق التحديات"/>
+              <a:t>المطلوب: … | قبل: (التاريخ) | أثر التأخير: … (اتركه فارغًا إن لم يوجد)</a:t>
+            </a:r>
+          </a:p>
+        </p:txBody>
+      </p:sp>
+      <p:sp>
+        <p:nvSpPr>
+          <p:cNvPr id="57" name="صندوق التحديات"/>
           <p:cNvSpPr/>
           <p:nvPr/>
         </p:nvSpPr>
         <p:spPr>
           <a:xfrm>
-            <a:off x="432000" y="8820000"/>
-            <a:ext cx="3060000" cy="1044000"/>
+            <a:off x="432000" y="8892000"/>
+            <a:ext cx="3132000" cy="1080000"/>
           </a:xfrm>
           <a:prstGeom prst="roundRect">
             <a:avLst>
-              <a:gd name="adj" fmla="val 6000"/>
+              <a:gd name="adj" fmla="val 5000"/>
             </a:avLst>
           </a:prstGeom>
           <a:solidFill>
             <a:srgbClr val="F4F5F7"/>
           </a:solidFill>
-          <a:ln>
-            <a:noFill/>
+          <a:ln w="6350">
+            <a:solidFill>
+              <a:srgbClr val="C9CFD9"/>
+            </a:solidFill>
           </a:ln>
         </p:spPr>
       </p:sp>
       <p:sp>
         <p:nvSpPr>
-          <p:cNvPr id="56" name="تسمية التحديات"/>
+          <p:cNvPr id="58" name="تسمية التحديات"/>
           <p:cNvSpPr txBox="1"/>
           <p:nvPr/>
         </p:nvSpPr>
         <p:spPr>
           <a:xfrm>
-            <a:off x="576000" y="8910000"/>
-            <a:ext cx="2772000" cy="198000"/>
+            <a:off x="576000" y="8964000"/>
+            <a:ext cx="2844000" cy="234000"/>
           </a:xfrm>
           <a:prstGeom prst="rect">
             <a:avLst/>
@@ -2535,10 +3520,19 @@
           <a:lstStyle/>
           <a:p>
             <a:pPr marL="0" indent="0" algn="r" rtl="1">
+              <a:lnSpc>
+                <a:spcPct val="100000"/>
+              </a:lnSpc>
+              <a:spcBef>
+                <a:spcPts val="0"/>
+              </a:spcBef>
+              <a:spcAft>
+                <a:spcPts val="0"/>
+              </a:spcAft>
               <a:buNone/>
             </a:pPr>
             <a:r>
-              <a:rPr lang="ar-SA" sz="950" b="1" dirty="0">
+              <a:rPr lang="ar-SA" sz="1000" b="1" dirty="0">
                 <a:solidFill>
                   <a:srgbClr val="5F6B7A"/>
                 </a:solidFill>
@@ -2552,18 +3546,18 @@
       </p:sp>
       <p:sp>
         <p:nvSpPr>
-          <p:cNvPr id="57" name="التحديات"/>
+          <p:cNvPr id="59" name="التحديات"/>
           <p:cNvSpPr>
             <a:spLocks noGrp="1"/>
           </p:cNvSpPr>
           <p:nvPr>
-            <p:ph type="body" sz="quarter" idx="27" hasCustomPrompt="1"/>
+            <p:ph type="body" sz="quarter" idx="112" hasCustomPrompt="1"/>
           </p:nvPr>
         </p:nvSpPr>
         <p:spPr>
           <a:xfrm>
-            <a:off x="576000" y="9144000"/>
-            <a:ext cx="2772000" cy="648000"/>
+            <a:off x="576000" y="9234000"/>
+            <a:ext cx="2844000" cy="666000"/>
           </a:xfrm>
           <a:prstGeom prst="rect">
             <a:avLst/>
@@ -2577,46 +3571,125 @@
           <a:lstStyle>
             <a:lvl1pPr marL="0" indent="0" algn="r" rtl="1">
               <a:lnSpc>
-                <a:spcPct val="125000"/>
-              </a:lnSpc>
+                <a:spcPct val="100000"/>
+              </a:lnSpc>
+              <a:spcBef>
+                <a:spcPts val="0"/>
+              </a:spcBef>
               <a:spcAft>
                 <a:spcPts val="0"/>
               </a:spcAft>
               <a:buNone/>
               <a:defRPr lang="ar-SA" sz="1050" dirty="0">
                 <a:solidFill>
-                  <a:srgbClr val="5F6B7A"/>
+                  <a:srgbClr val="4F5B6A"/>
                 </a:solidFill>
                 <a:latin typeface="IBM Plex Sans Arabic Medium"/>
                 <a:cs typeface="IBM Plex Sans Arabic Medium"/>
               </a:defRPr>
             </a:lvl1pPr>
+            <a:lvl2pPr marL="180000" indent="0" algn="r" rtl="1">
+              <a:lnSpc>
+                <a:spcPct val="100000"/>
+              </a:lnSpc>
+              <a:spcBef>
+                <a:spcPts val="0"/>
+              </a:spcBef>
+              <a:spcAft>
+                <a:spcPts val="0"/>
+              </a:spcAft>
+              <a:buNone/>
+              <a:defRPr lang="ar-SA" sz="950" dirty="0">
+                <a:solidFill>
+                  <a:srgbClr val="5F6B7A"/>
+                </a:solidFill>
+                <a:latin typeface="IBM Plex Sans Arabic Medium"/>
+                <a:cs typeface="IBM Plex Sans Arabic Medium"/>
+              </a:defRPr>
+            </a:lvl2pPr>
+            <a:lvl3pPr marL="360000" indent="0" algn="r" rtl="1">
+              <a:lnSpc>
+                <a:spcPct val="100000"/>
+              </a:lnSpc>
+              <a:spcBef>
+                <a:spcPts val="0"/>
+              </a:spcBef>
+              <a:spcAft>
+                <a:spcPts val="0"/>
+              </a:spcAft>
+              <a:buNone/>
+              <a:defRPr lang="ar-SA" sz="950" dirty="0">
+                <a:solidFill>
+                  <a:srgbClr val="5F6B7A"/>
+                </a:solidFill>
+                <a:latin typeface="IBM Plex Sans Arabic Medium"/>
+                <a:cs typeface="IBM Plex Sans Arabic Medium"/>
+              </a:defRPr>
+            </a:lvl3pPr>
+            <a:lvl4pPr marL="540000" indent="0" algn="r" rtl="1">
+              <a:lnSpc>
+                <a:spcPct val="100000"/>
+              </a:lnSpc>
+              <a:spcBef>
+                <a:spcPts val="0"/>
+              </a:spcBef>
+              <a:spcAft>
+                <a:spcPts val="0"/>
+              </a:spcAft>
+              <a:buNone/>
+              <a:defRPr lang="ar-SA" sz="950" dirty="0">
+                <a:solidFill>
+                  <a:srgbClr val="5F6B7A"/>
+                </a:solidFill>
+                <a:latin typeface="IBM Plex Sans Arabic Medium"/>
+                <a:cs typeface="IBM Plex Sans Arabic Medium"/>
+              </a:defRPr>
+            </a:lvl4pPr>
+            <a:lvl5pPr marL="720000" indent="0" algn="r" rtl="1">
+              <a:lnSpc>
+                <a:spcPct val="100000"/>
+              </a:lnSpc>
+              <a:spcBef>
+                <a:spcPts val="0"/>
+              </a:spcBef>
+              <a:spcAft>
+                <a:spcPts val="0"/>
+              </a:spcAft>
+              <a:buNone/>
+              <a:defRPr lang="ar-SA" sz="950" dirty="0">
+                <a:solidFill>
+                  <a:srgbClr val="5F6B7A"/>
+                </a:solidFill>
+                <a:latin typeface="IBM Plex Sans Arabic Medium"/>
+                <a:cs typeface="IBM Plex Sans Arabic Medium"/>
+              </a:defRPr>
+            </a:lvl5pPr>
           </a:lstStyle>
           <a:p>
             <a:r>
               <a:rPr lang="ar-SA" dirty="0"/>
-              <a:t>لا توجد تحديات هذا الأسبوع — أو اكتب التحدي في جملة وما فعلته حياله.</a:t>
+              <a:t>جملة واحدة: السبب ← الأثر ← الموعد الجديد ← هل يحتاج تدخّلك؟ (اتركه فارغًا إن لم يوجد)</a:t>
             </a:r>
           </a:p>
         </p:txBody>
       </p:sp>
       <p:cxnSp>
         <p:nvCxnSpPr>
-          <p:cNvPr id="58" name="فاصل التذييل"/>
+          <p:cNvPr id="60" name="فاصل التذييل"/>
           <p:cNvCxnSpPr/>
           <p:nvPr/>
         </p:nvCxnSpPr>
         <p:spPr>
           <a:xfrm>
-            <a:off x="432000" y="10098000"/>
+            <a:off x="432000" y="10134000"/>
             <a:ext cx="6696000" cy="0"/>
           </a:xfrm>
           <a:prstGeom prst="line">
             <a:avLst/>
           </a:prstGeom>
-          <a:ln w="6350" cap="rnd">
+          <a:ln w="9525" cap="rnd">
             <a:solidFill>
-              <a:srgbClr val="DDE1E8"/>
+              <a:srgbClr val="BFC6D1"/>
             </a:solidFill>
             <a:round/>
           </a:ln>
@@ -2624,18 +3697,66 @@
       </p:cxnSp>
       <p:sp>
         <p:nvSpPr>
-          <p:cNvPr id="59" name="التوقيع"/>
+          <p:cNvPr id="61" name="تسمية إعداد:"/>
+          <p:cNvSpPr txBox="1"/>
+          <p:nvPr/>
+        </p:nvSpPr>
+        <p:spPr>
+          <a:xfrm>
+            <a:off x="6660000" y="10206000"/>
+            <a:ext cx="468000" cy="252000"/>
+          </a:xfrm>
+          <a:prstGeom prst="rect">
+            <a:avLst/>
+          </a:prstGeom>
+          <a:noFill/>
+          <a:ln>
+            <a:noFill/>
+          </a:ln>
+        </p:spPr>
+        <p:txBody>
+          <a:bodyPr wrap="square" lIns="0" tIns="0" rIns="0" bIns="0" rtlCol="0" anchor="ctr"/>
+          <a:lstStyle/>
+          <a:p>
+            <a:pPr marL="0" indent="0" algn="r" rtl="1">
+              <a:lnSpc>
+                <a:spcPct val="100000"/>
+              </a:lnSpc>
+              <a:spcBef>
+                <a:spcPts val="0"/>
+              </a:spcBef>
+              <a:spcAft>
+                <a:spcPts val="0"/>
+              </a:spcAft>
+              <a:buNone/>
+            </a:pPr>
+            <a:r>
+              <a:rPr lang="ar-SA" sz="950" b="1" dirty="0">
+                <a:solidFill>
+                  <a:srgbClr val="5F6B7A"/>
+                </a:solidFill>
+                <a:latin typeface="IBM Plex Sans Arabic"/>
+                <a:cs typeface="IBM Plex Sans Arabic"/>
+              </a:rPr>
+              <a:t>إعداد:</a:t>
+            </a:r>
+          </a:p>
+        </p:txBody>
+      </p:sp>
+      <p:sp>
+        <p:nvSpPr>
+          <p:cNvPr id="62" name="اسم المُعِد"/>
           <p:cNvSpPr>
             <a:spLocks noGrp="1"/>
           </p:cNvSpPr>
           <p:nvPr>
-            <p:ph type="body" sz="quarter" idx="28" hasCustomPrompt="1"/>
+            <p:ph type="body" sz="quarter" idx="113" hasCustomPrompt="1"/>
           </p:nvPr>
         </p:nvSpPr>
         <p:spPr>
           <a:xfrm>
-            <a:off x="2520000" y="10170000"/>
-            <a:ext cx="4608000" cy="252000"/>
+            <a:off x="5220000" y="10206000"/>
+            <a:ext cx="1440000" cy="252000"/>
           </a:xfrm>
           <a:prstGeom prst="rect">
             <a:avLst/>
@@ -2649,39 +3770,118 @@
           <a:lstStyle>
             <a:lvl1pPr marL="0" indent="0" algn="r" rtl="1">
               <a:lnSpc>
-                <a:spcPct val="110000"/>
-              </a:lnSpc>
-              <a:spcAft>
-                <a:spcPts val="0"/>
-              </a:spcAft>
-              <a:buNone/>
-              <a:defRPr lang="ar-SA" sz="950" dirty="0">
-                <a:solidFill>
-                  <a:srgbClr val="5F6B7A"/>
-                </a:solidFill>
-                <a:latin typeface="IBM Plex Sans Arabic"/>
-                <a:cs typeface="IBM Plex Sans Arabic"/>
+                <a:spcPct val="100000"/>
+              </a:lnSpc>
+              <a:spcBef>
+                <a:spcPts val="0"/>
+              </a:spcBef>
+              <a:spcAft>
+                <a:spcPts val="0"/>
+              </a:spcAft>
+              <a:buNone/>
+              <a:defRPr lang="ar-SA" sz="1000" dirty="0">
+                <a:solidFill>
+                  <a:srgbClr val="1F2A37"/>
+                </a:solidFill>
+                <a:latin typeface="IBM Plex Sans Arabic Medium"/>
+                <a:cs typeface="IBM Plex Sans Arabic Medium"/>
               </a:defRPr>
             </a:lvl1pPr>
+            <a:lvl2pPr marL="180000" indent="0" algn="r" rtl="1">
+              <a:lnSpc>
+                <a:spcPct val="100000"/>
+              </a:lnSpc>
+              <a:spcBef>
+                <a:spcPts val="0"/>
+              </a:spcBef>
+              <a:spcAft>
+                <a:spcPts val="0"/>
+              </a:spcAft>
+              <a:buNone/>
+              <a:defRPr lang="ar-SA" sz="900" dirty="0">
+                <a:solidFill>
+                  <a:srgbClr val="5F6B7A"/>
+                </a:solidFill>
+                <a:latin typeface="IBM Plex Sans Arabic Medium"/>
+                <a:cs typeface="IBM Plex Sans Arabic Medium"/>
+              </a:defRPr>
+            </a:lvl2pPr>
+            <a:lvl3pPr marL="360000" indent="0" algn="r" rtl="1">
+              <a:lnSpc>
+                <a:spcPct val="100000"/>
+              </a:lnSpc>
+              <a:spcBef>
+                <a:spcPts val="0"/>
+              </a:spcBef>
+              <a:spcAft>
+                <a:spcPts val="0"/>
+              </a:spcAft>
+              <a:buNone/>
+              <a:defRPr lang="ar-SA" sz="900" dirty="0">
+                <a:solidFill>
+                  <a:srgbClr val="5F6B7A"/>
+                </a:solidFill>
+                <a:latin typeface="IBM Plex Sans Arabic Medium"/>
+                <a:cs typeface="IBM Plex Sans Arabic Medium"/>
+              </a:defRPr>
+            </a:lvl3pPr>
+            <a:lvl4pPr marL="540000" indent="0" algn="r" rtl="1">
+              <a:lnSpc>
+                <a:spcPct val="100000"/>
+              </a:lnSpc>
+              <a:spcBef>
+                <a:spcPts val="0"/>
+              </a:spcBef>
+              <a:spcAft>
+                <a:spcPts val="0"/>
+              </a:spcAft>
+              <a:buNone/>
+              <a:defRPr lang="ar-SA" sz="900" dirty="0">
+                <a:solidFill>
+                  <a:srgbClr val="5F6B7A"/>
+                </a:solidFill>
+                <a:latin typeface="IBM Plex Sans Arabic Medium"/>
+                <a:cs typeface="IBM Plex Sans Arabic Medium"/>
+              </a:defRPr>
+            </a:lvl4pPr>
+            <a:lvl5pPr marL="720000" indent="0" algn="r" rtl="1">
+              <a:lnSpc>
+                <a:spcPct val="100000"/>
+              </a:lnSpc>
+              <a:spcBef>
+                <a:spcPts val="0"/>
+              </a:spcBef>
+              <a:spcAft>
+                <a:spcPts val="0"/>
+              </a:spcAft>
+              <a:buNone/>
+              <a:defRPr lang="ar-SA" sz="900" dirty="0">
+                <a:solidFill>
+                  <a:srgbClr val="5F6B7A"/>
+                </a:solidFill>
+                <a:latin typeface="IBM Plex Sans Arabic Medium"/>
+                <a:cs typeface="IBM Plex Sans Arabic Medium"/>
+              </a:defRPr>
+            </a:lvl5pPr>
           </a:lstStyle>
           <a:p>
             <a:r>
               <a:rPr lang="ar-SA" dirty="0"/>
-              <a:t>إعداد: الاسم        التوقيع: ______________        التاريخ: __ / __ / ____</a:t>
-            </a:r>
-          </a:p>
-        </p:txBody>
-      </p:sp>
-      <p:sp>
-        <p:nvSpPr>
-          <p:cNvPr id="60" name="نص التذييل الثابت"/>
+              <a:t>الاسم</a:t>
+            </a:r>
+          </a:p>
+        </p:txBody>
+      </p:sp>
+      <p:sp>
+        <p:nvSpPr>
+          <p:cNvPr id="63" name="تسمية التوقيع:"/>
           <p:cNvSpPr txBox="1"/>
           <p:nvPr/>
         </p:nvSpPr>
         <p:spPr>
           <a:xfrm>
-            <a:off x="432000" y="10170000"/>
-            <a:ext cx="1980000" cy="252000"/>
+            <a:off x="4572000" y="10206000"/>
+            <a:ext cx="540000" cy="252000"/>
           </a:xfrm>
           <a:prstGeom prst="rect">
             <a:avLst/>
@@ -2695,18 +3895,274 @@
           <a:bodyPr wrap="square" lIns="0" tIns="0" rIns="0" bIns="0" rtlCol="0" anchor="ctr"/>
           <a:lstStyle/>
           <a:p>
-            <a:pPr marL="0" indent="0" algn="l" rtl="1">
+            <a:pPr marL="0" indent="0" algn="r" rtl="1">
+              <a:lnSpc>
+                <a:spcPct val="100000"/>
+              </a:lnSpc>
+              <a:spcBef>
+                <a:spcPts val="0"/>
+              </a:spcBef>
+              <a:spcAft>
+                <a:spcPts val="0"/>
+              </a:spcAft>
               <a:buNone/>
             </a:pPr>
             <a:r>
-              <a:rPr lang="ar-SA" sz="800" dirty="0">
-                <a:solidFill>
-                  <a:srgbClr val="6C727E"/>
+              <a:rPr lang="ar-SA" sz="950" b="1" dirty="0">
+                <a:solidFill>
+                  <a:srgbClr val="5F6B7A"/>
                 </a:solidFill>
                 <a:latin typeface="IBM Plex Sans Arabic"/>
                 <a:cs typeface="IBM Plex Sans Arabic"/>
               </a:rPr>
-              <a:t>تقرير داخلي أسبوعي — يُقدَّم إلى المدير المباشر</a:t>
+              <a:t>التوقيع:</a:t>
+            </a:r>
+          </a:p>
+        </p:txBody>
+      </p:sp>
+      <p:cxnSp>
+        <p:nvCxnSpPr>
+          <p:cNvPr id="64" name="خط التوقيع"/>
+          <p:cNvCxnSpPr/>
+          <p:nvPr/>
+        </p:nvCxnSpPr>
+        <p:spPr>
+          <a:xfrm>
+            <a:off x="3348000" y="10414800"/>
+            <a:ext cx="1188000" cy="0"/>
+          </a:xfrm>
+          <a:prstGeom prst="line">
+            <a:avLst/>
+          </a:prstGeom>
+          <a:ln w="9525" cap="rnd">
+            <a:solidFill>
+              <a:srgbClr val="BFC6D1"/>
+            </a:solidFill>
+            <a:round/>
+          </a:ln>
+        </p:spPr>
+      </p:cxnSp>
+      <p:sp>
+        <p:nvSpPr>
+          <p:cNvPr id="65" name="تسمية التاريخ:"/>
+          <p:cNvSpPr txBox="1"/>
+          <p:nvPr/>
+        </p:nvSpPr>
+        <p:spPr>
+          <a:xfrm>
+            <a:off x="2736000" y="10206000"/>
+            <a:ext cx="504000" cy="252000"/>
+          </a:xfrm>
+          <a:prstGeom prst="rect">
+            <a:avLst/>
+          </a:prstGeom>
+          <a:noFill/>
+          <a:ln>
+            <a:noFill/>
+          </a:ln>
+        </p:spPr>
+        <p:txBody>
+          <a:bodyPr wrap="square" lIns="0" tIns="0" rIns="0" bIns="0" rtlCol="0" anchor="ctr"/>
+          <a:lstStyle/>
+          <a:p>
+            <a:pPr marL="0" indent="0" algn="r" rtl="1">
+              <a:lnSpc>
+                <a:spcPct val="100000"/>
+              </a:lnSpc>
+              <a:spcBef>
+                <a:spcPts val="0"/>
+              </a:spcBef>
+              <a:spcAft>
+                <a:spcPts val="0"/>
+              </a:spcAft>
+              <a:buNone/>
+            </a:pPr>
+            <a:r>
+              <a:rPr lang="ar-SA" sz="950" b="1" dirty="0">
+                <a:solidFill>
+                  <a:srgbClr val="5F6B7A"/>
+                </a:solidFill>
+                <a:latin typeface="IBM Plex Sans Arabic"/>
+                <a:cs typeface="IBM Plex Sans Arabic"/>
+              </a:rPr>
+              <a:t>التاريخ:</a:t>
+            </a:r>
+          </a:p>
+        </p:txBody>
+      </p:sp>
+      <p:sp>
+        <p:nvSpPr>
+          <p:cNvPr id="66" name="تاريخ التوقيع"/>
+          <p:cNvSpPr>
+            <a:spLocks noGrp="1"/>
+          </p:cNvSpPr>
+          <p:nvPr>
+            <p:ph type="body" sz="quarter" idx="114" hasCustomPrompt="1"/>
+          </p:nvPr>
+        </p:nvSpPr>
+        <p:spPr>
+          <a:xfrm>
+            <a:off x="1656000" y="10206000"/>
+            <a:ext cx="1080000" cy="252000"/>
+          </a:xfrm>
+          <a:prstGeom prst="rect">
+            <a:avLst/>
+          </a:prstGeom>
+          <a:noFill/>
+        </p:spPr>
+        <p:txBody>
+          <a:bodyPr wrap="square" lIns="0" tIns="0" rIns="0" bIns="0" rtlCol="0" anchor="ctr">
+            <a:normAutofit/>
+          </a:bodyPr>
+          <a:lstStyle>
+            <a:lvl1pPr marL="0" indent="0" algn="r" rtl="1">
+              <a:lnSpc>
+                <a:spcPct val="100000"/>
+              </a:lnSpc>
+              <a:spcBef>
+                <a:spcPts val="0"/>
+              </a:spcBef>
+              <a:spcAft>
+                <a:spcPts val="0"/>
+              </a:spcAft>
+              <a:buNone/>
+              <a:defRPr lang="ar-SA" sz="1000" dirty="0">
+                <a:solidFill>
+                  <a:srgbClr val="1F2A37"/>
+                </a:solidFill>
+                <a:latin typeface="IBM Plex Sans Arabic Medium"/>
+                <a:cs typeface="IBM Plex Sans Arabic Medium"/>
+              </a:defRPr>
+            </a:lvl1pPr>
+            <a:lvl2pPr marL="180000" indent="0" algn="r" rtl="1">
+              <a:lnSpc>
+                <a:spcPct val="100000"/>
+              </a:lnSpc>
+              <a:spcBef>
+                <a:spcPts val="0"/>
+              </a:spcBef>
+              <a:spcAft>
+                <a:spcPts val="0"/>
+              </a:spcAft>
+              <a:buNone/>
+              <a:defRPr lang="ar-SA" sz="900" dirty="0">
+                <a:solidFill>
+                  <a:srgbClr val="5F6B7A"/>
+                </a:solidFill>
+                <a:latin typeface="IBM Plex Sans Arabic Medium"/>
+                <a:cs typeface="IBM Plex Sans Arabic Medium"/>
+              </a:defRPr>
+            </a:lvl2pPr>
+            <a:lvl3pPr marL="360000" indent="0" algn="r" rtl="1">
+              <a:lnSpc>
+                <a:spcPct val="100000"/>
+              </a:lnSpc>
+              <a:spcBef>
+                <a:spcPts val="0"/>
+              </a:spcBef>
+              <a:spcAft>
+                <a:spcPts val="0"/>
+              </a:spcAft>
+              <a:buNone/>
+              <a:defRPr lang="ar-SA" sz="900" dirty="0">
+                <a:solidFill>
+                  <a:srgbClr val="5F6B7A"/>
+                </a:solidFill>
+                <a:latin typeface="IBM Plex Sans Arabic Medium"/>
+                <a:cs typeface="IBM Plex Sans Arabic Medium"/>
+              </a:defRPr>
+            </a:lvl3pPr>
+            <a:lvl4pPr marL="540000" indent="0" algn="r" rtl="1">
+              <a:lnSpc>
+                <a:spcPct val="100000"/>
+              </a:lnSpc>
+              <a:spcBef>
+                <a:spcPts val="0"/>
+              </a:spcBef>
+              <a:spcAft>
+                <a:spcPts val="0"/>
+              </a:spcAft>
+              <a:buNone/>
+              <a:defRPr lang="ar-SA" sz="900" dirty="0">
+                <a:solidFill>
+                  <a:srgbClr val="5F6B7A"/>
+                </a:solidFill>
+                <a:latin typeface="IBM Plex Sans Arabic Medium"/>
+                <a:cs typeface="IBM Plex Sans Arabic Medium"/>
+              </a:defRPr>
+            </a:lvl4pPr>
+            <a:lvl5pPr marL="720000" indent="0" algn="r" rtl="1">
+              <a:lnSpc>
+                <a:spcPct val="100000"/>
+              </a:lnSpc>
+              <a:spcBef>
+                <a:spcPts val="0"/>
+              </a:spcBef>
+              <a:spcAft>
+                <a:spcPts val="0"/>
+              </a:spcAft>
+              <a:buNone/>
+              <a:defRPr lang="ar-SA" sz="900" dirty="0">
+                <a:solidFill>
+                  <a:srgbClr val="5F6B7A"/>
+                </a:solidFill>
+                <a:latin typeface="IBM Plex Sans Arabic Medium"/>
+                <a:cs typeface="IBM Plex Sans Arabic Medium"/>
+              </a:defRPr>
+            </a:lvl5pPr>
+          </a:lstStyle>
+          <a:p>
+            <a:r>
+              <a:rPr lang="ar-SA" dirty="0"/>
+              <a:t>اليوم الشهر السنة</a:t>
+            </a:r>
+          </a:p>
+        </p:txBody>
+      </p:sp>
+      <p:sp>
+        <p:nvSpPr>
+          <p:cNvPr id="67" name="نص التذييل الثابت"/>
+          <p:cNvSpPr txBox="1"/>
+          <p:nvPr/>
+        </p:nvSpPr>
+        <p:spPr>
+          <a:xfrm>
+            <a:off x="432000" y="10206000"/>
+            <a:ext cx="1440000" cy="252000"/>
+          </a:xfrm>
+          <a:prstGeom prst="rect">
+            <a:avLst/>
+          </a:prstGeom>
+          <a:noFill/>
+          <a:ln>
+            <a:noFill/>
+          </a:ln>
+        </p:spPr>
+        <p:txBody>
+          <a:bodyPr wrap="square" lIns="0" tIns="0" rIns="0" bIns="0" rtlCol="0" anchor="ctr"/>
+          <a:lstStyle/>
+          <a:p>
+            <a:pPr marL="0" indent="0" algn="l" rtl="1">
+              <a:lnSpc>
+                <a:spcPct val="100000"/>
+              </a:lnSpc>
+              <a:spcBef>
+                <a:spcPts val="0"/>
+              </a:spcBef>
+              <a:spcAft>
+                <a:spcPts val="0"/>
+              </a:spcAft>
+              <a:buNone/>
+            </a:pPr>
+            <a:r>
+              <a:rPr lang="ar-SA" sz="850" dirty="0">
+                <a:solidFill>
+                  <a:srgbClr val="6C727E"/>
+                </a:solidFill>
+                <a:latin typeface="IBM Plex Sans Arabic"/>
+                <a:cs typeface="IBM Plex Sans Arabic"/>
+              </a:rPr>
+              <a:t>تقرير أسبوعي — للاستخدام الداخلي</a:t>
             </a:r>
           </a:p>
         </p:txBody>
@@ -2974,12 +4430,12 @@
   </p:sldLayoutIdLst>
   <p:txStyles>
     <p:titleStyle>
-      <a:lvl1pPr algn="ctr" defTabSz="457200" rtl="0" eaLnBrk="1" latinLnBrk="0" hangingPunct="1">
+      <a:lvl1pPr algn="r" defTabSz="457200" rtl="1" eaLnBrk="1" latinLnBrk="0" hangingPunct="1">
         <a:spcBef>
           <a:spcPct val="0"/>
         </a:spcBef>
         <a:buNone/>
-        <a:defRPr sz="4400" kern="1200">
+        <a:defRPr sz="2200" kern="1200" lang="ar-SA">
           <a:solidFill>
             <a:schemeClr val="tx1"/>
           </a:solidFill>
@@ -2990,13 +4446,13 @@
       </a:lvl1pPr>
     </p:titleStyle>
     <p:bodyStyle>
-      <a:lvl1pPr marL="342900" indent="-342900" algn="l" defTabSz="457200" rtl="0" eaLnBrk="1" latinLnBrk="0" hangingPunct="1">
+      <a:lvl1pPr marL="342900" indent="-342900" algn="r" defTabSz="457200" rtl="1" eaLnBrk="1" latinLnBrk="0" hangingPunct="1">
         <a:spcBef>
           <a:spcPct val="20000"/>
         </a:spcBef>
         <a:buFont typeface="Arial"/>
         <a:buChar char="•"/>
-        <a:defRPr sz="3200" kern="1200">
+        <a:defRPr sz="1100" kern="1200" lang="ar-SA">
           <a:solidFill>
             <a:schemeClr val="tx1"/>
           </a:solidFill>
@@ -3005,13 +4461,13 @@
           <a:cs typeface="+mn-cs"/>
         </a:defRPr>
       </a:lvl1pPr>
-      <a:lvl2pPr marL="742950" indent="-285750" algn="l" defTabSz="457200" rtl="0" eaLnBrk="1" latinLnBrk="0" hangingPunct="1">
+      <a:lvl2pPr marL="742950" indent="-285750" algn="r" defTabSz="457200" rtl="1" eaLnBrk="1" latinLnBrk="0" hangingPunct="1">
         <a:spcBef>
           <a:spcPct val="20000"/>
         </a:spcBef>
         <a:buFont typeface="Arial"/>
         <a:buChar char="–"/>
-        <a:defRPr sz="2800" kern="1200">
+        <a:defRPr sz="1100" kern="1200" lang="ar-SA">
           <a:solidFill>
             <a:schemeClr val="tx1"/>
           </a:solidFill>
@@ -3020,13 +4476,13 @@
           <a:cs typeface="+mn-cs"/>
         </a:defRPr>
       </a:lvl2pPr>
-      <a:lvl3pPr marL="1143000" indent="-228600" algn="l" defTabSz="457200" rtl="0" eaLnBrk="1" latinLnBrk="0" hangingPunct="1">
+      <a:lvl3pPr marL="1143000" indent="-228600" algn="r" defTabSz="457200" rtl="1" eaLnBrk="1" latinLnBrk="0" hangingPunct="1">
         <a:spcBef>
           <a:spcPct val="20000"/>
         </a:spcBef>
         <a:buFont typeface="Arial"/>
         <a:buChar char="•"/>
-        <a:defRPr sz="2400" kern="1200">
+        <a:defRPr sz="1100" kern="1200" lang="ar-SA">
           <a:solidFill>
             <a:schemeClr val="tx1"/>
           </a:solidFill>
@@ -3035,13 +4491,13 @@
           <a:cs typeface="+mn-cs"/>
         </a:defRPr>
       </a:lvl3pPr>
-      <a:lvl4pPr marL="1600200" indent="-228600" algn="l" defTabSz="457200" rtl="0" eaLnBrk="1" latinLnBrk="0" hangingPunct="1">
+      <a:lvl4pPr marL="1600200" indent="-228600" algn="r" defTabSz="457200" rtl="1" eaLnBrk="1" latinLnBrk="0" hangingPunct="1">
         <a:spcBef>
           <a:spcPct val="20000"/>
         </a:spcBef>
         <a:buFont typeface="Arial"/>
         <a:buChar char="–"/>
-        <a:defRPr sz="2000" kern="1200">
+        <a:defRPr sz="1100" kern="1200" lang="ar-SA">
           <a:solidFill>
             <a:schemeClr val="tx1"/>
           </a:solidFill>
@@ -3050,13 +4506,13 @@
           <a:cs typeface="+mn-cs"/>
         </a:defRPr>
       </a:lvl4pPr>
-      <a:lvl5pPr marL="2057400" indent="-228600" algn="l" defTabSz="457200" rtl="0" eaLnBrk="1" latinLnBrk="0" hangingPunct="1">
+      <a:lvl5pPr marL="2057400" indent="-228600" algn="r" defTabSz="457200" rtl="1" eaLnBrk="1" latinLnBrk="0" hangingPunct="1">
         <a:spcBef>
           <a:spcPct val="20000"/>
         </a:spcBef>
         <a:buFont typeface="Arial"/>
         <a:buChar char="»"/>
-        <a:defRPr sz="2000" kern="1200">
+        <a:defRPr sz="1100" kern="1200" lang="ar-SA">
           <a:solidFill>
             <a:schemeClr val="tx1"/>
           </a:solidFill>
@@ -3065,13 +4521,13 @@
           <a:cs typeface="+mn-cs"/>
         </a:defRPr>
       </a:lvl5pPr>
-      <a:lvl6pPr marL="2514600" indent="-228600" algn="l" defTabSz="457200" rtl="0" eaLnBrk="1" latinLnBrk="0" hangingPunct="1">
+      <a:lvl6pPr marL="2514600" indent="-228600" algn="r" defTabSz="457200" rtl="1" eaLnBrk="1" latinLnBrk="0" hangingPunct="1">
         <a:spcBef>
           <a:spcPct val="20000"/>
         </a:spcBef>
         <a:buFont typeface="Arial"/>
         <a:buChar char="•"/>
-        <a:defRPr sz="2000" kern="1200">
+        <a:defRPr sz="1100" kern="1200" lang="ar-SA">
           <a:solidFill>
             <a:schemeClr val="tx1"/>
           </a:solidFill>
@@ -3080,13 +4536,13 @@
           <a:cs typeface="+mn-cs"/>
         </a:defRPr>
       </a:lvl6pPr>
-      <a:lvl7pPr marL="2971800" indent="-228600" algn="l" defTabSz="457200" rtl="0" eaLnBrk="1" latinLnBrk="0" hangingPunct="1">
+      <a:lvl7pPr marL="2971800" indent="-228600" algn="r" defTabSz="457200" rtl="1" eaLnBrk="1" latinLnBrk="0" hangingPunct="1">
         <a:spcBef>
           <a:spcPct val="20000"/>
         </a:spcBef>
         <a:buFont typeface="Arial"/>
         <a:buChar char="•"/>
-        <a:defRPr sz="2000" kern="1200">
+        <a:defRPr sz="1100" kern="1200" lang="ar-SA">
           <a:solidFill>
             <a:schemeClr val="tx1"/>
           </a:solidFill>
@@ -3095,13 +4551,13 @@
           <a:cs typeface="+mn-cs"/>
         </a:defRPr>
       </a:lvl7pPr>
-      <a:lvl8pPr marL="3429000" indent="-228600" algn="l" defTabSz="457200" rtl="0" eaLnBrk="1" latinLnBrk="0" hangingPunct="1">
+      <a:lvl8pPr marL="3429000" indent="-228600" algn="r" defTabSz="457200" rtl="1" eaLnBrk="1" latinLnBrk="0" hangingPunct="1">
         <a:spcBef>
           <a:spcPct val="20000"/>
         </a:spcBef>
         <a:buFont typeface="Arial"/>
         <a:buChar char="•"/>
-        <a:defRPr sz="2000" kern="1200">
+        <a:defRPr sz="1100" kern="1200" lang="ar-SA">
           <a:solidFill>
             <a:schemeClr val="tx1"/>
           </a:solidFill>
@@ -3110,13 +4566,13 @@
           <a:cs typeface="+mn-cs"/>
         </a:defRPr>
       </a:lvl8pPr>
-      <a:lvl9pPr marL="3886200" indent="-228600" algn="l" defTabSz="457200" rtl="0" eaLnBrk="1" latinLnBrk="0" hangingPunct="1">
+      <a:lvl9pPr marL="3886200" indent="-228600" algn="r" defTabSz="457200" rtl="1" eaLnBrk="1" latinLnBrk="0" hangingPunct="1">
         <a:spcBef>
           <a:spcPct val="20000"/>
         </a:spcBef>
         <a:buFont typeface="Arial"/>
         <a:buChar char="•"/>
-        <a:defRPr sz="2000" kern="1200">
+        <a:defRPr sz="1100" kern="1200" lang="ar-SA">
           <a:solidFill>
             <a:schemeClr val="tx1"/>
           </a:solidFill>
@@ -3130,8 +4586,8 @@
       <a:defPPr>
         <a:defRPr lang="en-US"/>
       </a:defPPr>
-      <a:lvl1pPr marL="0" algn="l" defTabSz="457200" rtl="0" eaLnBrk="1" latinLnBrk="0" hangingPunct="1">
-        <a:defRPr sz="1800" kern="1200">
+      <a:lvl1pPr marL="0" algn="r" defTabSz="457200" rtl="1" eaLnBrk="1" latinLnBrk="0" hangingPunct="1">
+        <a:defRPr sz="1100" kern="1200" lang="ar-SA">
           <a:solidFill>
             <a:schemeClr val="tx1"/>
           </a:solidFill>
@@ -3140,8 +4596,8 @@
           <a:cs typeface="+mn-cs"/>
         </a:defRPr>
       </a:lvl1pPr>
-      <a:lvl2pPr marL="457200" algn="l" defTabSz="457200" rtl="0" eaLnBrk="1" latinLnBrk="0" hangingPunct="1">
-        <a:defRPr sz="1800" kern="1200">
+      <a:lvl2pPr marL="457200" algn="r" defTabSz="457200" rtl="1" eaLnBrk="1" latinLnBrk="0" hangingPunct="1">
+        <a:defRPr sz="1100" kern="1200" lang="ar-SA">
           <a:solidFill>
             <a:schemeClr val="tx1"/>
           </a:solidFill>
@@ -3150,8 +4606,8 @@
           <a:cs typeface="+mn-cs"/>
         </a:defRPr>
       </a:lvl2pPr>
-      <a:lvl3pPr marL="914400" algn="l" defTabSz="457200" rtl="0" eaLnBrk="1" latinLnBrk="0" hangingPunct="1">
-        <a:defRPr sz="1800" kern="1200">
+      <a:lvl3pPr marL="914400" algn="r" defTabSz="457200" rtl="1" eaLnBrk="1" latinLnBrk="0" hangingPunct="1">
+        <a:defRPr sz="1100" kern="1200" lang="ar-SA">
           <a:solidFill>
             <a:schemeClr val="tx1"/>
           </a:solidFill>
@@ -3160,8 +4616,8 @@
           <a:cs typeface="+mn-cs"/>
         </a:defRPr>
       </a:lvl3pPr>
-      <a:lvl4pPr marL="1371600" algn="l" defTabSz="457200" rtl="0" eaLnBrk="1" latinLnBrk="0" hangingPunct="1">
-        <a:defRPr sz="1800" kern="1200">
+      <a:lvl4pPr marL="1371600" algn="r" defTabSz="457200" rtl="1" eaLnBrk="1" latinLnBrk="0" hangingPunct="1">
+        <a:defRPr sz="1100" kern="1200" lang="ar-SA">
           <a:solidFill>
             <a:schemeClr val="tx1"/>
           </a:solidFill>
@@ -3170,8 +4626,8 @@
           <a:cs typeface="+mn-cs"/>
         </a:defRPr>
       </a:lvl4pPr>
-      <a:lvl5pPr marL="1828800" algn="l" defTabSz="457200" rtl="0" eaLnBrk="1" latinLnBrk="0" hangingPunct="1">
-        <a:defRPr sz="1800" kern="1200">
+      <a:lvl5pPr marL="1828800" algn="r" defTabSz="457200" rtl="1" eaLnBrk="1" latinLnBrk="0" hangingPunct="1">
+        <a:defRPr sz="1100" kern="1200" lang="ar-SA">
           <a:solidFill>
             <a:schemeClr val="tx1"/>
           </a:solidFill>
@@ -3180,8 +4636,8 @@
           <a:cs typeface="+mn-cs"/>
         </a:defRPr>
       </a:lvl5pPr>
-      <a:lvl6pPr marL="2286000" algn="l" defTabSz="457200" rtl="0" eaLnBrk="1" latinLnBrk="0" hangingPunct="1">
-        <a:defRPr sz="1800" kern="1200">
+      <a:lvl6pPr marL="2286000" algn="r" defTabSz="457200" rtl="1" eaLnBrk="1" latinLnBrk="0" hangingPunct="1">
+        <a:defRPr sz="1100" kern="1200" lang="ar-SA">
           <a:solidFill>
             <a:schemeClr val="tx1"/>
           </a:solidFill>
@@ -3190,8 +4646,8 @@
           <a:cs typeface="+mn-cs"/>
         </a:defRPr>
       </a:lvl6pPr>
-      <a:lvl7pPr marL="2743200" algn="l" defTabSz="457200" rtl="0" eaLnBrk="1" latinLnBrk="0" hangingPunct="1">
-        <a:defRPr sz="1800" kern="1200">
+      <a:lvl7pPr marL="2743200" algn="r" defTabSz="457200" rtl="1" eaLnBrk="1" latinLnBrk="0" hangingPunct="1">
+        <a:defRPr sz="1100" kern="1200" lang="ar-SA">
           <a:solidFill>
             <a:schemeClr val="tx1"/>
           </a:solidFill>
@@ -3200,8 +4656,8 @@
           <a:cs typeface="+mn-cs"/>
         </a:defRPr>
       </a:lvl7pPr>
-      <a:lvl8pPr marL="3200400" algn="l" defTabSz="457200" rtl="0" eaLnBrk="1" latinLnBrk="0" hangingPunct="1">
-        <a:defRPr sz="1800" kern="1200">
+      <a:lvl8pPr marL="3200400" algn="r" defTabSz="457200" rtl="1" eaLnBrk="1" latinLnBrk="0" hangingPunct="1">
+        <a:defRPr sz="1100" kern="1200" lang="ar-SA">
           <a:solidFill>
             <a:schemeClr val="tx1"/>
           </a:solidFill>
@@ -3210,8 +4666,8 @@
           <a:cs typeface="+mn-cs"/>
         </a:defRPr>
       </a:lvl8pPr>
-      <a:lvl9pPr marL="3657600" algn="l" defTabSz="457200" rtl="0" eaLnBrk="1" latinLnBrk="0" hangingPunct="1">
-        <a:defRPr sz="1800" kern="1200">
+      <a:lvl9pPr marL="3657600" algn="r" defTabSz="457200" rtl="1" eaLnBrk="1" latinLnBrk="0" hangingPunct="1">
+        <a:defRPr sz="1100" kern="1200" lang="ar-SA">
           <a:solidFill>
             <a:schemeClr val="tx1"/>
           </a:solidFill>
@@ -3242,7 +4698,7 @@
             <a:picLocks noGrp="1" noChangeAspect="1"/>
           </p:cNvPicPr>
           <p:nvPr>
-            <p:ph type="pic" idx="40" sz="quarter"/>
+            <p:ph type="pic" idx="120" sz="quarter"/>
           </p:nvPr>
         </p:nvPicPr>
         <p:blipFill>
@@ -3261,16 +4717,17 @@
             <a:spLocks noGrp="1"/>
           </p:cNvSpPr>
           <p:nvPr>
-            <p:ph type="body" idx="11" sz="quarter"/>
+            <p:ph type="body" idx="101" sz="quarter"/>
           </p:nvPr>
         </p:nvSpPr>
         <p:spPr/>
         <p:txBody>
-          <a:bodyPr wrap="square" lIns="0" tIns="0" rIns="0" bIns="0" rtlCol="0" anchor="t">
+          <a:bodyPr wrap="square" lIns="0" tIns="0" rIns="0" bIns="0" rtlCol="0" anchor="ctr">
             <a:normAutofit/>
           </a:bodyPr>
           <a:lstStyle/>
           <a:p>
+            <a:pPr algn="r" rtl="1"/>
             <a:r>
               <a:rPr lang="ar-SA" dirty="0"/>
               <a:t>الإدارة العامة للتحول الرقمي — إدارة البيانات والتحليلات</a:t>
@@ -3285,7 +4742,7 @@
             <a:spLocks noGrp="1"/>
           </p:cNvSpPr>
           <p:nvPr>
-            <p:ph type="body" idx="12" sz="quarter"/>
+            <p:ph type="body" idx="102" sz="quarter"/>
           </p:nvPr>
         </p:nvSpPr>
         <p:spPr/>
@@ -3295,6 +4752,7 @@
           </a:bodyPr>
           <a:lstStyle/>
           <a:p>
+            <a:pPr algn="r" rtl="1"/>
             <a:r>
               <a:rPr lang="ar-SA" dirty="0"/>
               <a:t>من 25 إلى 29 أكتوبر 2026 (الأسبوع 44)</a:t>
@@ -3309,7 +4767,7 @@
             <a:spLocks noGrp="1"/>
           </p:cNvSpPr>
           <p:nvPr>
-            <p:ph type="body" idx="13" sz="quarter"/>
+            <p:ph type="body" idx="103" sz="quarter"/>
           </p:nvPr>
         </p:nvSpPr>
         <p:spPr/>
@@ -3319,6 +4777,7 @@
           </a:bodyPr>
           <a:lstStyle/>
           <a:p>
+            <a:pPr algn="r" rtl="1"/>
             <a:r>
               <a:rPr lang="ar-SA" dirty="0"/>
               <a:t>أحمد العتيبي — محلل بيانات أول</a:t>
@@ -3328,12 +4787,12 @@
       </p:sp>
       <p:sp>
         <p:nvSpPr>
-          <p:cNvPr id="6" name="مُقدَّم إلى"/>
+          <p:cNvPr id="6" name="مقدَّم إلى"/>
           <p:cNvSpPr>
             <a:spLocks noGrp="1"/>
           </p:cNvSpPr>
           <p:nvPr>
-            <p:ph type="body" idx="14" sz="quarter"/>
+            <p:ph type="body" idx="104" sz="quarter"/>
           </p:nvPr>
         </p:nvSpPr>
         <p:spPr/>
@@ -3343,6 +4802,7 @@
           </a:bodyPr>
           <a:lstStyle/>
           <a:p>
+            <a:pPr algn="r" rtl="1"/>
             <a:r>
               <a:rPr lang="ar-SA" dirty="0"/>
               <a:t>م. خالد القحطاني — مدير إدارة البيانات</a:t>
@@ -3357,7 +4817,7 @@
             <a:spLocks noGrp="1"/>
           </p:cNvSpPr>
           <p:nvPr>
-            <p:ph type="body" idx="20" sz="quarter"/>
+            <p:ph type="body" idx="105" sz="quarter"/>
           </p:nvPr>
         </p:nvSpPr>
         <p:spPr/>
@@ -3367,9 +4827,10 @@
           </a:bodyPr>
           <a:lstStyle/>
           <a:p>
+            <a:pPr algn="r" rtl="1"/>
             <a:r>
               <a:rPr lang="ar-SA" dirty="0"/>
-              <a:t>أُنجزت 4 مهام رئيسية هذا الأسبوع أبرزها إطلاق لوحة مؤشرات الأداء للإدارة، وتسير 3 مهام ضمن جدولها الزمني، ومهمة واحدة تحتاج قرارًا بشأن صلاحيات الوصول إلى بيانات المستفيدين قبل 12 نوفمبر.</a:t>
+              <a:t>أُطلقت لوحة مؤشرات الأداء واعتمدتها 3 إدارات، وأُنجزت 4 مهام. مهمتان ضمن الجدول، ومهمة (تكامل الموارد البشرية) متأخرة أسبوعًا. مطلوب قرار واحد قبل 2 نوفمبر (أدناه).</a:t>
             </a:r>
           </a:p>
         </p:txBody>
@@ -3381,15 +4842,17 @@
             <a:spLocks noGrp="1"/>
           </p:cNvSpPr>
           <p:nvPr>
-            <p:ph type="body" idx="21" sz="quarter"/>
+            <p:ph type="body" idx="106" sz="quarter"/>
           </p:nvPr>
         </p:nvSpPr>
         <p:spPr/>
         <p:txBody>
-          <a:bodyPr wrap="square" lIns="0" tIns="0" rIns="0" bIns="0" rtlCol="0" anchor="ctr"/>
+          <a:bodyPr wrap="square" lIns="0" tIns="0" rIns="0" bIns="0" rtlCol="0" anchor="ctr">
+            <a:normAutofit/>
+          </a:bodyPr>
           <a:lstStyle/>
           <a:p>
-            <a:pPr rtl="1" algn="ctr"/>
+            <a:pPr algn="ctr" rtl="1"/>
             <a:r>
               <a:rPr lang="ar-SA" dirty="0"/>
               <a:t>4</a:t>
@@ -3404,15 +4867,17 @@
             <a:spLocks noGrp="1"/>
           </p:cNvSpPr>
           <p:nvPr>
-            <p:ph type="body" idx="22" sz="quarter"/>
+            <p:ph type="body" idx="107" sz="quarter"/>
           </p:nvPr>
         </p:nvSpPr>
         <p:spPr/>
         <p:txBody>
-          <a:bodyPr wrap="square" lIns="0" tIns="0" rIns="0" bIns="0" rtlCol="0" anchor="ctr"/>
+          <a:bodyPr wrap="square" lIns="0" tIns="0" rIns="0" bIns="0" rtlCol="0" anchor="ctr">
+            <a:normAutofit/>
+          </a:bodyPr>
           <a:lstStyle/>
           <a:p>
-            <a:pPr rtl="1" algn="ctr"/>
+            <a:pPr algn="ctr" rtl="1"/>
             <a:r>
               <a:rPr lang="ar-SA" dirty="0"/>
               <a:t>3</a:t>
@@ -3422,23 +4887,25 @@
       </p:sp>
       <p:sp>
         <p:nvSpPr>
-          <p:cNvPr id="10" name="عدد المهام القادمة"/>
+          <p:cNvPr id="10" name="عدد المهام المقبلة"/>
           <p:cNvSpPr>
             <a:spLocks noGrp="1"/>
           </p:cNvSpPr>
           <p:nvPr>
-            <p:ph type="body" idx="23" sz="quarter"/>
+            <p:ph type="body" idx="108" sz="quarter"/>
           </p:nvPr>
         </p:nvSpPr>
         <p:spPr/>
         <p:txBody>
-          <a:bodyPr wrap="square" lIns="0" tIns="0" rIns="0" bIns="0" rtlCol="0" anchor="ctr"/>
+          <a:bodyPr wrap="square" lIns="0" tIns="0" rIns="0" bIns="0" rtlCol="0" anchor="ctr">
+            <a:normAutofit/>
+          </a:bodyPr>
           <a:lstStyle/>
           <a:p>
-            <a:pPr rtl="1" algn="ctr"/>
+            <a:pPr algn="ctr" rtl="1"/>
             <a:r>
               <a:rPr lang="ar-SA" dirty="0"/>
-              <a:t>5</a:t>
+              <a:t>4</a:t>
             </a:r>
           </a:p>
         </p:txBody>
@@ -3450,7 +4917,7 @@
             <a:spLocks noGrp="1"/>
           </p:cNvSpPr>
           <p:nvPr>
-            <p:ph type="body" idx="24" sz="quarter"/>
+            <p:ph type="body" idx="109" sz="quarter"/>
           </p:nvPr>
         </p:nvSpPr>
         <p:spPr/>
@@ -3460,6 +4927,14 @@
           </a:bodyPr>
           <a:lstStyle/>
           <a:p>
+            <a:pPr marL="162000" indent="-162000" algn="r" rtl="1">
+              <a:buClr>
+                <a:srgbClr val="127A5B"/>
+              </a:buClr>
+              <a:buSzPct val="110000"/>
+              <a:buFont typeface="Arial" pitchFamily="34" charset="0"/>
+              <a:buChar char="•"/>
+            </a:pPr>
             <a:r>
               <a:rPr lang="ar-SA" b="1" dirty="0">
                 <a:latin typeface="IBM Plex Sans Arabic"/>
@@ -3473,6 +4948,14 @@
             </a:r>
           </a:p>
           <a:p>
+            <a:pPr marL="162000" indent="-162000" algn="r" rtl="1">
+              <a:buClr>
+                <a:srgbClr val="127A5B"/>
+              </a:buClr>
+              <a:buSzPct val="110000"/>
+              <a:buFont typeface="Arial" pitchFamily="34" charset="0"/>
+              <a:buChar char="•"/>
+            </a:pPr>
             <a:r>
               <a:rPr lang="ar-SA" b="1" dirty="0">
                 <a:latin typeface="IBM Plex Sans Arabic"/>
@@ -3486,6 +4969,14 @@
             </a:r>
           </a:p>
           <a:p>
+            <a:pPr marL="162000" indent="-162000" algn="r" rtl="1">
+              <a:buClr>
+                <a:srgbClr val="127A5B"/>
+              </a:buClr>
+              <a:buSzPct val="110000"/>
+              <a:buFont typeface="Arial" pitchFamily="34" charset="0"/>
+              <a:buChar char="•"/>
+            </a:pPr>
             <a:r>
               <a:rPr lang="ar-SA" b="1" dirty="0">
                 <a:latin typeface="IBM Plex Sans Arabic"/>
@@ -3495,10 +4986,18 @@
             </a:r>
             <a:r>
               <a:rPr lang="ar-SA" dirty="0"/>
-              <a:t> — 24 مشاركًا، متوسط التقييم 4.6 من 5.</a:t>
-            </a:r>
-          </a:p>
-          <a:p>
+              <a:t> — 24 مشاركًا، تقييم 4.6 من 5، واعتُمدت 3 بنود من السياسة.</a:t>
+            </a:r>
+          </a:p>
+          <a:p>
+            <a:pPr marL="162000" indent="-162000" algn="r" rtl="1">
+              <a:buClr>
+                <a:srgbClr val="127A5B"/>
+              </a:buClr>
+              <a:buSzPct val="110000"/>
+              <a:buFont typeface="Arial" pitchFamily="34" charset="0"/>
+              <a:buChar char="•"/>
+            </a:pPr>
             <a:r>
               <a:rPr lang="ar-SA" b="1" dirty="0">
                 <a:latin typeface="IBM Plex Sans Arabic"/>
@@ -3515,12 +5014,12 @@
       </p:sp>
       <p:sp>
         <p:nvSpPr>
-          <p:cNvPr id="12" name="خطة الأسبوع القادم"/>
+          <p:cNvPr id="12" name="خطة الأسبوع المقبل"/>
           <p:cNvSpPr>
             <a:spLocks noGrp="1"/>
           </p:cNvSpPr>
           <p:nvPr>
-            <p:ph type="body" idx="25" sz="quarter"/>
+            <p:ph type="body" idx="110" sz="quarter"/>
           </p:nvPr>
         </p:nvSpPr>
         <p:spPr/>
@@ -3530,33 +5029,59 @@
           </a:bodyPr>
           <a:lstStyle/>
           <a:p>
+            <a:pPr marL="162000" indent="-162000" algn="r" rtl="1">
+              <a:buClr>
+                <a:srgbClr val="6459A7"/>
+              </a:buClr>
+              <a:buSzPct val="110000"/>
+              <a:buFont typeface="Arial" pitchFamily="34" charset="0"/>
+              <a:buChar char="•"/>
+            </a:pPr>
             <a:r>
               <a:rPr lang="ar-SA" dirty="0"/>
-              <a:t>إكمال اختبار أتمتة التقارير مع الفريق التقني (الثلاثاء).</a:t>
-            </a:r>
-          </a:p>
-          <a:p>
+              <a:t>اكتمال اختبار أتمتة التقارير مع الفريق التقني — الثلاثاء.</a:t>
+            </a:r>
+          </a:p>
+          <a:p>
+            <a:pPr marL="162000" indent="-162000" algn="r" rtl="1">
+              <a:buClr>
+                <a:srgbClr val="6459A7"/>
+              </a:buClr>
+              <a:buSzPct val="110000"/>
+              <a:buFont typeface="Arial" pitchFamily="34" charset="0"/>
+              <a:buChar char="•"/>
+            </a:pPr>
             <a:r>
               <a:rPr lang="ar-SA" dirty="0"/>
-              <a:t>اجتماع مع إدارة الموارد البشرية لاعتماد حقول التكامل.</a:t>
-            </a:r>
-          </a:p>
-          <a:p>
+              <a:t>اعتماد حقول التكامل مع إدارة الموارد البشرية بمحضر — الأربعاء.</a:t>
+            </a:r>
+          </a:p>
+          <a:p>
+            <a:pPr marL="162000" indent="-162000" algn="r" rtl="1">
+              <a:buClr>
+                <a:srgbClr val="6459A7"/>
+              </a:buClr>
+              <a:buSzPct val="110000"/>
+              <a:buFont typeface="Arial" pitchFamily="34" charset="0"/>
+              <a:buChar char="•"/>
+            </a:pPr>
             <a:r>
               <a:rPr lang="ar-SA" dirty="0"/>
-              <a:t>تسليم المسودة الأولى لدليل التصنيف للمراجعة.</a:t>
-            </a:r>
-          </a:p>
-          <a:p>
+              <a:t>تسليم المسودة الأولى لدليل التصنيف للمراجعة — الخميس.</a:t>
+            </a:r>
+          </a:p>
+          <a:p>
+            <a:pPr marL="162000" indent="-162000" algn="r" rtl="1">
+              <a:buClr>
+                <a:srgbClr val="6459A7"/>
+              </a:buClr>
+              <a:buSzPct val="110000"/>
+              <a:buFont typeface="Arial" pitchFamily="34" charset="0"/>
+              <a:buChar char="•"/>
+            </a:pPr>
             <a:r>
               <a:rPr lang="ar-SA" dirty="0"/>
-              <a:t>إغلاق طلبات الوصول المعلّقة (6 طلبات).</a:t>
-            </a:r>
-          </a:p>
-          <a:p>
-            <a:r>
-              <a:rPr lang="ar-SA" dirty="0"/>
-              <a:t>إعداد عرض نتائج الربع للإدارة العليا.</a:t>
+              <a:t>إغلاق طلبات الوصول المعلّقة (6 طلبات) — الأربعاء.</a:t>
             </a:r>
           </a:p>
         </p:txBody>
@@ -3568,7 +5093,7 @@
             <a:spLocks noGrp="1"/>
           </p:cNvSpPr>
           <p:nvPr>
-            <p:ph type="body" idx="26" sz="quarter"/>
+            <p:ph type="body" idx="111" sz="quarter"/>
           </p:nvPr>
         </p:nvSpPr>
         <p:spPr/>
@@ -3578,9 +5103,45 @@
           </a:bodyPr>
           <a:lstStyle/>
           <a:p>
+            <a:pPr algn="r" rtl="1"/>
+            <a:r>
+              <a:rPr lang="ar-SA" b="1" dirty="0">
+                <a:latin typeface="IBM Plex Sans Arabic"/>
+                <a:cs typeface="IBM Plex Sans Arabic"/>
+              </a:rPr>
+              <a:t>المطلوب:</a:t>
+            </a:r>
             <a:r>
               <a:rPr lang="ar-SA" dirty="0"/>
-              <a:t>اعتماد منح صلاحية «قراءة» لبيانات المستفيدين لفريق التحليلات (3 موظفين) لإكمال التكامل قبل 12 نوفمبر.</a:t>
+              <a:t> اعتماد صلاحية «قراءة» لبيانات المستفيدين لفريق التحليلات (3 موظفين)، طلب رقم ACC-214.</a:t>
+            </a:r>
+          </a:p>
+          <a:p>
+            <a:pPr algn="r" rtl="1"/>
+            <a:r>
+              <a:rPr lang="ar-SA" b="1" dirty="0">
+                <a:latin typeface="IBM Plex Sans Arabic"/>
+                <a:cs typeface="IBM Plex Sans Arabic"/>
+              </a:rPr>
+              <a:t>قبل:</a:t>
+            </a:r>
+            <a:r>
+              <a:rPr lang="ar-SA" dirty="0"/>
+              <a:t> الأحد 2 نوفمبر، ليبقى موعد 12 نوفمبر قابلًا للتحقيق.</a:t>
+            </a:r>
+          </a:p>
+          <a:p>
+            <a:pPr algn="r" rtl="1"/>
+            <a:r>
+              <a:rPr lang="ar-SA" b="1" dirty="0">
+                <a:latin typeface="IBM Plex Sans Arabic"/>
+                <a:cs typeface="IBM Plex Sans Arabic"/>
+              </a:rPr>
+              <a:t>أثر التأخير:</a:t>
+            </a:r>
+            <a:r>
+              <a:rPr lang="ar-SA" dirty="0"/>
+              <a:t> يتأخر التكامل أسبوعًا عن كل أسبوع تأخير.</a:t>
             </a:r>
           </a:p>
         </p:txBody>
@@ -3592,7 +5153,7 @@
             <a:spLocks noGrp="1"/>
           </p:cNvSpPr>
           <p:nvPr>
-            <p:ph type="body" idx="27" sz="quarter"/>
+            <p:ph type="body" idx="112" sz="quarter"/>
           </p:nvPr>
         </p:nvSpPr>
         <p:spPr/>
@@ -3602,21 +5163,22 @@
           </a:bodyPr>
           <a:lstStyle/>
           <a:p>
+            <a:pPr algn="r" rtl="1"/>
             <a:r>
               <a:rPr lang="ar-SA" dirty="0"/>
-              <a:t>تأخر استلام بيانات الموارد البشرية بسبب تغيّر مسؤول النظام لديهم؛ تمت المتابعة وحُدّد موعد جديد للتسليم.</a:t>
-            </a:r>
-          </a:p>
-        </p:txBody>
-      </p:sp>
-      <p:sp>
-        <p:nvSpPr>
-          <p:cNvPr id="15" name="التوقيع"/>
+              <a:t>تأخر استلام بيانات الموارد البشرية (تغيّر مسؤول النظام لديهم) — الأثر: تأخر مهمة التكامل أسبوعًا؛ الموعد الجديد للتسليم 9 نوفمبر؛ لا يحتاج تدخّلًا.</a:t>
+            </a:r>
+          </a:p>
+        </p:txBody>
+      </p:sp>
+      <p:sp>
+        <p:nvSpPr>
+          <p:cNvPr id="15" name="اسم المُعِد"/>
           <p:cNvSpPr>
             <a:spLocks noGrp="1"/>
           </p:cNvSpPr>
           <p:nvPr>
-            <p:ph type="body" idx="28" sz="quarter"/>
+            <p:ph type="body" idx="113" sz="quarter"/>
           </p:nvPr>
         </p:nvSpPr>
         <p:spPr/>
@@ -3626,9 +5188,35 @@
           </a:bodyPr>
           <a:lstStyle/>
           <a:p>
+            <a:pPr algn="r" rtl="1"/>
             <a:r>
               <a:rPr lang="ar-SA" dirty="0"/>
-              <a:t>إعداد: أحمد العتيبي        التوقيع: ______________        التاريخ: 29 / 10 / 2026</a:t>
+              <a:t>أحمد العتيبي</a:t>
+            </a:r>
+          </a:p>
+        </p:txBody>
+      </p:sp>
+      <p:sp>
+        <p:nvSpPr>
+          <p:cNvPr id="16" name="تاريخ التوقيع"/>
+          <p:cNvSpPr>
+            <a:spLocks noGrp="1"/>
+          </p:cNvSpPr>
+          <p:nvPr>
+            <p:ph type="body" idx="114" sz="quarter"/>
+          </p:nvPr>
+        </p:nvSpPr>
+        <p:spPr/>
+        <p:txBody>
+          <a:bodyPr wrap="square" lIns="0" tIns="0" rIns="0" bIns="0" rtlCol="0" anchor="ctr">
+            <a:normAutofit/>
+          </a:bodyPr>
+          <a:lstStyle/>
+          <a:p>
+            <a:pPr algn="r" rtl="1"/>
+            <a:r>
+              <a:rPr lang="ar-SA" dirty="0"/>
+              <a:t>29 أكتوبر 2026</a:t>
             </a:r>
           </a:p>
         </p:txBody>
@@ -3642,18 +5230,20 @@
           <p:nvPr/>
         </p:nvGraphicFramePr>
         <p:xfrm>
-          <a:off x="432000" y="5472000"/>
-          <a:ext cx="6696000" cy="1494000"/>
+          <a:off x="432000" y="5346000"/>
+          <a:ext cx="6696000" cy="1242000"/>
         </p:xfrm>
         <a:graphic>
           <a:graphicData uri="http://schemas.openxmlformats.org/drawingml/2006/table">
             <a:tbl>
-              <a:tblPr firstRow="1"/>
+              <a:tblPr firstRow="1" rtl="1">
+                <a:tableStyleId>{2D5ABB26-0587-4C30-8999-92F81FD0307C}</a:tableStyleId>
+              </a:tblPr>
               <a:tblGrid>
-                <a:gridCol w="1080000"/>
-                <a:gridCol w="1296000"/>
-                <a:gridCol w="936000"/>
-                <a:gridCol w="3384000"/>
+                <a:gridCol w="3240000"/>
+                <a:gridCol w="864000"/>
+                <a:gridCol w="1224000"/>
+                <a:gridCol w="1368000"/>
               </a:tblGrid>
               <a:tr h="270000">
                 <a:tc>
@@ -3661,25 +5251,31 @@
                     <a:bodyPr/>
                     <a:lstStyle/>
                     <a:p>
-                      <a:pPr marL="0" indent="0" algn="ctr" rtl="1">
+                      <a:pPr marL="0" indent="0" algn="r" rtl="1">
                         <a:lnSpc>
-                          <a:spcPct val="120000"/>
+                          <a:spcPct val="100000"/>
                         </a:lnSpc>
+                        <a:spcBef>
+                          <a:spcPts val="0"/>
+                        </a:spcBef>
+                        <a:spcAft>
+                          <a:spcPts val="0"/>
+                        </a:spcAft>
                         <a:buNone/>
                       </a:pPr>
                       <a:r>
-                        <a:rPr lang="ar-SA" sz="950" b="1" dirty="0">
+                        <a:rPr lang="ar-SA" sz="1000" b="1" dirty="0">
                           <a:solidFill>
                             <a:srgbClr val="273470"/>
                           </a:solidFill>
                           <a:latin typeface="IBM Plex Sans Arabic"/>
                           <a:cs typeface="IBM Plex Sans Arabic"/>
                         </a:rPr>
-                        <a:t>الحالة</a:t>
+                        <a:t>المهمة</a:t>
                       </a:r>
                     </a:p>
                   </a:txBody>
-                  <a:tcPr marL="79200" marR="79200" marT="43200" marB="43200" anchor="ctr">
+                  <a:tcPr marL="79200" marR="79200" marT="36000" marB="36000" anchor="ctr">
                     <a:lnL>
                       <a:noFill/>
                     </a:lnL>
@@ -3689,9 +5285,9 @@
                     <a:lnT>
                       <a:noFill/>
                     </a:lnT>
-                    <a:lnB w="6350" cap="flat" cmpd="sng" algn="ctr">
+                    <a:lnB w="12700" cap="flat" cmpd="sng" algn="ctr">
                       <a:solidFill>
-                        <a:srgbClr val="33CC99"/>
+                        <a:srgbClr val="0C7373"/>
                       </a:solidFill>
                       <a:prstDash val="solid"/>
                     </a:lnB>
@@ -3707,23 +5303,29 @@
                     <a:p>
                       <a:pPr marL="0" indent="0" algn="ctr" rtl="1">
                         <a:lnSpc>
-                          <a:spcPct val="120000"/>
+                          <a:spcPct val="100000"/>
                         </a:lnSpc>
+                        <a:spcBef>
+                          <a:spcPts val="0"/>
+                        </a:spcBef>
+                        <a:spcAft>
+                          <a:spcPts val="0"/>
+                        </a:spcAft>
                         <a:buNone/>
                       </a:pPr>
                       <a:r>
-                        <a:rPr lang="ar-SA" sz="950" b="1" dirty="0">
+                        <a:rPr lang="ar-SA" sz="1000" b="1" dirty="0">
                           <a:solidFill>
                             <a:srgbClr val="273470"/>
                           </a:solidFill>
                           <a:latin typeface="IBM Plex Sans Arabic"/>
                           <a:cs typeface="IBM Plex Sans Arabic"/>
                         </a:rPr>
-                        <a:t>الموعد المستهدف</a:t>
+                        <a:t>نسبة الإنجاز (٪)</a:t>
                       </a:r>
                     </a:p>
                   </a:txBody>
-                  <a:tcPr marL="79200" marR="79200" marT="43200" marB="43200" anchor="ctr">
+                  <a:tcPr marL="79200" marR="79200" marT="36000" marB="36000" anchor="ctr">
                     <a:lnL>
                       <a:noFill/>
                     </a:lnL>
@@ -3733,9 +5335,9 @@
                     <a:lnT>
                       <a:noFill/>
                     </a:lnT>
-                    <a:lnB w="6350" cap="flat" cmpd="sng" algn="ctr">
+                    <a:lnB w="12700" cap="flat" cmpd="sng" algn="ctr">
                       <a:solidFill>
-                        <a:srgbClr val="33CC99"/>
+                        <a:srgbClr val="0C7373"/>
                       </a:solidFill>
                       <a:prstDash val="solid"/>
                     </a:lnB>
@@ -3751,23 +5353,29 @@
                     <a:p>
                       <a:pPr marL="0" indent="0" algn="ctr" rtl="1">
                         <a:lnSpc>
-                          <a:spcPct val="120000"/>
+                          <a:spcPct val="100000"/>
                         </a:lnSpc>
+                        <a:spcBef>
+                          <a:spcPts val="0"/>
+                        </a:spcBef>
+                        <a:spcAft>
+                          <a:spcPts val="0"/>
+                        </a:spcAft>
                         <a:buNone/>
                       </a:pPr>
                       <a:r>
-                        <a:rPr lang="ar-SA" sz="950" b="1" dirty="0">
+                        <a:rPr lang="ar-SA" sz="1000" b="1" dirty="0">
                           <a:solidFill>
                             <a:srgbClr val="273470"/>
                           </a:solidFill>
                           <a:latin typeface="IBM Plex Sans Arabic"/>
                           <a:cs typeface="IBM Plex Sans Arabic"/>
                         </a:rPr>
-                        <a:t>نسبة الإنجاز</a:t>
+                        <a:t>الموعد المستهدف</a:t>
                       </a:r>
                     </a:p>
                   </a:txBody>
-                  <a:tcPr marL="79200" marR="79200" marT="43200" marB="43200" anchor="ctr">
+                  <a:tcPr marL="79200" marR="79200" marT="36000" marB="36000" anchor="ctr">
                     <a:lnL>
                       <a:noFill/>
                     </a:lnL>
@@ -3777,9 +5385,9 @@
                     <a:lnT>
                       <a:noFill/>
                     </a:lnT>
-                    <a:lnB w="6350" cap="flat" cmpd="sng" algn="ctr">
+                    <a:lnB w="12700" cap="flat" cmpd="sng" algn="ctr">
                       <a:solidFill>
-                        <a:srgbClr val="33CC99"/>
+                        <a:srgbClr val="0C7373"/>
                       </a:solidFill>
                       <a:prstDash val="solid"/>
                     </a:lnB>
@@ -3793,25 +5401,31 @@
                     <a:bodyPr/>
                     <a:lstStyle/>
                     <a:p>
-                      <a:pPr marL="0" indent="0" algn="r" rtl="1">
+                      <a:pPr marL="0" indent="0" algn="ctr" rtl="1">
                         <a:lnSpc>
-                          <a:spcPct val="120000"/>
+                          <a:spcPct val="100000"/>
                         </a:lnSpc>
+                        <a:spcBef>
+                          <a:spcPts val="0"/>
+                        </a:spcBef>
+                        <a:spcAft>
+                          <a:spcPts val="0"/>
+                        </a:spcAft>
                         <a:buNone/>
                       </a:pPr>
                       <a:r>
-                        <a:rPr lang="ar-SA" sz="950" b="1" dirty="0">
+                        <a:rPr lang="ar-SA" sz="1000" b="1" dirty="0">
                           <a:solidFill>
                             <a:srgbClr val="273470"/>
                           </a:solidFill>
                           <a:latin typeface="IBM Plex Sans Arabic"/>
                           <a:cs typeface="IBM Plex Sans Arabic"/>
                         </a:rPr>
-                        <a:t>المهمة</a:t>
+                        <a:t>الحالة</a:t>
                       </a:r>
                     </a:p>
                   </a:txBody>
-                  <a:tcPr marL="79200" marR="79200" marT="43200" marB="43200" anchor="ctr">
+                  <a:tcPr marL="79200" marR="79200" marT="36000" marB="36000" anchor="ctr">
                     <a:lnL>
                       <a:noFill/>
                     </a:lnL>
@@ -3821,9 +5435,9 @@
                     <a:lnT>
                       <a:noFill/>
                     </a:lnT>
-                    <a:lnB w="6350" cap="flat" cmpd="sng" algn="ctr">
+                    <a:lnB w="12700" cap="flat" cmpd="sng" algn="ctr">
                       <a:solidFill>
-                        <a:srgbClr val="33CC99"/>
+                        <a:srgbClr val="0C7373"/>
                       </a:solidFill>
                       <a:prstDash val="solid"/>
                     </a:lnB>
@@ -3833,31 +5447,37 @@
                   </a:tcPr>
                 </a:tc>
               </a:tr>
-              <a:tr h="306000">
+              <a:tr h="324000">
                 <a:tc>
                   <a:txBody>
                     <a:bodyPr/>
                     <a:lstStyle/>
                     <a:p>
-                      <a:pPr marL="0" indent="0" algn="ctr" rtl="1">
+                      <a:pPr marL="0" indent="0" algn="r" rtl="1">
                         <a:lnSpc>
-                          <a:spcPct val="120000"/>
+                          <a:spcPct val="100000"/>
                         </a:lnSpc>
+                        <a:spcBef>
+                          <a:spcPts val="0"/>
+                        </a:spcBef>
+                        <a:spcAft>
+                          <a:spcPts val="0"/>
+                        </a:spcAft>
                         <a:buNone/>
                       </a:pPr>
                       <a:r>
-                        <a:rPr lang="ar-SA" sz="1100" dirty="0">
+                        <a:rPr lang="ar-SA" sz="1050" dirty="0">
                           <a:solidFill>
-                            <a:srgbClr val="5F6B7A"/>
+                            <a:srgbClr val="1F2A37"/>
                           </a:solidFill>
                           <a:latin typeface="IBM Plex Sans Arabic Medium"/>
                           <a:cs typeface="IBM Plex Sans Arabic Medium"/>
                         </a:rPr>
-                        <a:t>على المسار</a:t>
+                        <a:t>أتمتة تقارير الالتزام الأسبوعية</a:t>
                       </a:r>
                     </a:p>
                   </a:txBody>
-                  <a:tcPr marL="79200" marR="79200" marT="43200" marB="43200" anchor="ctr">
+                  <a:tcPr marL="79200" marR="79200" marT="36000" marB="36000" anchor="ctr">
                     <a:lnL>
                       <a:noFill/>
                     </a:lnL>
@@ -3867,9 +5487,9 @@
                     <a:lnT>
                       <a:noFill/>
                     </a:lnT>
-                    <a:lnB w="6350" cap="flat" cmpd="sng" algn="ctr">
+                    <a:lnB w="9525" cap="flat" cmpd="sng" algn="ctr">
                       <a:solidFill>
-                        <a:srgbClr val="DDE1E8"/>
+                        <a:srgbClr val="BFC6D1"/>
                       </a:solidFill>
                       <a:prstDash val="solid"/>
                     </a:lnB>
@@ -3883,23 +5503,29 @@
                     <a:p>
                       <a:pPr marL="0" indent="0" algn="ctr" rtl="1">
                         <a:lnSpc>
-                          <a:spcPct val="120000"/>
+                          <a:spcPct val="100000"/>
                         </a:lnSpc>
+                        <a:spcBef>
+                          <a:spcPts val="0"/>
+                        </a:spcBef>
+                        <a:spcAft>
+                          <a:spcPts val="0"/>
+                        </a:spcAft>
                         <a:buNone/>
                       </a:pPr>
                       <a:r>
-                        <a:rPr lang="ar-SA" sz="1100" dirty="0">
+                        <a:rPr lang="ar-SA" sz="1050" dirty="0">
                           <a:solidFill>
                             <a:srgbClr val="5F6B7A"/>
                           </a:solidFill>
                           <a:latin typeface="IBM Plex Sans Arabic Medium"/>
                           <a:cs typeface="IBM Plex Sans Arabic Medium"/>
                         </a:rPr>
-                        <a:t>5 نوفمبر</a:t>
+                        <a:t>70</a:t>
                       </a:r>
                     </a:p>
                   </a:txBody>
-                  <a:tcPr marL="79200" marR="79200" marT="43200" marB="43200" anchor="ctr">
+                  <a:tcPr marL="79200" marR="79200" marT="36000" marB="36000" anchor="ctr">
                     <a:lnL>
                       <a:noFill/>
                     </a:lnL>
@@ -3909,9 +5535,9 @@
                     <a:lnT>
                       <a:noFill/>
                     </a:lnT>
-                    <a:lnB w="6350" cap="flat" cmpd="sng" algn="ctr">
+                    <a:lnB w="9525" cap="flat" cmpd="sng" algn="ctr">
                       <a:solidFill>
-                        <a:srgbClr val="DDE1E8"/>
+                        <a:srgbClr val="BFC6D1"/>
                       </a:solidFill>
                       <a:prstDash val="solid"/>
                     </a:lnB>
@@ -3925,23 +5551,29 @@
                     <a:p>
                       <a:pPr marL="0" indent="0" algn="ctr" rtl="1">
                         <a:lnSpc>
-                          <a:spcPct val="120000"/>
+                          <a:spcPct val="100000"/>
                         </a:lnSpc>
+                        <a:spcBef>
+                          <a:spcPts val="0"/>
+                        </a:spcBef>
+                        <a:spcAft>
+                          <a:spcPts val="0"/>
+                        </a:spcAft>
                         <a:buNone/>
                       </a:pPr>
                       <a:r>
-                        <a:rPr lang="ar-SA" sz="1100" dirty="0">
+                        <a:rPr lang="ar-SA" sz="1050" dirty="0">
                           <a:solidFill>
                             <a:srgbClr val="5F6B7A"/>
                           </a:solidFill>
                           <a:latin typeface="IBM Plex Sans Arabic Medium"/>
                           <a:cs typeface="IBM Plex Sans Arabic Medium"/>
                         </a:rPr>
-                        <a:t>70٪</a:t>
+                        <a:t>5 نوفمبر 2026</a:t>
                       </a:r>
                     </a:p>
                   </a:txBody>
-                  <a:tcPr marL="79200" marR="79200" marT="43200" marB="43200" anchor="ctr">
+                  <a:tcPr marL="79200" marR="79200" marT="36000" marB="36000" anchor="ctr">
                     <a:lnL>
                       <a:noFill/>
                     </a:lnL>
@@ -3951,95 +5583,9 @@
                     <a:lnT>
                       <a:noFill/>
                     </a:lnT>
-                    <a:lnB w="6350" cap="flat" cmpd="sng" algn="ctr">
+                    <a:lnB w="9525" cap="flat" cmpd="sng" algn="ctr">
                       <a:solidFill>
-                        <a:srgbClr val="DDE1E8"/>
-                      </a:solidFill>
-                      <a:prstDash val="solid"/>
-                    </a:lnB>
-                    <a:noFill/>
-                  </a:tcPr>
-                </a:tc>
-                <a:tc>
-                  <a:txBody>
-                    <a:bodyPr/>
-                    <a:lstStyle/>
-                    <a:p>
-                      <a:pPr marL="0" indent="0" algn="r" rtl="1">
-                        <a:lnSpc>
-                          <a:spcPct val="120000"/>
-                        </a:lnSpc>
-                        <a:buNone/>
-                      </a:pPr>
-                      <a:r>
-                        <a:rPr lang="ar-SA" sz="1100" dirty="0">
-                          <a:solidFill>
-                            <a:srgbClr val="1F2A37"/>
-                          </a:solidFill>
-                          <a:latin typeface="IBM Plex Sans Arabic Medium"/>
-                          <a:cs typeface="IBM Plex Sans Arabic Medium"/>
-                        </a:rPr>
-                        <a:t>أتمتة تقارير الالتزام الأسبوعية</a:t>
-                      </a:r>
-                    </a:p>
-                  </a:txBody>
-                  <a:tcPr marL="79200" marR="79200" marT="43200" marB="43200" anchor="ctr">
-                    <a:lnL>
-                      <a:noFill/>
-                    </a:lnL>
-                    <a:lnR>
-                      <a:noFill/>
-                    </a:lnR>
-                    <a:lnT>
-                      <a:noFill/>
-                    </a:lnT>
-                    <a:lnB w="6350" cap="flat" cmpd="sng" algn="ctr">
-                      <a:solidFill>
-                        <a:srgbClr val="DDE1E8"/>
-                      </a:solidFill>
-                      <a:prstDash val="solid"/>
-                    </a:lnB>
-                    <a:noFill/>
-                  </a:tcPr>
-                </a:tc>
-              </a:tr>
-              <a:tr h="306000">
-                <a:tc>
-                  <a:txBody>
-                    <a:bodyPr/>
-                    <a:lstStyle/>
-                    <a:p>
-                      <a:pPr marL="0" indent="0" algn="ctr" rtl="1">
-                        <a:lnSpc>
-                          <a:spcPct val="120000"/>
-                        </a:lnSpc>
-                        <a:buNone/>
-                      </a:pPr>
-                      <a:r>
-                        <a:rPr lang="ar-SA" sz="1100" dirty="0">
-                          <a:solidFill>
-                            <a:srgbClr val="5F6B7A"/>
-                          </a:solidFill>
-                          <a:latin typeface="IBM Plex Sans Arabic Medium"/>
-                          <a:cs typeface="IBM Plex Sans Arabic Medium"/>
-                        </a:rPr>
-                        <a:t>تأخر بسيط</a:t>
-                      </a:r>
-                    </a:p>
-                  </a:txBody>
-                  <a:tcPr marL="79200" marR="79200" marT="43200" marB="43200" anchor="ctr">
-                    <a:lnL>
-                      <a:noFill/>
-                    </a:lnL>
-                    <a:lnR>
-                      <a:noFill/>
-                    </a:lnR>
-                    <a:lnT>
-                      <a:noFill/>
-                    </a:lnT>
-                    <a:lnB w="6350" cap="flat" cmpd="sng" algn="ctr">
-                      <a:solidFill>
-                        <a:srgbClr val="DDE1E8"/>
+                        <a:srgbClr val="BFC6D1"/>
                       </a:solidFill>
                       <a:prstDash val="solid"/>
                     </a:lnB>
@@ -4053,23 +5599,29 @@
                     <a:p>
                       <a:pPr marL="0" indent="0" algn="ctr" rtl="1">
                         <a:lnSpc>
-                          <a:spcPct val="120000"/>
+                          <a:spcPct val="100000"/>
                         </a:lnSpc>
+                        <a:spcBef>
+                          <a:spcPts val="0"/>
+                        </a:spcBef>
+                        <a:spcAft>
+                          <a:spcPts val="0"/>
+                        </a:spcAft>
                         <a:buNone/>
                       </a:pPr>
                       <a:r>
-                        <a:rPr lang="ar-SA" sz="1100" dirty="0">
+                        <a:rPr lang="ar-SA" sz="1050" dirty="0">
                           <a:solidFill>
                             <a:srgbClr val="5F6B7A"/>
                           </a:solidFill>
                           <a:latin typeface="IBM Plex Sans Arabic Medium"/>
                           <a:cs typeface="IBM Plex Sans Arabic Medium"/>
                         </a:rPr>
-                        <a:t>12 نوفمبر</a:t>
+                        <a:t>على المسار</a:t>
                       </a:r>
                     </a:p>
                   </a:txBody>
-                  <a:tcPr marL="79200" marR="79200" marT="43200" marB="43200" anchor="ctr">
+                  <a:tcPr marL="79200" marR="79200" marT="36000" marB="36000" anchor="ctr">
                     <a:lnL>
                       <a:noFill/>
                     </a:lnL>
@@ -4079,9 +5631,59 @@
                     <a:lnT>
                       <a:noFill/>
                     </a:lnT>
-                    <a:lnB w="6350" cap="flat" cmpd="sng" algn="ctr">
+                    <a:lnB w="9525" cap="flat" cmpd="sng" algn="ctr">
                       <a:solidFill>
-                        <a:srgbClr val="DDE1E8"/>
+                        <a:srgbClr val="BFC6D1"/>
+                      </a:solidFill>
+                      <a:prstDash val="solid"/>
+                    </a:lnB>
+                    <a:noFill/>
+                  </a:tcPr>
+                </a:tc>
+              </a:tr>
+              <a:tr h="324000">
+                <a:tc>
+                  <a:txBody>
+                    <a:bodyPr/>
+                    <a:lstStyle/>
+                    <a:p>
+                      <a:pPr marL="0" indent="0" algn="r" rtl="1">
+                        <a:lnSpc>
+                          <a:spcPct val="100000"/>
+                        </a:lnSpc>
+                        <a:spcBef>
+                          <a:spcPts val="0"/>
+                        </a:spcBef>
+                        <a:spcAft>
+                          <a:spcPts val="0"/>
+                        </a:spcAft>
+                        <a:buNone/>
+                      </a:pPr>
+                      <a:r>
+                        <a:rPr lang="ar-SA" sz="1050" dirty="0">
+                          <a:solidFill>
+                            <a:srgbClr val="1F2A37"/>
+                          </a:solidFill>
+                          <a:latin typeface="IBM Plex Sans Arabic Medium"/>
+                          <a:cs typeface="IBM Plex Sans Arabic Medium"/>
+                        </a:rPr>
+                        <a:t>تكامل بيانات الموارد البشرية مع مستودع البيانات</a:t>
+                      </a:r>
+                    </a:p>
+                  </a:txBody>
+                  <a:tcPr marL="79200" marR="79200" marT="36000" marB="36000" anchor="ctr">
+                    <a:lnL>
+                      <a:noFill/>
+                    </a:lnL>
+                    <a:lnR>
+                      <a:noFill/>
+                    </a:lnR>
+                    <a:lnT>
+                      <a:noFill/>
+                    </a:lnT>
+                    <a:lnB w="9525" cap="flat" cmpd="sng" algn="ctr">
+                      <a:solidFill>
+                        <a:srgbClr val="BFC6D1"/>
                       </a:solidFill>
                       <a:prstDash val="solid"/>
                     </a:lnB>
@@ -4095,23 +5697,29 @@
                     <a:p>
                       <a:pPr marL="0" indent="0" algn="ctr" rtl="1">
                         <a:lnSpc>
-                          <a:spcPct val="120000"/>
+                          <a:spcPct val="100000"/>
                         </a:lnSpc>
+                        <a:spcBef>
+                          <a:spcPts val="0"/>
+                        </a:spcBef>
+                        <a:spcAft>
+                          <a:spcPts val="0"/>
+                        </a:spcAft>
                         <a:buNone/>
                       </a:pPr>
                       <a:r>
-                        <a:rPr lang="ar-SA" sz="1100" dirty="0">
+                        <a:rPr lang="ar-SA" sz="1050" dirty="0">
                           <a:solidFill>
                             <a:srgbClr val="5F6B7A"/>
                           </a:solidFill>
                           <a:latin typeface="IBM Plex Sans Arabic Medium"/>
                           <a:cs typeface="IBM Plex Sans Arabic Medium"/>
                         </a:rPr>
-                        <a:t>45٪</a:t>
+                        <a:t>45</a:t>
                       </a:r>
                     </a:p>
                   </a:txBody>
-                  <a:tcPr marL="79200" marR="79200" marT="43200" marB="43200" anchor="ctr">
+                  <a:tcPr marL="79200" marR="79200" marT="36000" marB="36000" anchor="ctr">
                     <a:lnL>
                       <a:noFill/>
                     </a:lnL>
@@ -4121,95 +5729,9 @@
                     <a:lnT>
                       <a:noFill/>
                     </a:lnT>
-                    <a:lnB w="6350" cap="flat" cmpd="sng" algn="ctr">
+                    <a:lnB w="9525" cap="flat" cmpd="sng" algn="ctr">
                       <a:solidFill>
-                        <a:srgbClr val="DDE1E8"/>
-                      </a:solidFill>
-                      <a:prstDash val="solid"/>
-                    </a:lnB>
-                    <a:noFill/>
-                  </a:tcPr>
-                </a:tc>
-                <a:tc>
-                  <a:txBody>
-                    <a:bodyPr/>
-                    <a:lstStyle/>
-                    <a:p>
-                      <a:pPr marL="0" indent="0" algn="r" rtl="1">
-                        <a:lnSpc>
-                          <a:spcPct val="120000"/>
-                        </a:lnSpc>
-                        <a:buNone/>
-                      </a:pPr>
-                      <a:r>
-                        <a:rPr lang="ar-SA" sz="1100" dirty="0">
-                          <a:solidFill>
-                            <a:srgbClr val="1F2A37"/>
-                          </a:solidFill>
-                          <a:latin typeface="IBM Plex Sans Arabic Medium"/>
-                          <a:cs typeface="IBM Plex Sans Arabic Medium"/>
-                        </a:rPr>
-                        <a:t>تكامل بيانات الموارد البشرية مع مستودع البيانات</a:t>
-                      </a:r>
-                    </a:p>
-                  </a:txBody>
-                  <a:tcPr marL="79200" marR="79200" marT="43200" marB="43200" anchor="ctr">
-                    <a:lnL>
-                      <a:noFill/>
-                    </a:lnL>
-                    <a:lnR>
-                      <a:noFill/>
-                    </a:lnR>
-                    <a:lnT>
-                      <a:noFill/>
-                    </a:lnT>
-                    <a:lnB w="6350" cap="flat" cmpd="sng" algn="ctr">
-                      <a:solidFill>
-                        <a:srgbClr val="DDE1E8"/>
-                      </a:solidFill>
-                      <a:prstDash val="solid"/>
-                    </a:lnB>
-                    <a:noFill/>
-                  </a:tcPr>
-                </a:tc>
-              </a:tr>
-              <a:tr h="306000">
-                <a:tc>
-                  <a:txBody>
-                    <a:bodyPr/>
-                    <a:lstStyle/>
-                    <a:p>
-                      <a:pPr marL="0" indent="0" algn="ctr" rtl="1">
-                        <a:lnSpc>
-                          <a:spcPct val="120000"/>
-                        </a:lnSpc>
-                        <a:buNone/>
-                      </a:pPr>
-                      <a:r>
-                        <a:rPr lang="ar-SA" sz="1100" dirty="0">
-                          <a:solidFill>
-                            <a:srgbClr val="5F6B7A"/>
-                          </a:solidFill>
-                          <a:latin typeface="IBM Plex Sans Arabic Medium"/>
-                          <a:cs typeface="IBM Plex Sans Arabic Medium"/>
-                        </a:rPr>
-                        <a:t>على المسار</a:t>
-                      </a:r>
-                    </a:p>
-                  </a:txBody>
-                  <a:tcPr marL="79200" marR="79200" marT="43200" marB="43200" anchor="ctr">
-                    <a:lnL>
-                      <a:noFill/>
-                    </a:lnL>
-                    <a:lnR>
-                      <a:noFill/>
-                    </a:lnR>
-                    <a:lnT>
-                      <a:noFill/>
-                    </a:lnT>
-                    <a:lnB w="6350" cap="flat" cmpd="sng" algn="ctr">
-                      <a:solidFill>
-                        <a:srgbClr val="DDE1E8"/>
+                        <a:srgbClr val="BFC6D1"/>
                       </a:solidFill>
                       <a:prstDash val="solid"/>
                     </a:lnB>
@@ -4223,23 +5745,29 @@
                     <a:p>
                       <a:pPr marL="0" indent="0" algn="ctr" rtl="1">
                         <a:lnSpc>
-                          <a:spcPct val="120000"/>
+                          <a:spcPct val="100000"/>
                         </a:lnSpc>
+                        <a:spcBef>
+                          <a:spcPts val="0"/>
+                        </a:spcBef>
+                        <a:spcAft>
+                          <a:spcPts val="0"/>
+                        </a:spcAft>
                         <a:buNone/>
                       </a:pPr>
                       <a:r>
-                        <a:rPr lang="ar-SA" sz="1100" dirty="0">
+                        <a:rPr lang="ar-SA" sz="1050" dirty="0">
                           <a:solidFill>
                             <a:srgbClr val="5F6B7A"/>
                           </a:solidFill>
                           <a:latin typeface="IBM Plex Sans Arabic Medium"/>
                           <a:cs typeface="IBM Plex Sans Arabic Medium"/>
                         </a:rPr>
-                        <a:t>20 نوفمبر</a:t>
+                        <a:t>12 نوفمبر 2026</a:t>
                       </a:r>
                     </a:p>
                   </a:txBody>
-                  <a:tcPr marL="79200" marR="79200" marT="43200" marB="43200" anchor="ctr">
+                  <a:tcPr marL="79200" marR="79200" marT="36000" marB="36000" anchor="ctr">
                     <a:lnL>
                       <a:noFill/>
                     </a:lnL>
@@ -4249,9 +5777,9 @@
                     <a:lnT>
                       <a:noFill/>
                     </a:lnT>
-                    <a:lnB w="6350" cap="flat" cmpd="sng" algn="ctr">
+                    <a:lnB w="9525" cap="flat" cmpd="sng" algn="ctr">
                       <a:solidFill>
-                        <a:srgbClr val="DDE1E8"/>
+                        <a:srgbClr val="BFC6D1"/>
                       </a:solidFill>
                       <a:prstDash val="solid"/>
                     </a:lnB>
@@ -4265,23 +5793,29 @@
                     <a:p>
                       <a:pPr marL="0" indent="0" algn="ctr" rtl="1">
                         <a:lnSpc>
-                          <a:spcPct val="120000"/>
+                          <a:spcPct val="100000"/>
                         </a:lnSpc>
+                        <a:spcBef>
+                          <a:spcPts val="0"/>
+                        </a:spcBef>
+                        <a:spcAft>
+                          <a:spcPts val="0"/>
+                        </a:spcAft>
                         <a:buNone/>
                       </a:pPr>
                       <a:r>
-                        <a:rPr lang="ar-SA" sz="1100" dirty="0">
+                        <a:rPr lang="ar-SA" sz="1050" b="1" dirty="0">
                           <a:solidFill>
-                            <a:srgbClr val="5F6B7A"/>
+                            <a:srgbClr val="B54708"/>
                           </a:solidFill>
                           <a:latin typeface="IBM Plex Sans Arabic Medium"/>
                           <a:cs typeface="IBM Plex Sans Arabic Medium"/>
                         </a:rPr>
-                        <a:t>30٪</a:t>
+                        <a:t>متأخر أسبوعًا</a:t>
                       </a:r>
                     </a:p>
                   </a:txBody>
-                  <a:tcPr marL="79200" marR="79200" marT="43200" marB="43200" anchor="ctr">
+                  <a:tcPr marL="79200" marR="79200" marT="36000" marB="36000" anchor="ctr">
                     <a:lnL>
                       <a:noFill/>
                     </a:lnL>
@@ -4291,15 +5825,17 @@
                     <a:lnT>
                       <a:noFill/>
                     </a:lnT>
-                    <a:lnB w="6350" cap="flat" cmpd="sng" algn="ctr">
+                    <a:lnB w="9525" cap="flat" cmpd="sng" algn="ctr">
                       <a:solidFill>
-                        <a:srgbClr val="DDE1E8"/>
+                        <a:srgbClr val="BFC6D1"/>
                       </a:solidFill>
                       <a:prstDash val="solid"/>
                     </a:lnB>
                     <a:noFill/>
                   </a:tcPr>
                 </a:tc>
+              </a:tr>
+              <a:tr h="324000">
                 <a:tc>
                   <a:txBody>
                     <a:bodyPr/>
@@ -4307,12 +5843,18 @@
                     <a:p>
                       <a:pPr marL="0" indent="0" algn="r" rtl="1">
                         <a:lnSpc>
-                          <a:spcPct val="120000"/>
+                          <a:spcPct val="100000"/>
                         </a:lnSpc>
+                        <a:spcBef>
+                          <a:spcPts val="0"/>
+                        </a:spcBef>
+                        <a:spcAft>
+                          <a:spcPts val="0"/>
+                        </a:spcAft>
                         <a:buNone/>
                       </a:pPr>
                       <a:r>
-                        <a:rPr lang="ar-SA" sz="1100" dirty="0">
+                        <a:rPr lang="ar-SA" sz="1050" dirty="0">
                           <a:solidFill>
                             <a:srgbClr val="1F2A37"/>
                           </a:solidFill>
@@ -4323,7 +5865,7 @@
                       </a:r>
                     </a:p>
                   </a:txBody>
-                  <a:tcPr marL="79200" marR="79200" marT="43200" marB="43200" anchor="ctr">
+                  <a:tcPr marL="79200" marR="79200" marT="36000" marB="36000" anchor="ctr">
                     <a:lnL>
                       <a:noFill/>
                     </a:lnL>
@@ -4333,50 +5875,9 @@
                     <a:lnT>
                       <a:noFill/>
                     </a:lnT>
-                    <a:lnB w="6350" cap="flat" cmpd="sng" algn="ctr">
+                    <a:lnB w="9525" cap="flat" cmpd="sng" algn="ctr">
                       <a:solidFill>
-                        <a:srgbClr val="DDE1E8"/>
-                      </a:solidFill>
-                      <a:prstDash val="solid"/>
-                    </a:lnB>
-                    <a:noFill/>
-                  </a:tcPr>
-                </a:tc>
-              </a:tr>
-              <a:tr h="306000">
-                <a:tc>
-                  <a:txBody>
-                    <a:bodyPr/>
-                    <a:lstStyle/>
-                    <a:p>
-                      <a:pPr marL="0" indent="0" algn="ctr" rtl="1">
-                        <a:lnSpc>
-                          <a:spcPct val="120000"/>
-                        </a:lnSpc>
-                        <a:buNone/>
-                      </a:pPr>
-                      <a:endParaRPr lang="ar-SA" sz="1100" dirty="0">
-                        <a:solidFill>
-                          <a:srgbClr val="5F6B7A"/>
-                        </a:solidFill>
-                        <a:latin typeface="IBM Plex Sans Arabic Medium"/>
-                        <a:cs typeface="IBM Plex Sans Arabic Medium"/>
-                      </a:endParaRPr>
-                    </a:p>
-                  </a:txBody>
-                  <a:tcPr marL="79200" marR="79200" marT="43200" marB="43200" anchor="ctr">
-                    <a:lnL>
-                      <a:noFill/>
-                    </a:lnL>
-                    <a:lnR>
-                      <a:noFill/>
-                    </a:lnR>
-                    <a:lnT>
-                      <a:noFill/>
-                    </a:lnT>
-                    <a:lnB w="6350" cap="flat" cmpd="sng" algn="ctr">
-                      <a:solidFill>
-                        <a:srgbClr val="DDE1E8"/>
+                        <a:srgbClr val="BFC6D1"/>
                       </a:solidFill>
                       <a:prstDash val="solid"/>
                     </a:lnB>
@@ -4390,20 +5891,29 @@
                     <a:p>
                       <a:pPr marL="0" indent="0" algn="ctr" rtl="1">
                         <a:lnSpc>
-                          <a:spcPct val="120000"/>
+                          <a:spcPct val="100000"/>
                         </a:lnSpc>
+                        <a:spcBef>
+                          <a:spcPts val="0"/>
+                        </a:spcBef>
+                        <a:spcAft>
+                          <a:spcPts val="0"/>
+                        </a:spcAft>
                         <a:buNone/>
                       </a:pPr>
-                      <a:endParaRPr lang="ar-SA" sz="1100" dirty="0">
-                        <a:solidFill>
-                          <a:srgbClr val="5F6B7A"/>
-                        </a:solidFill>
-                        <a:latin typeface="IBM Plex Sans Arabic Medium"/>
-                        <a:cs typeface="IBM Plex Sans Arabic Medium"/>
-                      </a:endParaRPr>
+                      <a:r>
+                        <a:rPr lang="ar-SA" sz="1050" dirty="0">
+                          <a:solidFill>
+                            <a:srgbClr val="5F6B7A"/>
+                          </a:solidFill>
+                          <a:latin typeface="IBM Plex Sans Arabic Medium"/>
+                          <a:cs typeface="IBM Plex Sans Arabic Medium"/>
+                        </a:rPr>
+                        <a:t>30</a:t>
+                      </a:r>
                     </a:p>
                   </a:txBody>
-                  <a:tcPr marL="79200" marR="79200" marT="43200" marB="43200" anchor="ctr">
+                  <a:tcPr marL="79200" marR="79200" marT="36000" marB="36000" anchor="ctr">
                     <a:lnL>
                       <a:noFill/>
                     </a:lnL>
@@ -4413,9 +5923,9 @@
                     <a:lnT>
                       <a:noFill/>
                     </a:lnT>
-                    <a:lnB w="6350" cap="flat" cmpd="sng" algn="ctr">
+                    <a:lnB w="9525" cap="flat" cmpd="sng" algn="ctr">
                       <a:solidFill>
-                        <a:srgbClr val="DDE1E8"/>
+                        <a:srgbClr val="BFC6D1"/>
                       </a:solidFill>
                       <a:prstDash val="solid"/>
                     </a:lnB>
@@ -4429,20 +5939,29 @@
                     <a:p>
                       <a:pPr marL="0" indent="0" algn="ctr" rtl="1">
                         <a:lnSpc>
-                          <a:spcPct val="120000"/>
+                          <a:spcPct val="100000"/>
                         </a:lnSpc>
+                        <a:spcBef>
+                          <a:spcPts val="0"/>
+                        </a:spcBef>
+                        <a:spcAft>
+                          <a:spcPts val="0"/>
+                        </a:spcAft>
                         <a:buNone/>
                       </a:pPr>
-                      <a:endParaRPr lang="ar-SA" sz="1100" dirty="0">
-                        <a:solidFill>
-                          <a:srgbClr val="5F6B7A"/>
-                        </a:solidFill>
-                        <a:latin typeface="IBM Plex Sans Arabic Medium"/>
-                        <a:cs typeface="IBM Plex Sans Arabic Medium"/>
-                      </a:endParaRPr>
+                      <a:r>
+                        <a:rPr lang="ar-SA" sz="1050" dirty="0">
+                          <a:solidFill>
+                            <a:srgbClr val="5F6B7A"/>
+                          </a:solidFill>
+                          <a:latin typeface="IBM Plex Sans Arabic Medium"/>
+                          <a:cs typeface="IBM Plex Sans Arabic Medium"/>
+                        </a:rPr>
+                        <a:t>20 نوفمبر 2026</a:t>
+                      </a:r>
                     </a:p>
                   </a:txBody>
-                  <a:tcPr marL="79200" marR="79200" marT="43200" marB="43200" anchor="ctr">
+                  <a:tcPr marL="79200" marR="79200" marT="36000" marB="36000" anchor="ctr">
                     <a:lnL>
                       <a:noFill/>
                     </a:lnL>
@@ -4452,9 +5971,9 @@
                     <a:lnT>
                       <a:noFill/>
                     </a:lnT>
-                    <a:lnB w="6350" cap="flat" cmpd="sng" algn="ctr">
+                    <a:lnB w="9525" cap="flat" cmpd="sng" algn="ctr">
                       <a:solidFill>
-                        <a:srgbClr val="DDE1E8"/>
+                        <a:srgbClr val="BFC6D1"/>
                       </a:solidFill>
                       <a:prstDash val="solid"/>
                     </a:lnB>
@@ -4466,22 +5985,31 @@
                     <a:bodyPr/>
                     <a:lstStyle/>
                     <a:p>
-                      <a:pPr marL="0" indent="0" algn="r" rtl="1">
+                      <a:pPr marL="0" indent="0" algn="ctr" rtl="1">
                         <a:lnSpc>
-                          <a:spcPct val="120000"/>
+                          <a:spcPct val="100000"/>
                         </a:lnSpc>
+                        <a:spcBef>
+                          <a:spcPts val="0"/>
+                        </a:spcBef>
+                        <a:spcAft>
+                          <a:spcPts val="0"/>
+                        </a:spcAft>
                         <a:buNone/>
                       </a:pPr>
-                      <a:endParaRPr lang="ar-SA" sz="1100" dirty="0">
-                        <a:solidFill>
-                          <a:srgbClr val="1F2A37"/>
-                        </a:solidFill>
-                        <a:latin typeface="IBM Plex Sans Arabic Medium"/>
-                        <a:cs typeface="IBM Plex Sans Arabic Medium"/>
-                      </a:endParaRPr>
+                      <a:r>
+                        <a:rPr lang="ar-SA" sz="1050" dirty="0">
+                          <a:solidFill>
+                            <a:srgbClr val="5F6B7A"/>
+                          </a:solidFill>
+                          <a:latin typeface="IBM Plex Sans Arabic Medium"/>
+                          <a:cs typeface="IBM Plex Sans Arabic Medium"/>
+                        </a:rPr>
+                        <a:t>على المسار</a:t>
+                      </a:r>
                     </a:p>
                   </a:txBody>
-                  <a:tcPr marL="79200" marR="79200" marT="43200" marB="43200" anchor="ctr">
+                  <a:tcPr marL="79200" marR="79200" marT="36000" marB="36000" anchor="ctr">
                     <a:lnL>
                       <a:noFill/>
                     </a:lnL>
@@ -4491,9 +6019,9 @@
                     <a:lnT>
                       <a:noFill/>
                     </a:lnT>
-                    <a:lnB w="6350" cap="flat" cmpd="sng" algn="ctr">
+                    <a:lnB w="9525" cap="flat" cmpd="sng" algn="ctr">
                       <a:solidFill>
-                        <a:srgbClr val="DDE1E8"/>
+                        <a:srgbClr val="BFC6D1"/>
                       </a:solidFill>
                       <a:prstDash val="solid"/>
                     </a:lnB>
@@ -4569,6 +6097,9 @@
           <a:lstStyle/>
           <a:p>
             <a:pPr marL="0" indent="0" algn="r" rtl="1">
+              <a:spcBef>
+                <a:spcPts val="0"/>
+              </a:spcBef>
               <a:buNone/>
             </a:pPr>
             <a:r>
@@ -4608,17 +6139,20 @@
           <a:lstStyle/>
           <a:p>
             <a:pPr marL="0" indent="0" algn="r" rtl="1">
+              <a:spcBef>
+                <a:spcPts val="0"/>
+              </a:spcBef>
               <a:buNone/>
             </a:pPr>
             <a:r>
-              <a:rPr lang="ar-SA" sz="1050" dirty="0">
+              <a:rPr lang="ar-SA" sz="1000" dirty="0">
                 <a:solidFill>
                   <a:srgbClr val="33CC99"/>
                 </a:solidFill>
                 <a:latin typeface="IBM Plex Sans Arabic"/>
                 <a:cs typeface="IBM Plex Sans Arabic"/>
               </a:rPr>
-              <a:t>هذه الشريحة مخفية: لا تظهر في العرض ولا في الطباعة ولا في ملف PDF.</a:t>
+              <a:t>هذه الشريحة مخفية: لا تظهر في العرض ولا في ملف PDF (وفي الطباعة تأكد من إلغاء «طباعة الشرائح المخفية»).</a:t>
             </a:r>
           </a:p>
         </p:txBody>
@@ -4647,6 +6181,9 @@
           <a:lstStyle/>
           <a:p>
             <a:pPr marL="0" indent="0" algn="r" rtl="1">
+              <a:spcBef>
+                <a:spcPts val="0"/>
+              </a:spcBef>
               <a:buNone/>
             </a:pPr>
             <a:r>
@@ -4677,7 +6214,7 @@
             <a:avLst/>
           </a:prstGeom>
           <a:solidFill>
-            <a:srgbClr val="0E8A8A"/>
+            <a:srgbClr val="0C7373"/>
           </a:solidFill>
           <a:ln>
             <a:noFill/>
@@ -4688,6 +6225,9 @@
           <a:lstStyle/>
           <a:p>
             <a:pPr marL="0" indent="0" algn="ctr" rtl="0">
+              <a:spcBef>
+                <a:spcPts val="0"/>
+              </a:spcBef>
               <a:buNone/>
             </a:pPr>
             <a:r>
@@ -4727,12 +6267,15 @@
           <a:lstStyle/>
           <a:p>
             <a:pPr marL="0" indent="0" algn="r" rtl="1">
+              <a:spcBef>
+                <a:spcPts val="0"/>
+              </a:spcBef>
               <a:buNone/>
             </a:pPr>
             <a:r>
               <a:rPr lang="ar-SA" sz="1200" b="1" dirty="0">
                 <a:solidFill>
-                  <a:srgbClr val="0E8A8A"/>
+                  <a:srgbClr val="0C7373"/>
                 </a:solidFill>
                 <a:latin typeface="IBM Plex Sans Arabic"/>
                 <a:cs typeface="IBM Plex Sans Arabic"/>
@@ -4751,7 +6294,7 @@
         <p:spPr>
           <a:xfrm>
             <a:off x="432000" y="2124000"/>
-            <a:ext cx="6264000" cy="446400"/>
+            <a:ext cx="6264000" cy="676800"/>
           </a:xfrm>
           <a:prstGeom prst="rect">
             <a:avLst/>
@@ -4767,8 +6310,11 @@
           <a:p>
             <a:pPr marL="0" indent="0" algn="r" rtl="1">
               <a:lnSpc>
-                <a:spcPct val="130000"/>
-              </a:lnSpc>
+                <a:spcPct val="114999"/>
+              </a:lnSpc>
+              <a:spcBef>
+                <a:spcPts val="0"/>
+              </a:spcBef>
               <a:buNone/>
             </a:pPr>
             <a:r>
@@ -4779,7 +6325,7 @@
                 <a:latin typeface="IBM Plex Sans Arabic"/>
                 <a:cs typeface="IBM Plex Sans Arabic"/>
               </a:rPr>
-              <a:t>اكتب مباشرة داخل الحقول ذات النص الإرشادي الرمادي. يختفي النص الإرشادي فور الكتابة، وإن تركت الحقل فارغًا فلن يظهر في الطباعة ولا في PDF.</a:t>
+              <a:t>اكتب داخل الحقول ذات النص الإرشادي (يظهر بلون الحقل نفسه). يختفي النص الإرشادي فور الكتابة، وإن تركت الحقل فارغًا فلن يظهر في PDF ولا في الطباعة. استخدم الأرقام 0–9 في كل مكان، واكتب التواريخ باسم الشهر (5 نوفمبر 2026).</a:t>
             </a:r>
           </a:p>
         </p:txBody>
@@ -4792,14 +6338,14 @@
         </p:nvSpPr>
         <p:spPr>
           <a:xfrm>
-            <a:off x="6840000" y="2743200"/>
+            <a:off x="6840000" y="2973600"/>
             <a:ext cx="252000" cy="252000"/>
           </a:xfrm>
           <a:prstGeom prst="ellipse">
             <a:avLst/>
           </a:prstGeom>
           <a:solidFill>
-            <a:srgbClr val="0E8A8A"/>
+            <a:srgbClr val="0C7373"/>
           </a:solidFill>
           <a:ln>
             <a:noFill/>
@@ -4810,6 +6356,9 @@
           <a:lstStyle/>
           <a:p>
             <a:pPr marL="0" indent="0" algn="ctr" rtl="0">
+              <a:spcBef>
+                <a:spcPts val="0"/>
+              </a:spcBef>
               <a:buNone/>
             </a:pPr>
             <a:r>
@@ -4833,7 +6382,7 @@
         </p:nvSpPr>
         <p:spPr>
           <a:xfrm>
-            <a:off x="432000" y="2714400"/>
+            <a:off x="432000" y="2944800"/>
             <a:ext cx="6264000" cy="252000"/>
           </a:xfrm>
           <a:prstGeom prst="rect">
@@ -4849,12 +6398,15 @@
           <a:lstStyle/>
           <a:p>
             <a:pPr marL="0" indent="0" algn="r" rtl="1">
+              <a:spcBef>
+                <a:spcPts val="0"/>
+              </a:spcBef>
               <a:buNone/>
             </a:pPr>
             <a:r>
               <a:rPr lang="ar-SA" sz="1200" b="1" dirty="0">
                 <a:solidFill>
-                  <a:srgbClr val="0E8A8A"/>
+                  <a:srgbClr val="0C7373"/>
                 </a:solidFill>
                 <a:latin typeface="IBM Plex Sans Arabic"/>
                 <a:cs typeface="IBM Plex Sans Arabic"/>
@@ -4872,8 +6424,8 @@
         </p:nvSpPr>
         <p:spPr>
           <a:xfrm>
-            <a:off x="432000" y="2966400"/>
-            <a:ext cx="6264000" cy="820800"/>
+            <a:off x="432000" y="3196800"/>
+            <a:ext cx="6264000" cy="878400"/>
           </a:xfrm>
           <a:prstGeom prst="rect">
             <a:avLst/>
@@ -4889,8 +6441,11 @@
           <a:p>
             <a:pPr marL="0" indent="0" algn="r" rtl="1">
               <a:lnSpc>
-                <a:spcPct val="130000"/>
-              </a:lnSpc>
+                <a:spcPct val="114999"/>
+              </a:lnSpc>
+              <a:spcBef>
+                <a:spcPts val="0"/>
+              </a:spcBef>
               <a:buNone/>
             </a:pPr>
             <a:r>
@@ -4901,7 +6456,7 @@
                 <a:latin typeface="IBM Plex Sans Arabic"/>
                 <a:cs typeface="IBM Plex Sans Arabic"/>
               </a:rPr>
-              <a:t>«تقرير رقم N» مرتبط تلقائيًا برقم الشريحة. لأسبوع جديد: حدّد شريحة الأسبوع السابق واضغط Ctrl+D، فتظهر نسخة برقم تالٍ تلقائيًا، وتبقى التقارير السابقة أرشيفًا في الملف نفسه. لا تحذف الشرائح القديمة حتى لا يتغيّر الترقيم؛ وإن حذفتها فاضبط «ترقيم الشرائح من» في: تصميم ← حجم الشريحة ← حجم مخصص.</a:t>
+              <a:t>«تقرير رقم N» مرتبط تلقائيًا برقم الشريحة. لأسبوع جديد: حدّد شريحة الأسبوع السابق واضغط Ctrl+D، فتظهر نسخة برقم تالٍ تلقائيًا، وتبقى التقارير السابقة أرشيفًا في الملف نفسه. لا تحذف الشرائح القديمة حتى لا يتغيّر الترقيم؛ وإن حذفتها فاضبط «ترقيم الشرائح من» في: تصميم ← حجم الشريحة ← حجم شريحة مخصص.</a:t>
             </a:r>
           </a:p>
         </p:txBody>
@@ -4914,14 +6469,14 @@
         </p:nvSpPr>
         <p:spPr>
           <a:xfrm>
-            <a:off x="6840000" y="3960000"/>
+            <a:off x="6840000" y="4248000"/>
             <a:ext cx="252000" cy="252000"/>
           </a:xfrm>
           <a:prstGeom prst="ellipse">
             <a:avLst/>
           </a:prstGeom>
           <a:solidFill>
-            <a:srgbClr val="0E8A8A"/>
+            <a:srgbClr val="0C7373"/>
           </a:solidFill>
           <a:ln>
             <a:noFill/>
@@ -4932,6 +6487,9 @@
           <a:lstStyle/>
           <a:p>
             <a:pPr marL="0" indent="0" algn="ctr" rtl="0">
+              <a:spcBef>
+                <a:spcPts val="0"/>
+              </a:spcBef>
               <a:buNone/>
             </a:pPr>
             <a:r>
@@ -4955,7 +6513,7 @@
         </p:nvSpPr>
         <p:spPr>
           <a:xfrm>
-            <a:off x="432000" y="3931200"/>
+            <a:off x="432000" y="4219200"/>
             <a:ext cx="6264000" cy="252000"/>
           </a:xfrm>
           <a:prstGeom prst="rect">
@@ -4971,12 +6529,15 @@
           <a:lstStyle/>
           <a:p>
             <a:pPr marL="0" indent="0" algn="r" rtl="1">
+              <a:spcBef>
+                <a:spcPts val="0"/>
+              </a:spcBef>
               <a:buNone/>
             </a:pPr>
             <a:r>
               <a:rPr lang="ar-SA" sz="1200" b="1" dirty="0">
                 <a:solidFill>
-                  <a:srgbClr val="0E8A8A"/>
+                  <a:srgbClr val="0C7373"/>
                 </a:solidFill>
                 <a:latin typeface="IBM Plex Sans Arabic"/>
                 <a:cs typeface="IBM Plex Sans Arabic"/>
@@ -4994,8 +6555,8 @@
         </p:nvSpPr>
         <p:spPr>
           <a:xfrm>
-            <a:off x="432000" y="4183200"/>
-            <a:ext cx="6264000" cy="446400"/>
+            <a:off x="432000" y="4471200"/>
+            <a:ext cx="6264000" cy="676800"/>
           </a:xfrm>
           <a:prstGeom prst="rect">
             <a:avLst/>
@@ -5011,8 +6572,11 @@
           <a:p>
             <a:pPr marL="0" indent="0" algn="r" rtl="1">
               <a:lnSpc>
-                <a:spcPct val="130000"/>
-              </a:lnSpc>
+                <a:spcPct val="114999"/>
+              </a:lnSpc>
+              <a:spcBef>
+                <a:spcPts val="0"/>
+              </a:spcBef>
               <a:buNone/>
             </a:pPr>
             <a:r>
@@ -5023,7 +6587,7 @@
                 <a:latin typeface="IBM Plex Sans Arabic"/>
                 <a:cs typeface="IBM Plex Sans Arabic"/>
               </a:rPr>
-              <a:t>ملف ← تصدير ← إنشاء PDF ← خيارات ← «الشريحة الحالية» أو نطاق الشرائح. هذه الشريحة مخفية فلا تُصدَّر ولا تُطبع. للطباعة الورقية: طباعة ← A4 عمودي ← «ملاءمة الورقة».</a:t>
+              <a:t>ملف ← تصدير ← إنشاء PDF/XPS ← خيارات ← النطاق: «الشريحة الحالية». هذه الشريحة مخفية فلا تُصدَّر إلى PDF. للطباعة الورقية: اطبع من ملف PDF، أو من PowerPoint مع التأكد أن «طباعة الشرائح المخفية» غير مفعّلة، واختر «ملاءمة الورقة» على A4 عمودي.</a:t>
             </a:r>
           </a:p>
         </p:txBody>
@@ -5036,14 +6600,14 @@
         </p:nvSpPr>
         <p:spPr>
           <a:xfrm>
-            <a:off x="6840000" y="4802400"/>
+            <a:off x="6840000" y="5320800"/>
             <a:ext cx="252000" cy="252000"/>
           </a:xfrm>
           <a:prstGeom prst="ellipse">
             <a:avLst/>
           </a:prstGeom>
           <a:solidFill>
-            <a:srgbClr val="0E8A8A"/>
+            <a:srgbClr val="0C7373"/>
           </a:solidFill>
           <a:ln>
             <a:noFill/>
@@ -5054,6 +6618,9 @@
           <a:lstStyle/>
           <a:p>
             <a:pPr marL="0" indent="0" algn="ctr" rtl="0">
+              <a:spcBef>
+                <a:spcPts val="0"/>
+              </a:spcBef>
               <a:buNone/>
             </a:pPr>
             <a:r>
@@ -5077,7 +6644,7 @@
         </p:nvSpPr>
         <p:spPr>
           <a:xfrm>
-            <a:off x="432000" y="4773600"/>
+            <a:off x="432000" y="5292000"/>
             <a:ext cx="6264000" cy="252000"/>
           </a:xfrm>
           <a:prstGeom prst="rect">
@@ -5093,12 +6660,15 @@
           <a:lstStyle/>
           <a:p>
             <a:pPr marL="0" indent="0" algn="r" rtl="1">
+              <a:spcBef>
+                <a:spcPts val="0"/>
+              </a:spcBef>
               <a:buNone/>
             </a:pPr>
             <a:r>
               <a:rPr lang="ar-SA" sz="1200" b="1" dirty="0">
                 <a:solidFill>
-                  <a:srgbClr val="0E8A8A"/>
+                  <a:srgbClr val="0C7373"/>
                 </a:solidFill>
                 <a:latin typeface="IBM Plex Sans Arabic"/>
                 <a:cs typeface="IBM Plex Sans Arabic"/>
@@ -5116,8 +6686,8 @@
         </p:nvSpPr>
         <p:spPr>
           <a:xfrm>
-            <a:off x="432000" y="5025600"/>
-            <a:ext cx="6264000" cy="446400"/>
+            <a:off x="432000" y="5544000"/>
+            <a:ext cx="6264000" cy="878400"/>
           </a:xfrm>
           <a:prstGeom prst="rect">
             <a:avLst/>
@@ -5133,8 +6703,11 @@
           <a:p>
             <a:pPr marL="0" indent="0" algn="r" rtl="1">
               <a:lnSpc>
-                <a:spcPct val="130000"/>
-              </a:lnSpc>
+                <a:spcPct val="114999"/>
+              </a:lnSpc>
+              <a:spcBef>
+                <a:spcPts val="0"/>
+              </a:spcBef>
               <a:buNone/>
             </a:pPr>
             <a:r>
@@ -5145,7 +6718,7 @@
                 <a:latin typeface="IBM Plex Sans Arabic"/>
                 <a:cs typeface="IBM Plex Sans Arabic"/>
               </a:rPr>
-              <a:t>Tab في آخر خلية يضيف صفًا جديدًا. لحذف صف: زر الفأرة الأيمن ← حذف ← الصفوف. اكتب النسبة كرقم مع ٪ والموعد بتاريخ واضح.</a:t>
+              <a:t>اكتب نسبة الإنجاز رقمًا فقط (الإشارة ٪ في رأس العمود). Tab ينتقل بين الخلايا من اليمين إلى اليسار، وفي آخر خلية يضيف صفًا. لحذف صف: زر الفأرة الأيمن ← حذف ← الصفوف. الحالة بأربع كلمات ثابتة: على المسار / تأخر بسيط / متأخر / متوقف، ولوّن المتأخر باللون الكهرماني العريض كما في المثال.</a:t>
             </a:r>
           </a:p>
         </p:txBody>
@@ -5158,14 +6731,14 @@
         </p:nvSpPr>
         <p:spPr>
           <a:xfrm>
-            <a:off x="6840000" y="5644800"/>
+            <a:off x="6840000" y="6595200"/>
             <a:ext cx="252000" cy="252000"/>
           </a:xfrm>
           <a:prstGeom prst="ellipse">
             <a:avLst/>
           </a:prstGeom>
           <a:solidFill>
-            <a:srgbClr val="0E8A8A"/>
+            <a:srgbClr val="0C7373"/>
           </a:solidFill>
           <a:ln>
             <a:noFill/>
@@ -5176,6 +6749,9 @@
           <a:lstStyle/>
           <a:p>
             <a:pPr marL="0" indent="0" algn="ctr" rtl="0">
+              <a:spcBef>
+                <a:spcPts val="0"/>
+              </a:spcBef>
               <a:buNone/>
             </a:pPr>
             <a:r>
@@ -5199,7 +6775,7 @@
         </p:nvSpPr>
         <p:spPr>
           <a:xfrm>
-            <a:off x="432000" y="5616000"/>
+            <a:off x="432000" y="6566400"/>
             <a:ext cx="6264000" cy="252000"/>
           </a:xfrm>
           <a:prstGeom prst="rect">
@@ -5215,12 +6791,15 @@
           <a:lstStyle/>
           <a:p>
             <a:pPr marL="0" indent="0" algn="r" rtl="1">
+              <a:spcBef>
+                <a:spcPts val="0"/>
+              </a:spcBef>
               <a:buNone/>
             </a:pPr>
             <a:r>
               <a:rPr lang="ar-SA" sz="1200" b="1" dirty="0">
                 <a:solidFill>
-                  <a:srgbClr val="0E8A8A"/>
+                  <a:srgbClr val="0C7373"/>
                 </a:solidFill>
                 <a:latin typeface="IBM Plex Sans Arabic"/>
                 <a:cs typeface="IBM Plex Sans Arabic"/>
@@ -5238,8 +6817,8 @@
         </p:nvSpPr>
         <p:spPr>
           <a:xfrm>
-            <a:off x="432000" y="5868000"/>
-            <a:ext cx="6264000" cy="259200"/>
+            <a:off x="432000" y="6818400"/>
+            <a:ext cx="6264000" cy="475200"/>
           </a:xfrm>
           <a:prstGeom prst="rect">
             <a:avLst/>
@@ -5255,8 +6834,11 @@
           <a:p>
             <a:pPr marL="0" indent="0" algn="r" rtl="1">
               <a:lnSpc>
-                <a:spcPct val="130000"/>
-              </a:lnSpc>
+                <a:spcPct val="114999"/>
+              </a:lnSpc>
+              <a:spcBef>
+                <a:spcPts val="0"/>
+              </a:spcBef>
               <a:buNone/>
             </a:pPr>
             <a:r>
@@ -5267,7 +6849,7 @@
                 <a:latin typeface="IBM Plex Sans Arabic"/>
                 <a:cs typeface="IBM Plex Sans Arabic"/>
               </a:rPr>
-              <a:t>انقر أيقونة الصورة أعلى اليمين لإدراج شعار جهتك مرة واحدة؛ يُنسخ تلقائيًا مع تكرار الشريحة.</a:t>
+              <a:t>انقر أيقونة الصورة أعلى اليمين لإدراج شعار جهتك مرة واحدة؛ يُنسخ تلقائيًا مع تكرار الشريحة. إن حُذف حقل أو تحرّك بالخطأ: الصفحة الرئيسية ← إعادة تعيين (Reset).</a:t>
             </a:r>
           </a:p>
         </p:txBody>
@@ -5280,14 +6862,14 @@
         </p:nvSpPr>
         <p:spPr>
           <a:xfrm>
-            <a:off x="6840000" y="6300000"/>
+            <a:off x="6840000" y="7466400"/>
             <a:ext cx="252000" cy="252000"/>
           </a:xfrm>
           <a:prstGeom prst="ellipse">
             <a:avLst/>
           </a:prstGeom>
           <a:solidFill>
-            <a:srgbClr val="0E8A8A"/>
+            <a:srgbClr val="0C7373"/>
           </a:solidFill>
           <a:ln>
             <a:noFill/>
@@ -5298,6 +6880,9 @@
           <a:lstStyle/>
           <a:p>
             <a:pPr marL="0" indent="0" algn="ctr" rtl="0">
+              <a:spcBef>
+                <a:spcPts val="0"/>
+              </a:spcBef>
               <a:buNone/>
             </a:pPr>
             <a:r>
@@ -5321,7 +6906,7 @@
         </p:nvSpPr>
         <p:spPr>
           <a:xfrm>
-            <a:off x="432000" y="6271200"/>
+            <a:off x="432000" y="7437600"/>
             <a:ext cx="6264000" cy="252000"/>
           </a:xfrm>
           <a:prstGeom prst="rect">
@@ -5337,12 +6922,15 @@
           <a:lstStyle/>
           <a:p>
             <a:pPr marL="0" indent="0" algn="r" rtl="1">
+              <a:spcBef>
+                <a:spcPts val="0"/>
+              </a:spcBef>
               <a:buNone/>
             </a:pPr>
             <a:r>
               <a:rPr lang="ar-SA" sz="1200" b="1" dirty="0">
                 <a:solidFill>
-                  <a:srgbClr val="0E8A8A"/>
+                  <a:srgbClr val="0C7373"/>
                 </a:solidFill>
                 <a:latin typeface="IBM Plex Sans Arabic"/>
                 <a:cs typeface="IBM Plex Sans Arabic"/>
@@ -5360,8 +6948,8 @@
         </p:nvSpPr>
         <p:spPr>
           <a:xfrm>
-            <a:off x="432000" y="6523200"/>
-            <a:ext cx="6264000" cy="446400"/>
+            <a:off x="432000" y="7689600"/>
+            <a:ext cx="6264000" cy="676800"/>
           </a:xfrm>
           <a:prstGeom prst="rect">
             <a:avLst/>
@@ -5377,8 +6965,11 @@
           <a:p>
             <a:pPr marL="0" indent="0" algn="r" rtl="1">
               <a:lnSpc>
-                <a:spcPct val="130000"/>
-              </a:lnSpc>
+                <a:spcPct val="114999"/>
+              </a:lnSpc>
+              <a:spcBef>
+                <a:spcPts val="0"/>
+              </a:spcBef>
               <a:buNone/>
             </a:pPr>
             <a:r>
@@ -5389,7 +6980,7 @@
                 <a:latin typeface="IBM Plex Sans Arabic"/>
                 <a:cs typeface="IBM Plex Sans Arabic"/>
               </a:rPr>
-              <a:t>القالب مبني على خط IBM Plex Sans Arabic (مرفق في مجلد fonts، ترخيص مفتوح). ثبّته بالنقر المزدوج ← «تثبيت» (لا يحتاج صلاحيات مسؤول). دون تثبيته يستبدله أوفيس بخط قريب.</a:t>
+              <a:t>القالب مبني على خط IBM Plex Sans Arabic بوزنيه Regular وBold للعناوين وMedium للمتن (مرفقة في مجلد fonts، ترخيص مفتوح). ثبّت الملفات الأربعة بالنقر المزدوج ← «تثبيت»؛ لا يحتاج صلاحيات مسؤول. دون تثبيتها يستبدلها أوفيس بخط قريب.</a:t>
             </a:r>
           </a:p>
         </p:txBody>
@@ -5402,14 +6993,14 @@
         </p:nvSpPr>
         <p:spPr>
           <a:xfrm>
-            <a:off x="6840000" y="7142400"/>
+            <a:off x="6840000" y="8539200"/>
             <a:ext cx="252000" cy="252000"/>
           </a:xfrm>
           <a:prstGeom prst="ellipse">
             <a:avLst/>
           </a:prstGeom>
           <a:solidFill>
-            <a:srgbClr val="0E8A8A"/>
+            <a:srgbClr val="0C7373"/>
           </a:solidFill>
           <a:ln>
             <a:noFill/>
@@ -5420,6 +7011,9 @@
           <a:lstStyle/>
           <a:p>
             <a:pPr marL="0" indent="0" algn="ctr" rtl="0">
+              <a:spcBef>
+                <a:spcPts val="0"/>
+              </a:spcBef>
               <a:buNone/>
             </a:pPr>
             <a:r>
@@ -5437,13 +7031,13 @@
       </p:sp>
       <p:sp>
         <p:nvSpPr>
-          <p:cNvPr id="34" name="دليل: استعادة الحقول"/>
+          <p:cNvPr id="34" name="دليل: نصائح الكتابة"/>
           <p:cNvSpPr txBox="1"/>
           <p:nvPr/>
         </p:nvSpPr>
         <p:spPr>
           <a:xfrm>
-            <a:off x="432000" y="7113600"/>
+            <a:off x="432000" y="8510400"/>
             <a:ext cx="6264000" cy="252000"/>
           </a:xfrm>
           <a:prstGeom prst="rect">
@@ -5459,31 +7053,34 @@
           <a:lstStyle/>
           <a:p>
             <a:pPr marL="0" indent="0" algn="r" rtl="1">
+              <a:spcBef>
+                <a:spcPts val="0"/>
+              </a:spcBef>
               <a:buNone/>
             </a:pPr>
             <a:r>
               <a:rPr lang="ar-SA" sz="1200" b="1" dirty="0">
                 <a:solidFill>
-                  <a:srgbClr val="0E8A8A"/>
+                  <a:srgbClr val="0C7373"/>
                 </a:solidFill>
                 <a:latin typeface="IBM Plex Sans Arabic"/>
                 <a:cs typeface="IBM Plex Sans Arabic"/>
               </a:rPr>
-              <a:t>استعادة الحقول</a:t>
-            </a:r>
-          </a:p>
-        </p:txBody>
-      </p:sp>
-      <p:sp>
-        <p:nvSpPr>
-          <p:cNvPr id="35" name="نص: استعادة الحقول"/>
+              <a:t>نصائح الكتابة</a:t>
+            </a:r>
+          </a:p>
+        </p:txBody>
+      </p:sp>
+      <p:sp>
+        <p:nvSpPr>
+          <p:cNvPr id="35" name="نص: نصائح الكتابة"/>
           <p:cNvSpPr txBox="1"/>
           <p:nvPr/>
         </p:nvSpPr>
         <p:spPr>
           <a:xfrm>
-            <a:off x="432000" y="7365600"/>
-            <a:ext cx="6264000" cy="446400"/>
+            <a:off x="432000" y="8762400"/>
+            <a:ext cx="6264000" cy="878400"/>
           </a:xfrm>
           <a:prstGeom prst="rect">
             <a:avLst/>
@@ -5499,8 +7096,11 @@
           <a:p>
             <a:pPr marL="0" indent="0" algn="r" rtl="1">
               <a:lnSpc>
-                <a:spcPct val="130000"/>
-              </a:lnSpc>
+                <a:spcPct val="114999"/>
+              </a:lnSpc>
+              <a:spcBef>
+                <a:spcPts val="0"/>
+              </a:spcBef>
               <a:buNone/>
             </a:pPr>
             <a:r>
@@ -5511,62 +7111,21 @@
                 <a:latin typeface="IBM Plex Sans Arabic"/>
                 <a:cs typeface="IBM Plex Sans Arabic"/>
               </a:rPr>
-              <a:t>إن حُذف حقل أو تحرّك بالخطأ: الصفحة الرئيسية ← إعادة تعيين (Reset) فتعود الحقول إلى مواضعها دون فقدان النص.</a:t>
-            </a:r>
-          </a:p>
-        </p:txBody>
-      </p:sp>
-      <p:sp>
-        <p:nvSpPr>
-          <p:cNvPr id="36" name="رقم الخطوة"/>
+              <a:t>ابدأ كل مهمة بالنتيجة لا بالنشاط («نُشرت اللوحة واعتمدتها 3 إدارات» بدل «عملت على اللوحة»). خمسة بنود كحد أقصى لكل قسم. بنود الأسبوع المقبل: نتيجة + يوم. الأعداد في الخلاصة تطابق البطاقات وحالات الجدول. التحديات: السبب ← الأثر ← الموعد الجديد ← هل يحتاج تدخّلك؟ القرار المطلوب: طلب واحد بموعد وأثر للتأخير.</a:t>
+            </a:r>
+          </a:p>
+        </p:txBody>
+      </p:sp>
+      <p:sp>
+        <p:nvSpPr>
+          <p:cNvPr id="36" name="تذييل الدليل"/>
           <p:cNvSpPr txBox="1"/>
           <p:nvPr/>
         </p:nvSpPr>
         <p:spPr>
           <a:xfrm>
-            <a:off x="6840000" y="7984800"/>
-            <a:ext cx="252000" cy="252000"/>
-          </a:xfrm>
-          <a:prstGeom prst="ellipse">
-            <a:avLst/>
-          </a:prstGeom>
-          <a:solidFill>
-            <a:srgbClr val="0E8A8A"/>
-          </a:solidFill>
-          <a:ln>
-            <a:noFill/>
-          </a:ln>
-        </p:spPr>
-        <p:txBody>
-          <a:bodyPr wrap="square" lIns="0" tIns="0" rIns="0" bIns="0" rtlCol="0" anchor="ctr"/>
-          <a:lstStyle/>
-          <a:p>
-            <a:pPr marL="0" indent="0" algn="ctr" rtl="0">
-              <a:buNone/>
-            </a:pPr>
-            <a:r>
-              <a:rPr lang="en-US" sz="900" b="1" dirty="0">
-                <a:solidFill>
-                  <a:srgbClr val="FFFFFF"/>
-                </a:solidFill>
-                <a:latin typeface="IBM Plex Sans Arabic"/>
-                <a:cs typeface="IBM Plex Sans Arabic"/>
-              </a:rPr>
-              <a:t>8</a:t>
-            </a:r>
-          </a:p>
-        </p:txBody>
-      </p:sp>
-      <p:sp>
-        <p:nvSpPr>
-          <p:cNvPr id="37" name="دليل: نصائح الكتابة"/>
-          <p:cNvSpPr txBox="1"/>
-          <p:nvPr/>
-        </p:nvSpPr>
-        <p:spPr>
-          <a:xfrm>
-            <a:off x="432000" y="7956000"/>
-            <a:ext cx="6264000" cy="252000"/>
+            <a:off x="432000" y="10224000"/>
+            <a:ext cx="6696000" cy="216000"/>
           </a:xfrm>
           <a:prstGeom prst="rect">
             <a:avLst/>
@@ -5581,98 +7140,20 @@
           <a:lstStyle/>
           <a:p>
             <a:pPr marL="0" indent="0" algn="r" rtl="1">
+              <a:spcBef>
+                <a:spcPts val="0"/>
+              </a:spcBef>
               <a:buNone/>
             </a:pPr>
             <a:r>
-              <a:rPr lang="ar-SA" sz="1200" b="1" dirty="0">
-                <a:solidFill>
-                  <a:srgbClr val="0E8A8A"/>
+              <a:rPr lang="ar-SA" sz="850" dirty="0">
+                <a:solidFill>
+                  <a:srgbClr val="6C727E"/>
                 </a:solidFill>
                 <a:latin typeface="IBM Plex Sans Arabic"/>
                 <a:cs typeface="IBM Plex Sans Arabic"/>
               </a:rPr>
-              <a:t>نصائح الكتابة</a:t>
-            </a:r>
-          </a:p>
-        </p:txBody>
-      </p:sp>
-      <p:sp>
-        <p:nvSpPr>
-          <p:cNvPr id="38" name="نص: نصائح الكتابة"/>
-          <p:cNvSpPr txBox="1"/>
-          <p:nvPr/>
-        </p:nvSpPr>
-        <p:spPr>
-          <a:xfrm>
-            <a:off x="432000" y="8208000"/>
-            <a:ext cx="6264000" cy="633600"/>
-          </a:xfrm>
-          <a:prstGeom prst="rect">
-            <a:avLst/>
-          </a:prstGeom>
-          <a:noFill/>
-          <a:ln>
-            <a:noFill/>
-          </a:ln>
-        </p:spPr>
-        <p:txBody>
-          <a:bodyPr wrap="square" lIns="0" tIns="0" rIns="0" bIns="0" rtlCol="0" anchor="t"/>
-          <a:lstStyle/>
-          <a:p>
-            <a:pPr marL="0" indent="0" algn="r" rtl="1">
-              <a:lnSpc>
-                <a:spcPct val="130000"/>
-              </a:lnSpc>
-              <a:buNone/>
-            </a:pPr>
-            <a:r>
-              <a:rPr lang="ar-SA" sz="1050" dirty="0">
-                <a:solidFill>
-                  <a:srgbClr val="1F2A37"/>
-                </a:solidFill>
-                <a:latin typeface="IBM Plex Sans Arabic"/>
-                <a:cs typeface="IBM Plex Sans Arabic"/>
-              </a:rPr>
-              <a:t>ابدأ كل مهمة بالنتيجة لا بالنشاط («نُشرت اللوحة واعتمدتها 3 إدارات» بدل «عملت على اللوحة»). خمسة عناصر كحد أقصى لكل قسم. أضف رقمًا أو تاريخًا حيث أمكن. التحديات: جملة واحدة وما فعلته حيالها. القرار المطلوب: طلب واحد واضح بموعد.</a:t>
-            </a:r>
-          </a:p>
-        </p:txBody>
-      </p:sp>
-      <p:sp>
-        <p:nvSpPr>
-          <p:cNvPr id="39" name="تذييل الدليل"/>
-          <p:cNvSpPr txBox="1"/>
-          <p:nvPr/>
-        </p:nvSpPr>
-        <p:spPr>
-          <a:xfrm>
-            <a:off x="432000" y="10224000"/>
-            <a:ext cx="6696000" cy="216000"/>
-          </a:xfrm>
-          <a:prstGeom prst="rect">
-            <a:avLst/>
-          </a:prstGeom>
-          <a:noFill/>
-          <a:ln>
-            <a:noFill/>
-          </a:ln>
-        </p:spPr>
-        <p:txBody>
-          <a:bodyPr wrap="square" lIns="0" tIns="0" rIns="0" bIns="0" rtlCol="0" anchor="ctr"/>
-          <a:lstStyle/>
-          <a:p>
-            <a:pPr marL="0" indent="0" algn="r" rtl="1">
-              <a:buNone/>
-            </a:pPr>
-            <a:r>
-              <a:rPr lang="ar-SA" sz="800" dirty="0">
-                <a:solidFill>
-                  <a:srgbClr val="6C727E"/>
-                </a:solidFill>
-                <a:latin typeface="IBM Plex Sans Arabic"/>
-                <a:cs typeface="IBM Plex Sans Arabic"/>
-              </a:rPr>
-              <a:t>القالب مستوحى من الهوية البصرية لسدايا (ألوان وتدرجات وزخرفة شبكية) دون استخدام شعارها.</a:t>
+              <a:t>القالب مستوحى من الهوية البصرية لسدايا (ألوانها وتدرجاتها وزخرفة شبكية) دون استخدام شعارها.</a:t>
             </a:r>
           </a:p>
         </p:txBody>
@@ -5702,25 +7183,25 @@
         <a:srgbClr val="EEF0F8"/>
       </a:lt2>
       <a:accent1>
-        <a:srgbClr val="33CC99"/>
+        <a:srgbClr val="0C7373"/>
       </a:accent1>
       <a:accent2>
         <a:srgbClr val="6459A7"/>
       </a:accent2>
       <a:accent3>
-        <a:srgbClr val="0E8A8A"/>
+        <a:srgbClr val="127A5B"/>
       </a:accent3>
       <a:accent4>
-        <a:srgbClr val="99D633"/>
+        <a:srgbClr val="33CC99"/>
       </a:accent4>
       <a:accent5>
         <a:srgbClr val="66CCFF"/>
       </a:accent5>
       <a:accent6>
-        <a:srgbClr val="DC6803"/>
+        <a:srgbClr val="B54708"/>
       </a:accent6>
       <a:hlink>
-        <a:srgbClr val="0E8A8A"/>
+        <a:srgbClr val="0C7373"/>
       </a:hlink>
       <a:folHlink>
         <a:srgbClr val="6459A7"/>

--- a/weekly_report_template/out/التقرير_الأسبوعي_مثال.pptx
+++ b/weekly_report_template/out/التقرير_الأسبوعي_مثال.pptx
@@ -14,7 +14,7 @@
     <a:defPPr>
       <a:defRPr lang="ar-SA"/>
     </a:defPPr>
-    <a:lvl1pPr marL="0" algn="l" defTabSz="457200" rtl="0" eaLnBrk="1" latinLnBrk="0" hangingPunct="1">
+    <a:lvl1pPr marL="0" algn="r" defTabSz="457200" rtl="1" eaLnBrk="1" latinLnBrk="0" hangingPunct="1">
       <a:defRPr sz="1800" kern="1200" lang="ar-SA">
         <a:solidFill>
           <a:schemeClr val="tx1"/>
@@ -24,7 +24,7 @@
         <a:cs typeface="+mn-cs"/>
       </a:defRPr>
     </a:lvl1pPr>
-    <a:lvl2pPr marL="457200" algn="l" defTabSz="457200" rtl="0" eaLnBrk="1" latinLnBrk="0" hangingPunct="1">
+    <a:lvl2pPr marL="457200" algn="r" defTabSz="457200" rtl="1" eaLnBrk="1" latinLnBrk="0" hangingPunct="1">
       <a:defRPr sz="1800" kern="1200" lang="ar-SA">
         <a:solidFill>
           <a:schemeClr val="tx1"/>
@@ -34,7 +34,7 @@
         <a:cs typeface="+mn-cs"/>
       </a:defRPr>
     </a:lvl2pPr>
-    <a:lvl3pPr marL="914400" algn="l" defTabSz="457200" rtl="0" eaLnBrk="1" latinLnBrk="0" hangingPunct="1">
+    <a:lvl3pPr marL="914400" algn="r" defTabSz="457200" rtl="1" eaLnBrk="1" latinLnBrk="0" hangingPunct="1">
       <a:defRPr sz="1800" kern="1200" lang="ar-SA">
         <a:solidFill>
           <a:schemeClr val="tx1"/>
@@ -44,7 +44,7 @@
         <a:cs typeface="+mn-cs"/>
       </a:defRPr>
     </a:lvl3pPr>
-    <a:lvl4pPr marL="1371600" algn="l" defTabSz="457200" rtl="0" eaLnBrk="1" latinLnBrk="0" hangingPunct="1">
+    <a:lvl4pPr marL="1371600" algn="r" defTabSz="457200" rtl="1" eaLnBrk="1" latinLnBrk="0" hangingPunct="1">
       <a:defRPr sz="1800" kern="1200" lang="ar-SA">
         <a:solidFill>
           <a:schemeClr val="tx1"/>
@@ -54,7 +54,7 @@
         <a:cs typeface="+mn-cs"/>
       </a:defRPr>
     </a:lvl4pPr>
-    <a:lvl5pPr marL="1828800" algn="l" defTabSz="457200" rtl="0" eaLnBrk="1" latinLnBrk="0" hangingPunct="1">
+    <a:lvl5pPr marL="1828800" algn="r" defTabSz="457200" rtl="1" eaLnBrk="1" latinLnBrk="0" hangingPunct="1">
       <a:defRPr sz="1800" kern="1200" lang="ar-SA">
         <a:solidFill>
           <a:schemeClr val="tx1"/>
@@ -64,7 +64,7 @@
         <a:cs typeface="+mn-cs"/>
       </a:defRPr>
     </a:lvl5pPr>
-    <a:lvl6pPr marL="2286000" algn="l" defTabSz="457200" rtl="0" eaLnBrk="1" latinLnBrk="0" hangingPunct="1">
+    <a:lvl6pPr marL="2286000" algn="r" defTabSz="457200" rtl="1" eaLnBrk="1" latinLnBrk="0" hangingPunct="1">
       <a:defRPr sz="1800" kern="1200" lang="ar-SA">
         <a:solidFill>
           <a:schemeClr val="tx1"/>
@@ -74,7 +74,7 @@
         <a:cs typeface="+mn-cs"/>
       </a:defRPr>
     </a:lvl6pPr>
-    <a:lvl7pPr marL="2743200" algn="l" defTabSz="457200" rtl="0" eaLnBrk="1" latinLnBrk="0" hangingPunct="1">
+    <a:lvl7pPr marL="2743200" algn="r" defTabSz="457200" rtl="1" eaLnBrk="1" latinLnBrk="0" hangingPunct="1">
       <a:defRPr sz="1800" kern="1200" lang="ar-SA">
         <a:solidFill>
           <a:schemeClr val="tx1"/>
@@ -84,7 +84,7 @@
         <a:cs typeface="+mn-cs"/>
       </a:defRPr>
     </a:lvl7pPr>
-    <a:lvl8pPr marL="3200400" algn="l" defTabSz="457200" rtl="0" eaLnBrk="1" latinLnBrk="0" hangingPunct="1">
+    <a:lvl8pPr marL="3200400" algn="r" defTabSz="457200" rtl="1" eaLnBrk="1" latinLnBrk="0" hangingPunct="1">
       <a:defRPr sz="1800" kern="1200" lang="ar-SA">
         <a:solidFill>
           <a:schemeClr val="tx1"/>
@@ -94,7 +94,7 @@
         <a:cs typeface="+mn-cs"/>
       </a:defRPr>
     </a:lvl8pPr>
-    <a:lvl9pPr marL="3657600" algn="l" defTabSz="457200" rtl="0" eaLnBrk="1" latinLnBrk="0" hangingPunct="1">
+    <a:lvl9pPr marL="3657600" algn="r" defTabSz="457200" rtl="1" eaLnBrk="1" latinLnBrk="0" hangingPunct="1">
       <a:defRPr sz="1800" kern="1200" lang="ar-SA">
         <a:solidFill>
           <a:schemeClr val="tx1"/>
@@ -502,7 +502,9 @@
           <a:bodyPr/>
           <a:lstStyle/>
           <a:p>
-            <a:r>
+            <a:pPr algn="r" rtl="1"/>
+            <a:r>
+              <a:rPr lang="ar-SA"/>
               <a:t>دليل سريع: اكتب داخل الحقول الإرشادية (لا تُطبع إن بقيت فارغة). لأسبوع جديد: Ctrl+D على هذه الشريحة فيزيد العداد تلقائيًا. للتصدير: ملف ← تصدير ← PDF ← خيارات ← الشريحة الحالية. التفاصيل في الشريحة المخفية الأخيرة.</a:t>
             </a:r>
           </a:p>
@@ -584,7 +586,7 @@
         <p:spPr>
           <a:xfrm>
             <a:off x="0" y="0"/>
-            <a:ext cx="7560000" cy="1656000"/>
+            <a:ext cx="7560000" cy="1584000"/>
           </a:xfrm>
           <a:prstGeom prst="rect">
             <a:avLst/>
@@ -613,16 +615,16 @@
         </p:nvCxnSpPr>
         <p:spPr>
           <a:xfrm flipV="1">
-            <a:off x="1638000" y="396000"/>
+            <a:off x="1422000" y="396000"/>
             <a:ext cx="198000" cy="234000"/>
           </a:xfrm>
           <a:prstGeom prst="line">
             <a:avLst/>
           </a:prstGeom>
-          <a:ln w="6350" cap="rnd">
+          <a:ln w="12700" cap="rnd">
             <a:solidFill>
               <a:srgbClr val="66CCFF">
-                <a:alpha val="30000"/>
+                <a:alpha val="45000"/>
               </a:srgbClr>
             </a:solidFill>
             <a:round/>
@@ -637,16 +639,16 @@
         </p:nvCxnSpPr>
         <p:spPr>
           <a:xfrm>
-            <a:off x="1836000" y="396000"/>
+            <a:off x="1620000" y="396000"/>
             <a:ext cx="216000" cy="126000"/>
           </a:xfrm>
           <a:prstGeom prst="line">
             <a:avLst/>
           </a:prstGeom>
-          <a:ln w="6350" cap="rnd">
+          <a:ln w="12700" cap="rnd">
             <a:solidFill>
               <a:srgbClr val="66CCFF">
-                <a:alpha val="30000"/>
+                <a:alpha val="45000"/>
               </a:srgbClr>
             </a:solidFill>
             <a:round/>
@@ -661,16 +663,16 @@
         </p:nvCxnSpPr>
         <p:spPr>
           <a:xfrm flipV="1">
-            <a:off x="2052000" y="234000"/>
+            <a:off x="1836000" y="234000"/>
             <a:ext cx="198000" cy="288000"/>
           </a:xfrm>
           <a:prstGeom prst="line">
             <a:avLst/>
           </a:prstGeom>
-          <a:ln w="6350" cap="rnd">
+          <a:ln w="12700" cap="rnd">
             <a:solidFill>
               <a:srgbClr val="66CCFF">
-                <a:alpha val="30000"/>
+                <a:alpha val="45000"/>
               </a:srgbClr>
             </a:solidFill>
             <a:round/>
@@ -685,16 +687,16 @@
         </p:nvCxnSpPr>
         <p:spPr>
           <a:xfrm>
-            <a:off x="2250000" y="234000"/>
+            <a:off x="2034000" y="234000"/>
             <a:ext cx="216000" cy="126000"/>
           </a:xfrm>
           <a:prstGeom prst="line">
             <a:avLst/>
           </a:prstGeom>
-          <a:ln w="6350" cap="rnd">
+          <a:ln w="12700" cap="rnd">
             <a:solidFill>
               <a:srgbClr val="66CCFF">
-                <a:alpha val="30000"/>
+                <a:alpha val="45000"/>
               </a:srgbClr>
             </a:solidFill>
             <a:round/>
@@ -709,16 +711,16 @@
         </p:nvCxnSpPr>
         <p:spPr>
           <a:xfrm flipV="1">
-            <a:off x="2466000" y="90000"/>
-            <a:ext cx="198000" cy="270000"/>
+            <a:off x="2250000" y="108000"/>
+            <a:ext cx="198000" cy="252000"/>
           </a:xfrm>
           <a:prstGeom prst="line">
             <a:avLst/>
           </a:prstGeom>
-          <a:ln w="6350" cap="rnd">
+          <a:ln w="12700" cap="rnd">
             <a:solidFill>
               <a:srgbClr val="66CCFF">
-                <a:alpha val="30000"/>
+                <a:alpha val="45000"/>
               </a:srgbClr>
             </a:solidFill>
             <a:round/>
@@ -733,16 +735,16 @@
         </p:nvCxnSpPr>
         <p:spPr>
           <a:xfrm>
-            <a:off x="2664000" y="90000"/>
-            <a:ext cx="198000" cy="162000"/>
+            <a:off x="2448000" y="108000"/>
+            <a:ext cx="198000" cy="144000"/>
           </a:xfrm>
           <a:prstGeom prst="line">
             <a:avLst/>
           </a:prstGeom>
-          <a:ln w="6350" cap="rnd">
+          <a:ln w="12700" cap="rnd">
             <a:solidFill>
               <a:srgbClr val="66CCFF">
-                <a:alpha val="30000"/>
+                <a:alpha val="45000"/>
               </a:srgbClr>
             </a:solidFill>
             <a:round/>
@@ -757,16 +759,16 @@
         </p:nvCxnSpPr>
         <p:spPr>
           <a:xfrm flipV="1">
-            <a:off x="2862000" y="28800"/>
-            <a:ext cx="180000" cy="223200"/>
+            <a:off x="2646000" y="93600"/>
+            <a:ext cx="180000" cy="158400"/>
           </a:xfrm>
           <a:prstGeom prst="line">
             <a:avLst/>
           </a:prstGeom>
-          <a:ln w="6350" cap="rnd">
+          <a:ln w="12700" cap="rnd">
             <a:solidFill>
               <a:srgbClr val="66CCFF">
-                <a:alpha val="30000"/>
+                <a:alpha val="45000"/>
               </a:srgbClr>
             </a:solidFill>
             <a:round/>
@@ -781,16 +783,16 @@
         </p:nvCxnSpPr>
         <p:spPr>
           <a:xfrm>
-            <a:off x="2052000" y="522000"/>
+            <a:off x="1836000" y="522000"/>
             <a:ext cx="126000" cy="252000"/>
           </a:xfrm>
           <a:prstGeom prst="line">
             <a:avLst/>
           </a:prstGeom>
-          <a:ln w="6350" cap="rnd">
+          <a:ln w="12700" cap="rnd">
             <a:solidFill>
               <a:srgbClr val="66CCFF">
-                <a:alpha val="30000"/>
+                <a:alpha val="45000"/>
               </a:srgbClr>
             </a:solidFill>
             <a:round/>
@@ -805,16 +807,16 @@
         </p:nvCxnSpPr>
         <p:spPr>
           <a:xfrm>
-            <a:off x="2466000" y="360000"/>
+            <a:off x="2250000" y="360000"/>
             <a:ext cx="108000" cy="234000"/>
           </a:xfrm>
           <a:prstGeom prst="line">
             <a:avLst/>
           </a:prstGeom>
-          <a:ln w="6350" cap="rnd">
+          <a:ln w="12700" cap="rnd">
             <a:solidFill>
               <a:srgbClr val="66CCFF">
-                <a:alpha val="30000"/>
+                <a:alpha val="45000"/>
               </a:srgbClr>
             </a:solidFill>
             <a:round/>
@@ -829,7 +831,7 @@
         </p:nvSpPr>
         <p:spPr>
           <a:xfrm>
-            <a:off x="1580400" y="572400"/>
+            <a:off x="1364400" y="572400"/>
             <a:ext cx="115200" cy="115200"/>
           </a:xfrm>
           <a:prstGeom prst="ellipse">
@@ -853,7 +855,7 @@
         </p:nvSpPr>
         <p:spPr>
           <a:xfrm>
-            <a:off x="1800000" y="360000"/>
+            <a:off x="1584000" y="360000"/>
             <a:ext cx="72000" cy="72000"/>
           </a:xfrm>
           <a:prstGeom prst="ellipse">
@@ -877,7 +879,7 @@
         </p:nvSpPr>
         <p:spPr>
           <a:xfrm>
-            <a:off x="2016000" y="486000"/>
+            <a:off x="1800000" y="486000"/>
             <a:ext cx="72000" cy="72000"/>
           </a:xfrm>
           <a:prstGeom prst="ellipse">
@@ -901,7 +903,7 @@
         </p:nvSpPr>
         <p:spPr>
           <a:xfrm>
-            <a:off x="2192400" y="176400"/>
+            <a:off x="1976400" y="176400"/>
             <a:ext cx="115200" cy="115200"/>
           </a:xfrm>
           <a:prstGeom prst="ellipse">
@@ -925,7 +927,7 @@
         </p:nvSpPr>
         <p:spPr>
           <a:xfrm>
-            <a:off x="2430000" y="324000"/>
+            <a:off x="2214000" y="324000"/>
             <a:ext cx="72000" cy="72000"/>
           </a:xfrm>
           <a:prstGeom prst="ellipse">
@@ -949,7 +951,7 @@
         </p:nvSpPr>
         <p:spPr>
           <a:xfrm>
-            <a:off x="2628000" y="54000"/>
+            <a:off x="2412000" y="72000"/>
             <a:ext cx="72000" cy="72000"/>
           </a:xfrm>
           <a:prstGeom prst="ellipse">
@@ -973,7 +975,7 @@
         </p:nvSpPr>
         <p:spPr>
           <a:xfrm>
-            <a:off x="2804400" y="194400"/>
+            <a:off x="2588400" y="194400"/>
             <a:ext cx="115200" cy="115200"/>
           </a:xfrm>
           <a:prstGeom prst="ellipse">
@@ -997,7 +999,7 @@
         </p:nvSpPr>
         <p:spPr>
           <a:xfrm>
-            <a:off x="3006000" y="-7200"/>
+            <a:off x="2790000" y="57600"/>
             <a:ext cx="72000" cy="72000"/>
           </a:xfrm>
           <a:prstGeom prst="ellipse">
@@ -1021,7 +1023,7 @@
         </p:nvSpPr>
         <p:spPr>
           <a:xfrm>
-            <a:off x="2142000" y="738000"/>
+            <a:off x="1926000" y="738000"/>
             <a:ext cx="72000" cy="72000"/>
           </a:xfrm>
           <a:prstGeom prst="ellipse">
@@ -1045,7 +1047,7 @@
         </p:nvSpPr>
         <p:spPr>
           <a:xfrm>
-            <a:off x="2516400" y="536400"/>
+            <a:off x="2300400" y="536400"/>
             <a:ext cx="115200" cy="115200"/>
           </a:xfrm>
           <a:prstGeom prst="ellipse">
@@ -1069,8 +1071,8 @@
         </p:nvSpPr>
         <p:spPr>
           <a:xfrm>
-            <a:off x="432000" y="216000"/>
-            <a:ext cx="1080000" cy="504000"/>
+            <a:off x="432000" y="180000"/>
+            <a:ext cx="1080000" cy="540000"/>
           </a:xfrm>
           <a:prstGeom prst="roundRect">
             <a:avLst>
@@ -1157,8 +1159,8 @@
         </p:nvSpPr>
         <p:spPr>
           <a:xfrm>
-            <a:off x="6624000" y="180000"/>
-            <a:ext cx="504000" cy="504000"/>
+            <a:off x="6588000" y="180000"/>
+            <a:ext cx="540000" cy="540000"/>
           </a:xfrm>
           <a:prstGeom prst="rect">
             <a:avLst/>
@@ -1374,7 +1376,7 @@
         </p:nvSpPr>
         <p:spPr>
           <a:xfrm>
-            <a:off x="4992000" y="1152000"/>
+            <a:off x="4992000" y="1116000"/>
             <a:ext cx="2136000" cy="162000"/>
           </a:xfrm>
           <a:prstGeom prst="rect">
@@ -1551,7 +1553,7 @@
         </p:nvSpPr>
         <p:spPr>
           <a:xfrm>
-            <a:off x="2712000" y="1152000"/>
+            <a:off x="2712000" y="1116000"/>
             <a:ext cx="2136000" cy="162000"/>
           </a:xfrm>
           <a:prstGeom prst="rect">
@@ -1728,7 +1730,7 @@
         </p:nvSpPr>
         <p:spPr>
           <a:xfrm>
-            <a:off x="432000" y="1152000"/>
+            <a:off x="432000" y="1116000"/>
             <a:ext cx="2136000" cy="162000"/>
           </a:xfrm>
           <a:prstGeom prst="rect">
@@ -1905,7 +1907,7 @@
         </p:nvSpPr>
         <p:spPr>
           <a:xfrm>
-            <a:off x="2988000" y="1872000"/>
+            <a:off x="2988000" y="1800000"/>
             <a:ext cx="4140000" cy="180000"/>
           </a:xfrm>
           <a:prstGeom prst="rect">
@@ -1957,8 +1959,8 @@
         </p:nvSpPr>
         <p:spPr>
           <a:xfrm>
-            <a:off x="2988000" y="2070000"/>
-            <a:ext cx="4140000" cy="954000"/>
+            <a:off x="2988000" y="1998000"/>
+            <a:ext cx="4140000" cy="864000"/>
           </a:xfrm>
           <a:prstGeom prst="rect">
             <a:avLst/>
@@ -2082,8 +2084,8 @@
         </p:nvSpPr>
         <p:spPr>
           <a:xfrm>
-            <a:off x="2088000" y="1872000"/>
-            <a:ext cx="684000" cy="1152000"/>
+            <a:off x="2088000" y="1800000"/>
+            <a:ext cx="684000" cy="1008000"/>
           </a:xfrm>
           <a:prstGeom prst="roundRect">
             <a:avLst>
@@ -2112,8 +2114,8 @@
         </p:nvSpPr>
         <p:spPr>
           <a:xfrm>
-            <a:off x="2088000" y="1944000"/>
-            <a:ext cx="684000" cy="684000"/>
+            <a:off x="2088000" y="1836000"/>
+            <a:ext cx="684000" cy="576000"/>
           </a:xfrm>
           <a:prstGeom prst="rect">
             <a:avLst/>
@@ -2237,7 +2239,7 @@
         </p:nvSpPr>
         <p:spPr>
           <a:xfrm>
-            <a:off x="2052000" y="2646000"/>
+            <a:off x="2052000" y="2466000"/>
             <a:ext cx="756000" cy="324000"/>
           </a:xfrm>
           <a:prstGeom prst="rect">
@@ -2285,8 +2287,8 @@
         </p:nvSpPr>
         <p:spPr>
           <a:xfrm>
-            <a:off x="1260000" y="1872000"/>
-            <a:ext cx="684000" cy="1152000"/>
+            <a:off x="1260000" y="1800000"/>
+            <a:ext cx="684000" cy="1008000"/>
           </a:xfrm>
           <a:prstGeom prst="roundRect">
             <a:avLst>
@@ -2315,8 +2317,8 @@
         </p:nvSpPr>
         <p:spPr>
           <a:xfrm>
-            <a:off x="1260000" y="1944000"/>
-            <a:ext cx="684000" cy="684000"/>
+            <a:off x="1260000" y="1836000"/>
+            <a:ext cx="684000" cy="576000"/>
           </a:xfrm>
           <a:prstGeom prst="rect">
             <a:avLst/>
@@ -2440,7 +2442,7 @@
         </p:nvSpPr>
         <p:spPr>
           <a:xfrm>
-            <a:off x="1224000" y="2646000"/>
+            <a:off x="1224000" y="2466000"/>
             <a:ext cx="756000" cy="324000"/>
           </a:xfrm>
           <a:prstGeom prst="rect">
@@ -2488,8 +2490,8 @@
         </p:nvSpPr>
         <p:spPr>
           <a:xfrm>
-            <a:off x="432000" y="1872000"/>
-            <a:ext cx="684000" cy="1152000"/>
+            <a:off x="432000" y="1800000"/>
+            <a:ext cx="684000" cy="1008000"/>
           </a:xfrm>
           <a:prstGeom prst="roundRect">
             <a:avLst>
@@ -2518,8 +2520,8 @@
         </p:nvSpPr>
         <p:spPr>
           <a:xfrm>
-            <a:off x="432000" y="1944000"/>
-            <a:ext cx="684000" cy="684000"/>
+            <a:off x="432000" y="1836000"/>
+            <a:ext cx="684000" cy="576000"/>
           </a:xfrm>
           <a:prstGeom prst="rect">
             <a:avLst/>
@@ -2643,7 +2645,7 @@
         </p:nvSpPr>
         <p:spPr>
           <a:xfrm>
-            <a:off x="396000" y="2646000"/>
+            <a:off x="396000" y="2466000"/>
             <a:ext cx="756000" cy="324000"/>
           </a:xfrm>
           <a:prstGeom prst="rect">
@@ -2691,7 +2693,7 @@
         </p:nvSpPr>
         <p:spPr>
           <a:xfrm>
-            <a:off x="6984000" y="3297600"/>
+            <a:off x="6984000" y="3117600"/>
             <a:ext cx="144000" cy="144000"/>
           </a:xfrm>
           <a:prstGeom prst="ellipse">
@@ -2713,7 +2715,7 @@
         </p:nvSpPr>
         <p:spPr>
           <a:xfrm>
-            <a:off x="7029000" y="3342600"/>
+            <a:off x="7029000" y="3162600"/>
             <a:ext cx="54000" cy="54000"/>
           </a:xfrm>
           <a:prstGeom prst="ellipse">
@@ -2735,7 +2737,7 @@
         </p:nvSpPr>
         <p:spPr>
           <a:xfrm>
-            <a:off x="2214000" y="3225600"/>
+            <a:off x="2214000" y="3045600"/>
             <a:ext cx="4680000" cy="288000"/>
           </a:xfrm>
           <a:prstGeom prst="rect">
@@ -2787,8 +2789,8 @@
         </p:nvSpPr>
         <p:spPr>
           <a:xfrm>
-            <a:off x="432000" y="3510000"/>
-            <a:ext cx="6696000" cy="1368000"/>
+            <a:off x="432000" y="3330000"/>
+            <a:ext cx="6696000" cy="1296000"/>
           </a:xfrm>
           <a:prstGeom prst="rect">
             <a:avLst/>
@@ -2808,7 +2810,7 @@
                 <a:spcPts val="0"/>
               </a:spcBef>
               <a:spcAft>
-                <a:spcPts val="200"/>
+                <a:spcPts val="100"/>
               </a:spcAft>
               <a:buClr>
                 <a:srgbClr val="127A5B"/>
@@ -2832,7 +2834,7 @@
                 <a:spcPts val="0"/>
               </a:spcBef>
               <a:spcAft>
-                <a:spcPts val="200"/>
+                <a:spcPts val="100"/>
               </a:spcAft>
               <a:buClr>
                 <a:srgbClr val="5F6B7A"/>
@@ -2856,7 +2858,7 @@
                 <a:spcPts val="0"/>
               </a:spcBef>
               <a:spcAft>
-                <a:spcPts val="200"/>
+                <a:spcPts val="100"/>
               </a:spcAft>
               <a:buClr>
                 <a:srgbClr val="5F6B7A"/>
@@ -2880,7 +2882,7 @@
                 <a:spcPts val="0"/>
               </a:spcBef>
               <a:spcAft>
-                <a:spcPts val="200"/>
+                <a:spcPts val="100"/>
               </a:spcAft>
               <a:buClr>
                 <a:srgbClr val="5F6B7A"/>
@@ -2904,7 +2906,7 @@
                 <a:spcPts val="0"/>
               </a:spcBef>
               <a:spcAft>
-                <a:spcPts val="200"/>
+                <a:spcPts val="100"/>
               </a:spcAft>
               <a:buClr>
                 <a:srgbClr val="5F6B7A"/>
@@ -2937,7 +2939,7 @@
         </p:nvSpPr>
         <p:spPr>
           <a:xfrm>
-            <a:off x="6984000" y="5133600"/>
+            <a:off x="6984000" y="4881600"/>
             <a:ext cx="144000" cy="144000"/>
           </a:xfrm>
           <a:prstGeom prst="ellipse">
@@ -2959,7 +2961,7 @@
         </p:nvSpPr>
         <p:spPr>
           <a:xfrm>
-            <a:off x="7029000" y="5178600"/>
+            <a:off x="7029000" y="4926600"/>
             <a:ext cx="54000" cy="54000"/>
           </a:xfrm>
           <a:prstGeom prst="ellipse">
@@ -2981,7 +2983,7 @@
         </p:nvSpPr>
         <p:spPr>
           <a:xfrm>
-            <a:off x="2214000" y="5061600"/>
+            <a:off x="2214000" y="4809600"/>
             <a:ext cx="4680000" cy="288000"/>
           </a:xfrm>
           <a:prstGeom prst="rect">
@@ -3029,7 +3031,7 @@
         </p:nvSpPr>
         <p:spPr>
           <a:xfrm>
-            <a:off x="6984000" y="7185600"/>
+            <a:off x="6984000" y="6897600"/>
             <a:ext cx="144000" cy="144000"/>
           </a:xfrm>
           <a:prstGeom prst="ellipse">
@@ -3051,7 +3053,7 @@
         </p:nvSpPr>
         <p:spPr>
           <a:xfrm>
-            <a:off x="7029000" y="7230600"/>
+            <a:off x="7029000" y="6942600"/>
             <a:ext cx="54000" cy="54000"/>
           </a:xfrm>
           <a:prstGeom prst="ellipse">
@@ -3073,7 +3075,7 @@
         </p:nvSpPr>
         <p:spPr>
           <a:xfrm>
-            <a:off x="2214000" y="7113600"/>
+            <a:off x="2214000" y="6825600"/>
             <a:ext cx="4680000" cy="288000"/>
           </a:xfrm>
           <a:prstGeom prst="rect">
@@ -3125,8 +3127,8 @@
         </p:nvSpPr>
         <p:spPr>
           <a:xfrm>
-            <a:off x="432000" y="7398000"/>
-            <a:ext cx="6696000" cy="1368000"/>
+            <a:off x="432000" y="7110000"/>
+            <a:ext cx="6696000" cy="1296000"/>
           </a:xfrm>
           <a:prstGeom prst="rect">
             <a:avLst/>
@@ -3146,7 +3148,7 @@
                 <a:spcPts val="0"/>
               </a:spcBef>
               <a:spcAft>
-                <a:spcPts val="200"/>
+                <a:spcPts val="100"/>
               </a:spcAft>
               <a:buClr>
                 <a:srgbClr val="6459A7"/>
@@ -3170,7 +3172,7 @@
                 <a:spcPts val="0"/>
               </a:spcBef>
               <a:spcAft>
-                <a:spcPts val="200"/>
+                <a:spcPts val="100"/>
               </a:spcAft>
               <a:buClr>
                 <a:srgbClr val="5F6B7A"/>
@@ -3194,7 +3196,7 @@
                 <a:spcPts val="0"/>
               </a:spcBef>
               <a:spcAft>
-                <a:spcPts val="200"/>
+                <a:spcPts val="100"/>
               </a:spcAft>
               <a:buClr>
                 <a:srgbClr val="5F6B7A"/>
@@ -3218,7 +3220,7 @@
                 <a:spcPts val="0"/>
               </a:spcBef>
               <a:spcAft>
-                <a:spcPts val="200"/>
+                <a:spcPts val="100"/>
               </a:spcAft>
               <a:buClr>
                 <a:srgbClr val="5F6B7A"/>
@@ -3242,7 +3244,7 @@
                 <a:spcPts val="0"/>
               </a:spcBef>
               <a:spcAft>
-                <a:spcPts val="200"/>
+                <a:spcPts val="100"/>
               </a:spcAft>
               <a:buClr>
                 <a:srgbClr val="5F6B7A"/>
@@ -3275,8 +3277,8 @@
         </p:nvSpPr>
         <p:spPr>
           <a:xfrm>
-            <a:off x="3708000" y="8892000"/>
-            <a:ext cx="3420000" cy="1080000"/>
+            <a:off x="3708000" y="8568000"/>
+            <a:ext cx="3420000" cy="1404000"/>
           </a:xfrm>
           <a:prstGeom prst="roundRect">
             <a:avLst>
@@ -3301,7 +3303,7 @@
         </p:nvSpPr>
         <p:spPr>
           <a:xfrm>
-            <a:off x="3852000" y="8964000"/>
+            <a:off x="3852000" y="8640000"/>
             <a:ext cx="3132000" cy="234000"/>
           </a:xfrm>
           <a:prstGeom prst="rect">
@@ -3353,8 +3355,8 @@
         </p:nvSpPr>
         <p:spPr>
           <a:xfrm>
-            <a:off x="3852000" y="9234000"/>
-            <a:ext cx="3132000" cy="666000"/>
+            <a:off x="3852000" y="8910000"/>
+            <a:ext cx="3132000" cy="990000"/>
           </a:xfrm>
           <a:prstGeom prst="rect">
             <a:avLst/>
@@ -3377,7 +3379,7 @@
                 <a:spcPts val="0"/>
               </a:spcAft>
               <a:buNone/>
-              <a:defRPr lang="ar-SA" sz="1150" dirty="0">
+              <a:defRPr lang="ar-SA" sz="1050" dirty="0">
                 <a:solidFill>
                   <a:srgbClr val="1F2A37"/>
                 </a:solidFill>
@@ -3396,7 +3398,7 @@
                 <a:spcPts val="0"/>
               </a:spcAft>
               <a:buNone/>
-              <a:defRPr lang="ar-SA" sz="1050" dirty="0">
+              <a:defRPr lang="ar-SA" sz="950" dirty="0">
                 <a:solidFill>
                   <a:srgbClr val="5F6B7A"/>
                 </a:solidFill>
@@ -3415,7 +3417,7 @@
                 <a:spcPts val="0"/>
               </a:spcAft>
               <a:buNone/>
-              <a:defRPr lang="ar-SA" sz="1050" dirty="0">
+              <a:defRPr lang="ar-SA" sz="950" dirty="0">
                 <a:solidFill>
                   <a:srgbClr val="5F6B7A"/>
                 </a:solidFill>
@@ -3434,7 +3436,7 @@
                 <a:spcPts val="0"/>
               </a:spcAft>
               <a:buNone/>
-              <a:defRPr lang="ar-SA" sz="1050" dirty="0">
+              <a:defRPr lang="ar-SA" sz="950" dirty="0">
                 <a:solidFill>
                   <a:srgbClr val="5F6B7A"/>
                 </a:solidFill>
@@ -3453,7 +3455,7 @@
                 <a:spcPts val="0"/>
               </a:spcAft>
               <a:buNone/>
-              <a:defRPr lang="ar-SA" sz="1050" dirty="0">
+              <a:defRPr lang="ar-SA" sz="950" dirty="0">
                 <a:solidFill>
                   <a:srgbClr val="5F6B7A"/>
                 </a:solidFill>
@@ -3465,7 +3467,7 @@
           <a:p>
             <a:r>
               <a:rPr lang="ar-SA" dirty="0"/>
-              <a:t>المطلوب: … | قبل: (التاريخ) | أثر التأخير: … (اتركه فارغًا إن لم يوجد)</a:t>
+              <a:t>المطلوب: … | المهلة: (التاريخ) | أثر التأخير: … (إن لم يوجد، اكتب: لا يوجد قرار مطلوب)</a:t>
             </a:r>
           </a:p>
         </p:txBody>
@@ -3478,8 +3480,8 @@
         </p:nvSpPr>
         <p:spPr>
           <a:xfrm>
-            <a:off x="432000" y="8892000"/>
-            <a:ext cx="3132000" cy="1080000"/>
+            <a:off x="432000" y="8568000"/>
+            <a:ext cx="3132000" cy="1404000"/>
           </a:xfrm>
           <a:prstGeom prst="roundRect">
             <a:avLst>
@@ -3504,7 +3506,7 @@
         </p:nvSpPr>
         <p:spPr>
           <a:xfrm>
-            <a:off x="576000" y="8964000"/>
+            <a:off x="576000" y="8640000"/>
             <a:ext cx="2844000" cy="234000"/>
           </a:xfrm>
           <a:prstGeom prst="rect">
@@ -3556,8 +3558,8 @@
         </p:nvSpPr>
         <p:spPr>
           <a:xfrm>
-            <a:off x="576000" y="9234000"/>
-            <a:ext cx="2844000" cy="666000"/>
+            <a:off x="576000" y="8910000"/>
+            <a:ext cx="2844000" cy="990000"/>
           </a:xfrm>
           <a:prstGeom prst="rect">
             <a:avLst/>
@@ -3668,7 +3670,7 @@
           <a:p>
             <a:r>
               <a:rPr lang="ar-SA" dirty="0"/>
-              <a:t>جملة واحدة: السبب ← الأثر ← الموعد الجديد ← هل يحتاج تدخّلك؟ (اتركه فارغًا إن لم يوجد)</a:t>
+              <a:t>جملة واحدة: السبب ← الأثر ← الموعد الجديد ← هل يحتاج تدخّل المدير؟ (إن لم يوجد، اكتب: لا توجد تحديات)</a:t>
             </a:r>
           </a:p>
         </p:txBody>
@@ -3697,7 +3699,7 @@
       </p:cxnSp>
       <p:sp>
         <p:nvSpPr>
-          <p:cNvPr id="61" name="تسمية إعداد:"/>
+          <p:cNvPr id="61" name="تسمية الاسم:"/>
           <p:cNvSpPr txBox="1"/>
           <p:nvPr/>
         </p:nvSpPr>
@@ -3738,7 +3740,7 @@
                 <a:latin typeface="IBM Plex Sans Arabic"/>
                 <a:cs typeface="IBM Plex Sans Arabic"/>
               </a:rPr>
-              <a:t>إعداد:</a:t>
+              <a:t>الاسم:</a:t>
             </a:r>
           </a:p>
         </p:txBody>
@@ -3872,64 +3874,16 @@
           </a:p>
         </p:txBody>
       </p:sp>
-      <p:sp>
-        <p:nvSpPr>
-          <p:cNvPr id="63" name="تسمية التوقيع:"/>
-          <p:cNvSpPr txBox="1"/>
-          <p:nvPr/>
-        </p:nvSpPr>
-        <p:spPr>
-          <a:xfrm>
-            <a:off x="4572000" y="10206000"/>
-            <a:ext cx="540000" cy="252000"/>
-          </a:xfrm>
-          <a:prstGeom prst="rect">
-            <a:avLst/>
-          </a:prstGeom>
-          <a:noFill/>
-          <a:ln>
-            <a:noFill/>
-          </a:ln>
-        </p:spPr>
-        <p:txBody>
-          <a:bodyPr wrap="square" lIns="0" tIns="0" rIns="0" bIns="0" rtlCol="0" anchor="ctr"/>
-          <a:lstStyle/>
-          <a:p>
-            <a:pPr marL="0" indent="0" algn="r" rtl="1">
-              <a:lnSpc>
-                <a:spcPct val="100000"/>
-              </a:lnSpc>
-              <a:spcBef>
-                <a:spcPts val="0"/>
-              </a:spcBef>
-              <a:spcAft>
-                <a:spcPts val="0"/>
-              </a:spcAft>
-              <a:buNone/>
-            </a:pPr>
-            <a:r>
-              <a:rPr lang="ar-SA" sz="950" b="1" dirty="0">
-                <a:solidFill>
-                  <a:srgbClr val="5F6B7A"/>
-                </a:solidFill>
-                <a:latin typeface="IBM Plex Sans Arabic"/>
-                <a:cs typeface="IBM Plex Sans Arabic"/>
-              </a:rPr>
-              <a:t>التوقيع:</a:t>
-            </a:r>
-          </a:p>
-        </p:txBody>
-      </p:sp>
       <p:cxnSp>
         <p:nvCxnSpPr>
-          <p:cNvPr id="64" name="خط التوقيع"/>
+          <p:cNvPr id="63" name="خط الاسم"/>
           <p:cNvCxnSpPr/>
           <p:nvPr/>
         </p:nvCxnSpPr>
         <p:spPr>
           <a:xfrm>
-            <a:off x="3348000" y="10414800"/>
-            <a:ext cx="1188000" cy="0"/>
+            <a:off x="5256000" y="10414800"/>
+            <a:ext cx="1368000" cy="0"/>
           </a:xfrm>
           <a:prstGeom prst="line">
             <a:avLst/>
@@ -3944,7 +3898,77 @@
       </p:cxnSp>
       <p:sp>
         <p:nvSpPr>
-          <p:cNvPr id="65" name="تسمية التاريخ:"/>
+          <p:cNvPr id="64" name="تسمية التوقيع:"/>
+          <p:cNvSpPr txBox="1"/>
+          <p:nvPr/>
+        </p:nvSpPr>
+        <p:spPr>
+          <a:xfrm>
+            <a:off x="4572000" y="10206000"/>
+            <a:ext cx="540000" cy="252000"/>
+          </a:xfrm>
+          <a:prstGeom prst="rect">
+            <a:avLst/>
+          </a:prstGeom>
+          <a:noFill/>
+          <a:ln>
+            <a:noFill/>
+          </a:ln>
+        </p:spPr>
+        <p:txBody>
+          <a:bodyPr wrap="square" lIns="0" tIns="0" rIns="0" bIns="0" rtlCol="0" anchor="ctr"/>
+          <a:lstStyle/>
+          <a:p>
+            <a:pPr marL="0" indent="0" algn="r" rtl="1">
+              <a:lnSpc>
+                <a:spcPct val="100000"/>
+              </a:lnSpc>
+              <a:spcBef>
+                <a:spcPts val="0"/>
+              </a:spcBef>
+              <a:spcAft>
+                <a:spcPts val="0"/>
+              </a:spcAft>
+              <a:buNone/>
+            </a:pPr>
+            <a:r>
+              <a:rPr lang="ar-SA" sz="950" b="1" dirty="0">
+                <a:solidFill>
+                  <a:srgbClr val="5F6B7A"/>
+                </a:solidFill>
+                <a:latin typeface="IBM Plex Sans Arabic"/>
+                <a:cs typeface="IBM Plex Sans Arabic"/>
+              </a:rPr>
+              <a:t>التوقيع:</a:t>
+            </a:r>
+          </a:p>
+        </p:txBody>
+      </p:sp>
+      <p:cxnSp>
+        <p:nvCxnSpPr>
+          <p:cNvPr id="65" name="خط التوقيع"/>
+          <p:cNvCxnSpPr/>
+          <p:nvPr/>
+        </p:nvCxnSpPr>
+        <p:spPr>
+          <a:xfrm>
+            <a:off x="3348000" y="10414800"/>
+            <a:ext cx="1188000" cy="0"/>
+          </a:xfrm>
+          <a:prstGeom prst="line">
+            <a:avLst/>
+          </a:prstGeom>
+          <a:ln w="9525" cap="rnd">
+            <a:solidFill>
+              <a:srgbClr val="BFC6D1"/>
+            </a:solidFill>
+            <a:round/>
+          </a:ln>
+        </p:spPr>
+      </p:cxnSp>
+      <p:sp>
+        <p:nvSpPr>
+          <p:cNvPr id="66" name="تسمية التاريخ:"/>
           <p:cNvSpPr txBox="1"/>
           <p:nvPr/>
         </p:nvSpPr>
@@ -3992,7 +4016,7 @@
       </p:sp>
       <p:sp>
         <p:nvSpPr>
-          <p:cNvPr id="66" name="تاريخ التوقيع"/>
+          <p:cNvPr id="67" name="تاريخ التوقيع"/>
           <p:cNvSpPr>
             <a:spLocks noGrp="1"/>
           </p:cNvSpPr>
@@ -4119,16 +4143,38 @@
           </a:p>
         </p:txBody>
       </p:sp>
-      <p:sp>
-        <p:nvSpPr>
-          <p:cNvPr id="67" name="نص التذييل الثابت"/>
+      <p:cxnSp>
+        <p:nvCxnSpPr>
+          <p:cNvPr id="68" name="خط التاريخ"/>
+          <p:cNvCxnSpPr/>
+          <p:nvPr/>
+        </p:nvCxnSpPr>
+        <p:spPr>
+          <a:xfrm>
+            <a:off x="1692000" y="10414800"/>
+            <a:ext cx="1008000" cy="0"/>
+          </a:xfrm>
+          <a:prstGeom prst="line">
+            <a:avLst/>
+          </a:prstGeom>
+          <a:ln w="9525" cap="rnd">
+            <a:solidFill>
+              <a:srgbClr val="BFC6D1"/>
+            </a:solidFill>
+            <a:round/>
+          </a:ln>
+        </p:spPr>
+      </p:cxnSp>
+      <p:sp>
+        <p:nvSpPr>
+          <p:cNvPr id="69" name="نص التذييل الثابت"/>
           <p:cNvSpPr txBox="1"/>
           <p:nvPr/>
         </p:nvSpPr>
         <p:spPr>
           <a:xfrm>
             <a:off x="432000" y="10206000"/>
-            <a:ext cx="1440000" cy="252000"/>
+            <a:ext cx="1152000" cy="252000"/>
           </a:xfrm>
           <a:prstGeom prst="rect">
             <a:avLst/>
@@ -4155,14 +4201,14 @@
               <a:buNone/>
             </a:pPr>
             <a:r>
-              <a:rPr lang="ar-SA" sz="850" dirty="0">
+              <a:rPr lang="ar-SA" sz="900" dirty="0">
                 <a:solidFill>
                   <a:srgbClr val="6C727E"/>
                 </a:solidFill>
                 <a:latin typeface="IBM Plex Sans Arabic"/>
                 <a:cs typeface="IBM Plex Sans Arabic"/>
               </a:rPr>
-              <a:t>تقرير أسبوعي — للاستخدام الداخلي</a:t>
+              <a:t>للاستخدام الداخلي</a:t>
             </a:r>
           </a:p>
         </p:txBody>
@@ -4730,7 +4776,7 @@
             <a:pPr algn="r" rtl="1"/>
             <a:r>
               <a:rPr lang="ar-SA" dirty="0"/>
-              <a:t>الإدارة العامة للتحول الرقمي — إدارة البيانات والتحليلات</a:t>
+              <a:t>الإدارة العامة للتحول الرقمي — إدارة البيانات</a:t>
             </a:r>
           </a:p>
         </p:txBody>
@@ -4830,7 +4876,7 @@
             <a:pPr algn="r" rtl="1"/>
             <a:r>
               <a:rPr lang="ar-SA" dirty="0"/>
-              <a:t>أُطلقت لوحة مؤشرات الأداء واعتمدتها 3 إدارات، وأُنجزت 4 مهام. مهمتان ضمن الجدول، ومهمة (تكامل الموارد البشرية) متأخرة أسبوعًا. مطلوب قرار واحد قبل 2 نوفمبر (أدناه).</a:t>
+              <a:t>أُطلقت لوحة مؤشرات الأداء واعتمدتها 3 إدارات، وأُنجزت 4 مهام. مهمتان على المسار ومهمة (تكامل الموارد البشرية) متأخرة أسبوعًا. مطلوب اعتماد طلب ACC-214 قبل الاثنين 2 نوفمبر (أدناه).</a:t>
             </a:r>
           </a:p>
         </p:txBody>
@@ -5113,7 +5159,7 @@
             </a:r>
             <a:r>
               <a:rPr lang="ar-SA" dirty="0"/>
-              <a:t> اعتماد صلاحية «قراءة» لبيانات المستفيدين لفريق التحليلات (3 موظفين)، طلب رقم ACC-214.</a:t>
+              <a:t> اعتماد طلب الصلاحية ACC-214 لفريق التحليلات لربط التكامل بمعرّفات المستفيدين.</a:t>
             </a:r>
           </a:p>
           <a:p>
@@ -5123,11 +5169,11 @@
                 <a:latin typeface="IBM Plex Sans Arabic"/>
                 <a:cs typeface="IBM Plex Sans Arabic"/>
               </a:rPr>
-              <a:t>قبل:</a:t>
+              <a:t>المهلة:</a:t>
             </a:r>
             <a:r>
               <a:rPr lang="ar-SA" dirty="0"/>
-              <a:t> الأحد 2 نوفمبر، ليبقى موعد 12 نوفمبر قابلًا للتحقيق.</a:t>
+              <a:t> الاثنين 2 نوفمبر، لحماية موعد 12 نوفمبر.</a:t>
             </a:r>
           </a:p>
           <a:p>
@@ -5141,7 +5187,7 @@
             </a:r>
             <a:r>
               <a:rPr lang="ar-SA" dirty="0"/>
-              <a:t> يتأخر التكامل أسبوعًا عن كل أسبوع تأخير.</a:t>
+              <a:t> يتأخر التكامل أسبوعًا لكل أسبوع.</a:t>
             </a:r>
           </a:p>
         </p:txBody>
@@ -5166,7 +5212,7 @@
             <a:pPr algn="r" rtl="1"/>
             <a:r>
               <a:rPr lang="ar-SA" dirty="0"/>
-              <a:t>تأخر استلام بيانات الموارد البشرية (تغيّر مسؤول النظام لديهم) — الأثر: تأخر مهمة التكامل أسبوعًا؛ الموعد الجديد للتسليم 9 نوفمبر؛ لا يحتاج تدخّلًا.</a:t>
+              <a:t>تأخر استلام بيانات الموارد البشرية بسبب تغيّر مسؤول النظام لديهم — الأثر: تأخر مهمة التكامل أسبوعًا (الموعد المعدّل 12 نوفمبر بدل 4 نوفمبر)؛ تصل البيانات 9 نوفمبر؛ لا يحتاج تدخّلًا.</a:t>
             </a:r>
           </a:p>
         </p:txBody>
@@ -5230,7 +5276,7 @@
           <p:nvPr/>
         </p:nvGraphicFramePr>
         <p:xfrm>
-          <a:off x="432000" y="5346000"/>
+          <a:off x="432000" y="5094000"/>
           <a:ext cx="6696000" cy="1242000"/>
         </p:xfrm>
         <a:graphic>
@@ -5240,10 +5286,10 @@
                 <a:tableStyleId>{2D5ABB26-0587-4C30-8999-92F81FD0307C}</a:tableStyleId>
               </a:tblPr>
               <a:tblGrid>
-                <a:gridCol w="3240000"/>
-                <a:gridCol w="864000"/>
-                <a:gridCol w="1224000"/>
-                <a:gridCol w="1368000"/>
+                <a:gridCol w="3168000"/>
+                <a:gridCol w="1080000"/>
+                <a:gridCol w="1152000"/>
+                <a:gridCol w="1296000"/>
               </a:tblGrid>
               <a:tr h="270000">
                 <a:tc>
@@ -5811,7 +5857,7 @@
                           <a:latin typeface="IBM Plex Sans Arabic Medium"/>
                           <a:cs typeface="IBM Plex Sans Arabic Medium"/>
                         </a:rPr>
-                        <a:t>متأخر أسبوعًا</a:t>
+                        <a:t>متأخر</a:t>
                       </a:r>
                     </a:p>
                   </a:txBody>
@@ -5957,7 +6003,7 @@
                           <a:latin typeface="IBM Plex Sans Arabic Medium"/>
                           <a:cs typeface="IBM Plex Sans Arabic Medium"/>
                         </a:rPr>
-                        <a:t>20 نوفمبر 2026</a:t>
+                        <a:t>19 نوفمبر 2026</a:t>
                       </a:r>
                     </a:p>
                   </a:txBody>
@@ -7111,7 +7157,7 @@
                 <a:latin typeface="IBM Plex Sans Arabic"/>
                 <a:cs typeface="IBM Plex Sans Arabic"/>
               </a:rPr>
-              <a:t>ابدأ كل مهمة بالنتيجة لا بالنشاط («نُشرت اللوحة واعتمدتها 3 إدارات» بدل «عملت على اللوحة»). خمسة بنود كحد أقصى لكل قسم. بنود الأسبوع المقبل: نتيجة + يوم. الأعداد في الخلاصة تطابق البطاقات وحالات الجدول. التحديات: السبب ← الأثر ← الموعد الجديد ← هل يحتاج تدخّلك؟ القرار المطلوب: طلب واحد بموعد وأثر للتأخير.</a:t>
+              <a:t>ابدأ كل مهمة بالنتيجة لا بالنشاط («نُشرت اللوحة واعتمدتها 3 إدارات» بدل «عملت على اللوحة»). خمسة بنود كحد أقصى لكل قسم. بنود الأسبوع المقبل: نتيجة + يوم. الأعداد في الخلاصة تطابق البطاقات وحالات الجدول. التحديات: السبب ← الأثر ← الموعد الجديد ← هل يحتاج تدخّل المدير؟ القرار المطلوب: طلب واحد بمهلة وأثر للتأخير.</a:t>
             </a:r>
           </a:p>
         </p:txBody>
